--- a/NCT-Slide-Template-Corp-Demo.pptx
+++ b/NCT-Slide-Template-Corp-Demo.pptx
@@ -120,20 +120,9 @@
   <p:cSld name="01 Title Slide">
     <p:bg>
       <p:bgPr>
-        <a:gradFill rotWithShape="1">
-          <a:gsLst>
-            <a:gs pos="0">
-              <a:srgbClr val="23436D"/>
-            </a:gs>
-            <a:gs pos="55000">
-              <a:srgbClr val="1E5473"/>
-            </a:gs>
-            <a:gs pos="100000">
-              <a:srgbClr val="1A8D92"/>
-            </a:gs>
-          </a:gsLst>
-          <a:lin ang="2700000" scaled="0"/>
-        </a:gradFill>
+        <a:solidFill>
+          <a:srgbClr val="FFFFFF"/>
+        </a:solidFill>
         <a:effectLst/>
       </p:bgPr>
     </p:bg>
@@ -151,27 +140,79 @@
           <a:chExt cx="0" cy="0"/>
         </a:xfrm>
       </p:grpSpPr>
-      <p:sp>
-        <p:nvSpPr>
-          <p:cNvPr id="10" name="Decor Diamond"/>
+      <p:pic>
+        <p:nvPicPr>
+          <p:cNvPr id="10" name="Watermark A"/>
+          <p:cNvPicPr>
+            <a:picLocks noChangeAspect="1"/>
+          </p:cNvPicPr>
+          <p:nvPr/>
+        </p:nvPicPr>
+        <p:blipFill>
+          <a:blip r:embed="rId3">
+            <a:alphaModFix amt="3500"/>
+          </a:blip>
+          <a:stretch>
+            <a:fillRect/>
+          </a:stretch>
+        </p:blipFill>
+        <p:spPr>
+          <a:xfrm>
+            <a:off x="1371600" y="-2103120"/>
+            <a:ext cx="7315200" cy="4653280"/>
+          </a:xfrm>
+          <a:prstGeom prst="rect">
+            <a:avLst/>
+          </a:prstGeom>
+        </p:spPr>
+      </p:pic>
+      <p:pic>
+        <p:nvPicPr>
+          <p:cNvPr id="11" name="Watermark B"/>
+          <p:cNvPicPr>
+            <a:picLocks noChangeAspect="1"/>
+          </p:cNvPicPr>
+          <p:nvPr/>
+        </p:nvPicPr>
+        <p:blipFill>
+          <a:blip r:embed="rId3">
+            <a:alphaModFix amt="3500"/>
+          </a:blip>
+          <a:stretch>
+            <a:fillRect/>
+          </a:stretch>
+        </p:blipFill>
+        <p:spPr>
+          <a:xfrm>
+            <a:off x="4114800" y="2286000"/>
+            <a:ext cx="7315200" cy="4653280"/>
+          </a:xfrm>
+          <a:prstGeom prst="rect">
+            <a:avLst/>
+          </a:prstGeom>
+        </p:spPr>
+      </p:pic>
+      <p:sp>
+        <p:nvSpPr>
+          <p:cNvPr id="12" name="Scatter 1"/>
           <p:cNvSpPr/>
           <p:nvPr/>
         </p:nvSpPr>
         <p:spPr>
           <a:xfrm>
-            <a:off x="8534400" y="-914400"/>
-            <a:ext cx="4572000" cy="4572000"/>
-          </a:xfrm>
-          <a:prstGeom prst="diamond">
-            <a:avLst/>
-          </a:prstGeom>
-          <a:noFill/>
-          <a:ln w="19050">
-            <a:solidFill>
-              <a:srgbClr val="FFFFFF">
-                <a:alpha val="9000"/>
-              </a:srgbClr>
-            </a:solidFill>
+            <a:off x="10290552" y="298450"/>
+            <a:ext cx="491103" cy="431800"/>
+          </a:xfrm>
+          <a:prstGeom prst="rect">
+            <a:avLst/>
+          </a:prstGeom>
+          <a:solidFill>
+            <a:srgbClr val="1E5473">
+              <a:alpha val="10000"/>
+            </a:srgbClr>
+          </a:solidFill>
+          <a:ln>
+            <a:noFill/>
           </a:ln>
         </p:spPr>
         <p:txBody>
@@ -184,25 +225,831 @@
       </p:sp>
       <p:sp>
         <p:nvSpPr>
-          <p:cNvPr id="11" name="Decor Diamond"/>
+          <p:cNvPr id="13" name="Scatter 2"/>
           <p:cNvSpPr/>
           <p:nvPr/>
         </p:nvSpPr>
         <p:spPr>
           <a:xfrm>
-            <a:off x="9906000" y="2743200"/>
-            <a:ext cx="2743200" cy="2743200"/>
-          </a:xfrm>
-          <a:prstGeom prst="diamond">
-            <a:avLst/>
-          </a:prstGeom>
-          <a:noFill/>
-          <a:ln w="19050">
-            <a:solidFill>
-              <a:srgbClr val="FFFFFF">
-                <a:alpha val="7000"/>
-              </a:srgbClr>
-            </a:solidFill>
+            <a:off x="10517214" y="184150"/>
+            <a:ext cx="264440" cy="546100"/>
+          </a:xfrm>
+          <a:prstGeom prst="rect">
+            <a:avLst/>
+          </a:prstGeom>
+          <a:solidFill>
+            <a:srgbClr val="1E5473">
+              <a:alpha val="33000"/>
+            </a:srgbClr>
+          </a:solidFill>
+          <a:ln>
+            <a:noFill/>
+          </a:ln>
+        </p:spPr>
+        <p:txBody>
+          <a:bodyPr/>
+          <a:lstStyle/>
+          <a:p>
+            <a:endParaRPr lang="th-TH"/>
+          </a:p>
+        </p:txBody>
+      </p:sp>
+      <p:sp>
+        <p:nvSpPr>
+          <p:cNvPr id="14" name="Scatter 3"/>
+          <p:cNvSpPr/>
+          <p:nvPr/>
+        </p:nvSpPr>
+        <p:spPr>
+          <a:xfrm>
+            <a:off x="11486827" y="400050"/>
+            <a:ext cx="377771" cy="558800"/>
+          </a:xfrm>
+          <a:prstGeom prst="rect">
+            <a:avLst/>
+          </a:prstGeom>
+          <a:solidFill>
+            <a:srgbClr val="1E5473">
+              <a:alpha val="75000"/>
+            </a:srgbClr>
+          </a:solidFill>
+          <a:ln>
+            <a:noFill/>
+          </a:ln>
+        </p:spPr>
+        <p:txBody>
+          <a:bodyPr/>
+          <a:lstStyle/>
+          <a:p>
+            <a:endParaRPr lang="th-TH"/>
+          </a:p>
+        </p:txBody>
+      </p:sp>
+      <p:sp>
+        <p:nvSpPr>
+          <p:cNvPr id="15" name="Scatter 4"/>
+          <p:cNvSpPr/>
+          <p:nvPr/>
+        </p:nvSpPr>
+        <p:spPr>
+          <a:xfrm>
+            <a:off x="9862411" y="577850"/>
+            <a:ext cx="163701" cy="177800"/>
+          </a:xfrm>
+          <a:prstGeom prst="rect">
+            <a:avLst/>
+          </a:prstGeom>
+          <a:solidFill>
+            <a:srgbClr val="1E5473">
+              <a:alpha val="15000"/>
+            </a:srgbClr>
+          </a:solidFill>
+          <a:ln>
+            <a:noFill/>
+          </a:ln>
+        </p:spPr>
+        <p:txBody>
+          <a:bodyPr/>
+          <a:lstStyle/>
+          <a:p>
+            <a:endParaRPr lang="th-TH"/>
+          </a:p>
+        </p:txBody>
+      </p:sp>
+      <p:sp>
+        <p:nvSpPr>
+          <p:cNvPr id="16" name="Scatter 5"/>
+          <p:cNvSpPr/>
+          <p:nvPr/>
+        </p:nvSpPr>
+        <p:spPr>
+          <a:xfrm>
+            <a:off x="11310534" y="577850"/>
+            <a:ext cx="176293" cy="381000"/>
+          </a:xfrm>
+          <a:prstGeom prst="rect">
+            <a:avLst/>
+          </a:prstGeom>
+          <a:solidFill>
+            <a:srgbClr val="1E5473">
+              <a:alpha val="5000"/>
+            </a:srgbClr>
+          </a:solidFill>
+          <a:ln>
+            <a:noFill/>
+          </a:ln>
+        </p:spPr>
+        <p:txBody>
+          <a:bodyPr/>
+          <a:lstStyle/>
+          <a:p>
+            <a:endParaRPr lang="th-TH"/>
+          </a:p>
+        </p:txBody>
+      </p:sp>
+      <p:sp>
+        <p:nvSpPr>
+          <p:cNvPr id="17" name="Scatter 6"/>
+          <p:cNvSpPr/>
+          <p:nvPr/>
+        </p:nvSpPr>
+        <p:spPr>
+          <a:xfrm>
+            <a:off x="10076481" y="971550"/>
+            <a:ext cx="415548" cy="304800"/>
+          </a:xfrm>
+          <a:prstGeom prst="rect">
+            <a:avLst/>
+          </a:prstGeom>
+          <a:solidFill>
+            <a:srgbClr val="1E5473">
+              <a:alpha val="5000"/>
+            </a:srgbClr>
+          </a:solidFill>
+          <a:ln>
+            <a:noFill/>
+          </a:ln>
+        </p:spPr>
+        <p:txBody>
+          <a:bodyPr/>
+          <a:lstStyle/>
+          <a:p>
+            <a:endParaRPr lang="th-TH"/>
+          </a:p>
+        </p:txBody>
+      </p:sp>
+      <p:sp>
+        <p:nvSpPr>
+          <p:cNvPr id="18" name="Scatter 7"/>
+          <p:cNvSpPr/>
+          <p:nvPr/>
+        </p:nvSpPr>
+        <p:spPr>
+          <a:xfrm>
+            <a:off x="10756469" y="1060450"/>
+            <a:ext cx="352586" cy="254000"/>
+          </a:xfrm>
+          <a:prstGeom prst="rect">
+            <a:avLst/>
+          </a:prstGeom>
+          <a:solidFill>
+            <a:srgbClr val="1E5473">
+              <a:alpha val="60000"/>
+            </a:srgbClr>
+          </a:solidFill>
+          <a:ln>
+            <a:noFill/>
+          </a:ln>
+        </p:spPr>
+        <p:txBody>
+          <a:bodyPr/>
+          <a:lstStyle/>
+          <a:p>
+            <a:endParaRPr lang="th-TH"/>
+          </a:p>
+        </p:txBody>
+      </p:sp>
+      <p:sp>
+        <p:nvSpPr>
+          <p:cNvPr id="19" name="Scatter 8"/>
+          <p:cNvSpPr/>
+          <p:nvPr/>
+        </p:nvSpPr>
+        <p:spPr>
+          <a:xfrm>
+            <a:off x="10492030" y="1682750"/>
+            <a:ext cx="516287" cy="393700"/>
+          </a:xfrm>
+          <a:prstGeom prst="rect">
+            <a:avLst/>
+          </a:prstGeom>
+          <a:solidFill>
+            <a:srgbClr val="1E5473">
+              <a:alpha val="50000"/>
+            </a:srgbClr>
+          </a:solidFill>
+          <a:ln>
+            <a:noFill/>
+          </a:ln>
+        </p:spPr>
+        <p:txBody>
+          <a:bodyPr/>
+          <a:lstStyle/>
+          <a:p>
+            <a:endParaRPr lang="th-TH"/>
+          </a:p>
+        </p:txBody>
+      </p:sp>
+      <p:sp>
+        <p:nvSpPr>
+          <p:cNvPr id="20" name="Scatter 9"/>
+          <p:cNvSpPr/>
+          <p:nvPr/>
+        </p:nvSpPr>
+        <p:spPr>
+          <a:xfrm>
+            <a:off x="11587566" y="2228850"/>
+            <a:ext cx="277032" cy="317500"/>
+          </a:xfrm>
+          <a:prstGeom prst="rect">
+            <a:avLst/>
+          </a:prstGeom>
+          <a:solidFill>
+            <a:srgbClr val="1E5473">
+              <a:alpha val="60000"/>
+            </a:srgbClr>
+          </a:solidFill>
+          <a:ln>
+            <a:noFill/>
+          </a:ln>
+        </p:spPr>
+        <p:txBody>
+          <a:bodyPr/>
+          <a:lstStyle/>
+          <a:p>
+            <a:endParaRPr lang="th-TH"/>
+          </a:p>
+        </p:txBody>
+      </p:sp>
+      <p:sp>
+        <p:nvSpPr>
+          <p:cNvPr id="21" name="Scatter 10"/>
+          <p:cNvSpPr/>
+          <p:nvPr/>
+        </p:nvSpPr>
+        <p:spPr>
+          <a:xfrm>
+            <a:off x="9900188" y="2254250"/>
+            <a:ext cx="314809" cy="241300"/>
+          </a:xfrm>
+          <a:prstGeom prst="rect">
+            <a:avLst/>
+          </a:prstGeom>
+          <a:solidFill>
+            <a:srgbClr val="1E5473">
+              <a:alpha val="5000"/>
+            </a:srgbClr>
+          </a:solidFill>
+          <a:ln>
+            <a:noFill/>
+          </a:ln>
+        </p:spPr>
+        <p:txBody>
+          <a:bodyPr/>
+          <a:lstStyle/>
+          <a:p>
+            <a:endParaRPr lang="th-TH"/>
+          </a:p>
+        </p:txBody>
+      </p:sp>
+      <p:sp>
+        <p:nvSpPr>
+          <p:cNvPr id="22" name="Scatter 11"/>
+          <p:cNvSpPr/>
+          <p:nvPr/>
+        </p:nvSpPr>
+        <p:spPr>
+          <a:xfrm>
+            <a:off x="10517214" y="2571750"/>
+            <a:ext cx="491103" cy="457200"/>
+          </a:xfrm>
+          <a:prstGeom prst="rect">
+            <a:avLst/>
+          </a:prstGeom>
+          <a:solidFill>
+            <a:srgbClr val="1E5473">
+              <a:alpha val="5000"/>
+            </a:srgbClr>
+          </a:solidFill>
+          <a:ln>
+            <a:noFill/>
+          </a:ln>
+        </p:spPr>
+        <p:txBody>
+          <a:bodyPr/>
+          <a:lstStyle/>
+          <a:p>
+            <a:endParaRPr lang="th-TH"/>
+          </a:p>
+        </p:txBody>
+      </p:sp>
+      <p:sp>
+        <p:nvSpPr>
+          <p:cNvPr id="23" name="Scatter 12"/>
+          <p:cNvSpPr/>
+          <p:nvPr/>
+        </p:nvSpPr>
+        <p:spPr>
+          <a:xfrm>
+            <a:off x="11033502" y="2889250"/>
+            <a:ext cx="239255" cy="254000"/>
+          </a:xfrm>
+          <a:prstGeom prst="rect">
+            <a:avLst/>
+          </a:prstGeom>
+          <a:solidFill>
+            <a:srgbClr val="1E5473">
+              <a:alpha val="20000"/>
+            </a:srgbClr>
+          </a:solidFill>
+          <a:ln>
+            <a:noFill/>
+          </a:ln>
+        </p:spPr>
+        <p:txBody>
+          <a:bodyPr/>
+          <a:lstStyle/>
+          <a:p>
+            <a:endParaRPr lang="th-TH"/>
+          </a:p>
+        </p:txBody>
+      </p:sp>
+      <p:sp>
+        <p:nvSpPr>
+          <p:cNvPr id="24" name="Scatter 13"/>
+          <p:cNvSpPr/>
+          <p:nvPr/>
+        </p:nvSpPr>
+        <p:spPr>
+          <a:xfrm>
+            <a:off x="11297942" y="3117850"/>
+            <a:ext cx="591842" cy="457200"/>
+          </a:xfrm>
+          <a:prstGeom prst="rect">
+            <a:avLst/>
+          </a:prstGeom>
+          <a:solidFill>
+            <a:srgbClr val="1E5473">
+              <a:alpha val="10000"/>
+            </a:srgbClr>
+          </a:solidFill>
+          <a:ln>
+            <a:noFill/>
+          </a:ln>
+        </p:spPr>
+        <p:txBody>
+          <a:bodyPr/>
+          <a:lstStyle/>
+          <a:p>
+            <a:endParaRPr lang="th-TH"/>
+          </a:p>
+        </p:txBody>
+      </p:sp>
+      <p:sp>
+        <p:nvSpPr>
+          <p:cNvPr id="25" name="Scatter 14"/>
+          <p:cNvSpPr/>
+          <p:nvPr/>
+        </p:nvSpPr>
+        <p:spPr>
+          <a:xfrm>
+            <a:off x="11046094" y="3359150"/>
+            <a:ext cx="125924" cy="114300"/>
+          </a:xfrm>
+          <a:prstGeom prst="rect">
+            <a:avLst/>
+          </a:prstGeom>
+          <a:solidFill>
+            <a:srgbClr val="1E5473">
+              <a:alpha val="50000"/>
+            </a:srgbClr>
+          </a:solidFill>
+          <a:ln>
+            <a:noFill/>
+          </a:ln>
+        </p:spPr>
+        <p:txBody>
+          <a:bodyPr/>
+          <a:lstStyle/>
+          <a:p>
+            <a:endParaRPr lang="th-TH"/>
+          </a:p>
+        </p:txBody>
+      </p:sp>
+      <p:sp>
+        <p:nvSpPr>
+          <p:cNvPr id="26" name="Scatter 15"/>
+          <p:cNvSpPr/>
+          <p:nvPr/>
+        </p:nvSpPr>
+        <p:spPr>
+          <a:xfrm>
+            <a:off x="10655731" y="3549650"/>
+            <a:ext cx="226663" cy="228600"/>
+          </a:xfrm>
+          <a:prstGeom prst="rect">
+            <a:avLst/>
+          </a:prstGeom>
+          <a:solidFill>
+            <a:srgbClr val="1E5473">
+              <a:alpha val="5000"/>
+            </a:srgbClr>
+          </a:solidFill>
+          <a:ln>
+            <a:noFill/>
+          </a:ln>
+        </p:spPr>
+        <p:txBody>
+          <a:bodyPr/>
+          <a:lstStyle/>
+          <a:p>
+            <a:endParaRPr lang="th-TH"/>
+          </a:p>
+        </p:txBody>
+      </p:sp>
+      <p:sp>
+        <p:nvSpPr>
+          <p:cNvPr id="27" name="Scatter 16"/>
+          <p:cNvSpPr/>
+          <p:nvPr/>
+        </p:nvSpPr>
+        <p:spPr>
+          <a:xfrm>
+            <a:off x="11234980" y="3816350"/>
+            <a:ext cx="314809" cy="368300"/>
+          </a:xfrm>
+          <a:prstGeom prst="rect">
+            <a:avLst/>
+          </a:prstGeom>
+          <a:solidFill>
+            <a:srgbClr val="1E5473">
+              <a:alpha val="20000"/>
+            </a:srgbClr>
+          </a:solidFill>
+          <a:ln>
+            <a:noFill/>
+          </a:ln>
+        </p:spPr>
+        <p:txBody>
+          <a:bodyPr/>
+          <a:lstStyle/>
+          <a:p>
+            <a:endParaRPr lang="th-TH"/>
+          </a:p>
+        </p:txBody>
+      </p:sp>
+      <p:sp>
+        <p:nvSpPr>
+          <p:cNvPr id="28" name="Scatter 17"/>
+          <p:cNvSpPr/>
+          <p:nvPr/>
+        </p:nvSpPr>
+        <p:spPr>
+          <a:xfrm>
+            <a:off x="11612751" y="4362450"/>
+            <a:ext cx="176293" cy="266700"/>
+          </a:xfrm>
+          <a:prstGeom prst="rect">
+            <a:avLst/>
+          </a:prstGeom>
+          <a:solidFill>
+            <a:srgbClr val="1E5473">
+              <a:alpha val="50000"/>
+            </a:srgbClr>
+          </a:solidFill>
+          <a:ln>
+            <a:noFill/>
+          </a:ln>
+        </p:spPr>
+        <p:txBody>
+          <a:bodyPr/>
+          <a:lstStyle/>
+          <a:p>
+            <a:endParaRPr lang="th-TH"/>
+          </a:p>
+        </p:txBody>
+      </p:sp>
+      <p:sp>
+        <p:nvSpPr>
+          <p:cNvPr id="29" name="Scatter 18"/>
+          <p:cNvSpPr/>
+          <p:nvPr/>
+        </p:nvSpPr>
+        <p:spPr>
+          <a:xfrm>
+            <a:off x="10026112" y="4425950"/>
+            <a:ext cx="251847" cy="203200"/>
+          </a:xfrm>
+          <a:prstGeom prst="rect">
+            <a:avLst/>
+          </a:prstGeom>
+          <a:solidFill>
+            <a:srgbClr val="1E5473">
+              <a:alpha val="5000"/>
+            </a:srgbClr>
+          </a:solidFill>
+          <a:ln>
+            <a:noFill/>
+          </a:ln>
+        </p:spPr>
+        <p:txBody>
+          <a:bodyPr/>
+          <a:lstStyle/>
+          <a:p>
+            <a:endParaRPr lang="th-TH"/>
+          </a:p>
+        </p:txBody>
+      </p:sp>
+      <p:sp>
+        <p:nvSpPr>
+          <p:cNvPr id="30" name="Scatter 19"/>
+          <p:cNvSpPr/>
+          <p:nvPr/>
+        </p:nvSpPr>
+        <p:spPr>
+          <a:xfrm>
+            <a:off x="10492030" y="4705350"/>
+            <a:ext cx="314809" cy="292100"/>
+          </a:xfrm>
+          <a:prstGeom prst="rect">
+            <a:avLst/>
+          </a:prstGeom>
+          <a:solidFill>
+            <a:srgbClr val="1E5473">
+              <a:alpha val="40000"/>
+            </a:srgbClr>
+          </a:solidFill>
+          <a:ln>
+            <a:noFill/>
+          </a:ln>
+        </p:spPr>
+        <p:txBody>
+          <a:bodyPr/>
+          <a:lstStyle/>
+          <a:p>
+            <a:endParaRPr lang="th-TH"/>
+          </a:p>
+        </p:txBody>
+      </p:sp>
+      <p:sp>
+        <p:nvSpPr>
+          <p:cNvPr id="31" name="Scatter 20"/>
+          <p:cNvSpPr/>
+          <p:nvPr/>
+        </p:nvSpPr>
+        <p:spPr>
+          <a:xfrm>
+            <a:off x="9220200" y="4756150"/>
+            <a:ext cx="264440" cy="292100"/>
+          </a:xfrm>
+          <a:prstGeom prst="rect">
+            <a:avLst/>
+          </a:prstGeom>
+          <a:solidFill>
+            <a:srgbClr val="1E5473">
+              <a:alpha val="5000"/>
+            </a:srgbClr>
+          </a:solidFill>
+          <a:ln>
+            <a:noFill/>
+          </a:ln>
+        </p:spPr>
+        <p:txBody>
+          <a:bodyPr/>
+          <a:lstStyle/>
+          <a:p>
+            <a:endParaRPr lang="th-TH"/>
+          </a:p>
+        </p:txBody>
+      </p:sp>
+      <p:sp>
+        <p:nvSpPr>
+          <p:cNvPr id="32" name="Scatter 21"/>
+          <p:cNvSpPr/>
+          <p:nvPr/>
+        </p:nvSpPr>
+        <p:spPr>
+          <a:xfrm>
+            <a:off x="11260164" y="5099050"/>
+            <a:ext cx="415548" cy="330200"/>
+          </a:xfrm>
+          <a:prstGeom prst="rect">
+            <a:avLst/>
+          </a:prstGeom>
+          <a:solidFill>
+            <a:srgbClr val="1E5473">
+              <a:alpha val="5000"/>
+            </a:srgbClr>
+          </a:solidFill>
+          <a:ln>
+            <a:noFill/>
+          </a:ln>
+        </p:spPr>
+        <p:txBody>
+          <a:bodyPr/>
+          <a:lstStyle/>
+          <a:p>
+            <a:endParaRPr lang="th-TH"/>
+          </a:p>
+        </p:txBody>
+      </p:sp>
+      <p:sp>
+        <p:nvSpPr>
+          <p:cNvPr id="33" name="Scatter 22"/>
+          <p:cNvSpPr/>
+          <p:nvPr/>
+        </p:nvSpPr>
+        <p:spPr>
+          <a:xfrm>
+            <a:off x="10202405" y="5238750"/>
+            <a:ext cx="554064" cy="495300"/>
+          </a:xfrm>
+          <a:prstGeom prst="rect">
+            <a:avLst/>
+          </a:prstGeom>
+          <a:solidFill>
+            <a:srgbClr val="1E5473">
+              <a:alpha val="10000"/>
+            </a:srgbClr>
+          </a:solidFill>
+          <a:ln>
+            <a:noFill/>
+          </a:ln>
+        </p:spPr>
+        <p:txBody>
+          <a:bodyPr/>
+          <a:lstStyle/>
+          <a:p>
+            <a:endParaRPr lang="th-TH"/>
+          </a:p>
+        </p:txBody>
+      </p:sp>
+      <p:sp>
+        <p:nvSpPr>
+          <p:cNvPr id="34" name="Scatter 23"/>
+          <p:cNvSpPr/>
+          <p:nvPr/>
+        </p:nvSpPr>
+        <p:spPr>
+          <a:xfrm>
+            <a:off x="10957947" y="5429250"/>
+            <a:ext cx="302217" cy="444500"/>
+          </a:xfrm>
+          <a:prstGeom prst="rect">
+            <a:avLst/>
+          </a:prstGeom>
+          <a:solidFill>
+            <a:srgbClr val="1E5473">
+              <a:alpha val="50000"/>
+            </a:srgbClr>
+          </a:solidFill>
+          <a:ln>
+            <a:noFill/>
+          </a:ln>
+        </p:spPr>
+        <p:txBody>
+          <a:bodyPr/>
+          <a:lstStyle/>
+          <a:p>
+            <a:endParaRPr lang="th-TH"/>
+          </a:p>
+        </p:txBody>
+      </p:sp>
+      <p:sp>
+        <p:nvSpPr>
+          <p:cNvPr id="35" name="Scatter 24"/>
+          <p:cNvSpPr/>
+          <p:nvPr/>
+        </p:nvSpPr>
+        <p:spPr>
+          <a:xfrm>
+            <a:off x="9535009" y="5518150"/>
+            <a:ext cx="88147" cy="76200"/>
+          </a:xfrm>
+          <a:prstGeom prst="rect">
+            <a:avLst/>
+          </a:prstGeom>
+          <a:solidFill>
+            <a:srgbClr val="1E5473">
+              <a:alpha val="40000"/>
+            </a:srgbClr>
+          </a:solidFill>
+          <a:ln>
+            <a:noFill/>
+          </a:ln>
+        </p:spPr>
+        <p:txBody>
+          <a:bodyPr/>
+          <a:lstStyle/>
+          <a:p>
+            <a:endParaRPr lang="th-TH"/>
+          </a:p>
+        </p:txBody>
+      </p:sp>
+      <p:sp>
+        <p:nvSpPr>
+          <p:cNvPr id="36" name="Scatter 25"/>
+          <p:cNvSpPr/>
+          <p:nvPr/>
+        </p:nvSpPr>
+        <p:spPr>
+          <a:xfrm>
+            <a:off x="9837226" y="5949950"/>
+            <a:ext cx="226663" cy="241300"/>
+          </a:xfrm>
+          <a:prstGeom prst="rect">
+            <a:avLst/>
+          </a:prstGeom>
+          <a:solidFill>
+            <a:srgbClr val="1E5473">
+              <a:alpha val="20000"/>
+            </a:srgbClr>
+          </a:solidFill>
+          <a:ln>
+            <a:noFill/>
+          </a:ln>
+        </p:spPr>
+        <p:txBody>
+          <a:bodyPr/>
+          <a:lstStyle/>
+          <a:p>
+            <a:endParaRPr lang="th-TH"/>
+          </a:p>
+        </p:txBody>
+      </p:sp>
+      <p:sp>
+        <p:nvSpPr>
+          <p:cNvPr id="37" name="Scatter 26"/>
+          <p:cNvSpPr/>
+          <p:nvPr/>
+        </p:nvSpPr>
+        <p:spPr>
+          <a:xfrm>
+            <a:off x="11310534" y="6064250"/>
+            <a:ext cx="163701" cy="203200"/>
+          </a:xfrm>
+          <a:prstGeom prst="rect">
+            <a:avLst/>
+          </a:prstGeom>
+          <a:solidFill>
+            <a:srgbClr val="1E5473">
+              <a:alpha val="60000"/>
+            </a:srgbClr>
+          </a:solidFill>
+          <a:ln>
+            <a:noFill/>
+          </a:ln>
+        </p:spPr>
+        <p:txBody>
+          <a:bodyPr/>
+          <a:lstStyle/>
+          <a:p>
+            <a:endParaRPr lang="th-TH"/>
+          </a:p>
+        </p:txBody>
+      </p:sp>
+      <p:sp>
+        <p:nvSpPr>
+          <p:cNvPr id="38" name="Scatter 27"/>
+          <p:cNvSpPr/>
+          <p:nvPr/>
+        </p:nvSpPr>
+        <p:spPr>
+          <a:xfrm>
+            <a:off x="10492030" y="6127750"/>
+            <a:ext cx="201478" cy="165100"/>
+          </a:xfrm>
+          <a:prstGeom prst="rect">
+            <a:avLst/>
+          </a:prstGeom>
+          <a:solidFill>
+            <a:srgbClr val="1E5473">
+              <a:alpha val="20000"/>
+            </a:srgbClr>
+          </a:solidFill>
+          <a:ln>
+            <a:noFill/>
+          </a:ln>
+        </p:spPr>
+        <p:txBody>
+          <a:bodyPr/>
+          <a:lstStyle/>
+          <a:p>
+            <a:endParaRPr lang="th-TH"/>
+          </a:p>
+        </p:txBody>
+      </p:sp>
+      <p:sp>
+        <p:nvSpPr>
+          <p:cNvPr id="39" name="Scatter 28"/>
+          <p:cNvSpPr/>
+          <p:nvPr/>
+        </p:nvSpPr>
+        <p:spPr>
+          <a:xfrm>
+            <a:off x="11549789" y="6267450"/>
+            <a:ext cx="302217" cy="317500"/>
+          </a:xfrm>
+          <a:prstGeom prst="rect">
+            <a:avLst/>
+          </a:prstGeom>
+          <a:solidFill>
+            <a:srgbClr val="1E5473">
+              <a:alpha val="75000"/>
+            </a:srgbClr>
+          </a:solidFill>
+          <a:ln>
+            <a:noFill/>
           </a:ln>
         </p:spPr>
         <p:txBody>
@@ -215,7 +1062,7 @@
       </p:sp>
       <p:pic>
         <p:nvPicPr>
-          <p:cNvPr id="12" name="NCT Logo"/>
+          <p:cNvPr id="40" name="NCT Logo"/>
           <p:cNvPicPr>
             <a:picLocks noChangeAspect="1"/>
           </p:cNvPicPr>
@@ -229,8 +1076,8 @@
         </p:blipFill>
         <p:spPr>
           <a:xfrm>
-            <a:off x="914400" y="868680"/>
-            <a:ext cx="2560320" cy="1302864"/>
+            <a:off x="4095750" y="685800"/>
+            <a:ext cx="4000500" cy="2035725"/>
           </a:xfrm>
           <a:prstGeom prst="rect">
             <a:avLst/>
@@ -239,7 +1086,36 @@
       </p:pic>
       <p:sp>
         <p:nvSpPr>
-          <p:cNvPr id="13" name="Title Placeholder"/>
+          <p:cNvPr id="41" name="Accent Rule"/>
+          <p:cNvSpPr/>
+          <p:nvPr/>
+        </p:nvSpPr>
+        <p:spPr>
+          <a:xfrm>
+            <a:off x="2941320" y="3429000"/>
+            <a:ext cx="6309360" cy="28575"/>
+          </a:xfrm>
+          <a:prstGeom prst="rect">
+            <a:avLst/>
+          </a:prstGeom>
+          <a:solidFill>
+            <a:srgbClr val="006666"/>
+          </a:solidFill>
+          <a:ln>
+            <a:noFill/>
+          </a:ln>
+        </p:spPr>
+        <p:txBody>
+          <a:bodyPr/>
+          <a:lstStyle/>
+          <a:p>
+            <a:endParaRPr lang="th-TH"/>
+          </a:p>
+        </p:txBody>
+      </p:sp>
+      <p:sp>
+        <p:nvSpPr>
+          <p:cNvPr id="42" name="Title Placeholder"/>
           <p:cNvSpPr>
             <a:spLocks noGrp="1"/>
           </p:cNvSpPr>
@@ -249,24 +1125,24 @@
         </p:nvSpPr>
         <p:spPr>
           <a:xfrm>
-            <a:off x="914400" y="2560320"/>
-            <a:ext cx="8229600" cy="1463040"/>
-          </a:xfrm>
-          <a:prstGeom prst="rect">
-            <a:avLst/>
-          </a:prstGeom>
-        </p:spPr>
-        <p:txBody>
-          <a:bodyPr wrap="square" anchor="b" lIns="0" tIns="0" rIns="0" bIns="0" rtlCol="0"/>
+            <a:off x="914400" y="3715200"/>
+            <a:ext cx="10363200" cy="2057400"/>
+          </a:xfrm>
+          <a:prstGeom prst="rect">
+            <a:avLst/>
+          </a:prstGeom>
+        </p:spPr>
+        <p:txBody>
+          <a:bodyPr wrap="square" anchor="ctr" lIns="0" tIns="0" rIns="0" bIns="0" rtlCol="0"/>
           <a:lstStyle>
-            <a:lvl1pPr algn="l" marL="0" indent="0">
-              <a:lnSpc>
-                <a:spcPct val="106000"/>
+            <a:lvl1pPr algn="ctr" marL="0" indent="0">
+              <a:lnSpc>
+                <a:spcPct val="115000"/>
               </a:lnSpc>
               <a:buNone/>
               <a:defRPr lang="th-TH" sz="4400" b="1" dirty="0">
                 <a:solidFill>
-                  <a:srgbClr val="FFFFFF"/>
+                  <a:srgbClr val="333333"/>
                 </a:solidFill>
                 <a:latin typeface="+mj-lt"/>
                 <a:ea typeface="+mj-ea"/>
@@ -275,60 +1151,29 @@
             </a:lvl1pPr>
           </a:lstStyle>
           <a:p>
-            <a:pPr algn="l" marL="0" indent="0">
-              <a:lnSpc>
-                <a:spcPct val="106000"/>
+            <a:pPr algn="ctr" marL="0" indent="0">
+              <a:lnSpc>
+                <a:spcPct val="115000"/>
               </a:lnSpc>
               <a:buNone/>
             </a:pPr>
             <a:r>
               <a:rPr lang="th-TH" sz="4400" b="1" dirty="0">
                 <a:solidFill>
-                  <a:srgbClr val="FFFFFF"/>
+                  <a:srgbClr val="333333"/>
                 </a:solidFill>
                 <a:latin typeface="+mj-lt"/>
                 <a:ea typeface="+mj-ea"/>
                 <a:cs typeface="+mj-cs"/>
               </a:rPr>
-              <a:t>ชื่อเรื่องงานนำเสนอ</a:t>
-            </a:r>
-          </a:p>
-        </p:txBody>
-      </p:sp>
-      <p:sp>
-        <p:nvSpPr>
-          <p:cNvPr id="14" name="Accent Rule"/>
-          <p:cNvSpPr/>
-          <p:nvPr/>
-        </p:nvSpPr>
-        <p:spPr>
-          <a:xfrm>
-            <a:off x="914400" y="4206240"/>
-            <a:ext cx="548640" cy="45720"/>
-          </a:xfrm>
-          <a:prstGeom prst="rect">
-            <a:avLst/>
-          </a:prstGeom>
-          <a:solidFill>
-            <a:srgbClr val="FFFFFF">
-              <a:alpha val="70000"/>
-            </a:srgbClr>
-          </a:solidFill>
-          <a:ln>
-            <a:noFill/>
-          </a:ln>
-        </p:spPr>
-        <p:txBody>
-          <a:bodyPr/>
-          <a:lstStyle/>
-          <a:p>
-            <a:endParaRPr lang="th-TH"/>
-          </a:p>
-        </p:txBody>
-      </p:sp>
-      <p:sp>
-        <p:nvSpPr>
-          <p:cNvPr id="15" name="Subtitle"/>
+              <a:t>PROPOSAL</a:t>
+            </a:r>
+          </a:p>
+        </p:txBody>
+      </p:sp>
+      <p:sp>
+        <p:nvSpPr>
+          <p:cNvPr id="43" name="Subtitle"/>
           <p:cNvSpPr>
             <a:spLocks noGrp="1"/>
           </p:cNvSpPr>
@@ -338,8 +1183,8 @@
         </p:nvSpPr>
         <p:spPr>
           <a:xfrm>
-            <a:off x="914400" y="4480560"/>
-            <a:ext cx="7315200" cy="731520"/>
+            <a:off x="914400" y="5909760"/>
+            <a:ext cx="10363200" cy="457200"/>
           </a:xfrm>
           <a:prstGeom prst="rect">
             <a:avLst/>
@@ -348,16 +1193,14 @@
         <p:txBody>
           <a:bodyPr wrap="square" anchor="t" lIns="0" tIns="0" rIns="0" bIns="0" rtlCol="0"/>
           <a:lstStyle>
-            <a:lvl1pPr algn="l" marL="0" indent="0">
+            <a:lvl1pPr algn="ctr" marL="0" indent="0">
               <a:lnSpc>
                 <a:spcPct val="130000"/>
               </a:lnSpc>
               <a:buNone/>
               <a:defRPr lang="th-TH" sz="2000" dirty="0">
                 <a:solidFill>
-                  <a:srgbClr val="FFFFFF">
-                    <a:alpha val="82000"/>
-                  </a:srgbClr>
+                  <a:srgbClr val="5F5F5F"/>
                 </a:solidFill>
                 <a:latin typeface="+mn-lt"/>
                 <a:ea typeface="+mn-ea"/>
@@ -366,7 +1209,7 @@
             </a:lvl1pPr>
           </a:lstStyle>
           <a:p>
-            <a:pPr algn="l" marL="0" indent="0">
+            <a:pPr algn="ctr" marL="0" indent="0">
               <a:lnSpc>
                 <a:spcPct val="130000"/>
               </a:lnSpc>
@@ -375,165 +1218,30 @@
             <a:r>
               <a:rPr lang="th-TH" sz="2000" dirty="0">
                 <a:solidFill>
-                  <a:srgbClr val="FFFFFF">
-                    <a:alpha val="82000"/>
-                  </a:srgbClr>
+                  <a:srgbClr val="5F5F5F"/>
                 </a:solidFill>
                 <a:latin typeface="+mn-lt"/>
                 <a:ea typeface="+mn-ea"/>
                 <a:cs typeface="+mn-cs"/>
               </a:rPr>
-              <a:t>คำโปรย / ชื่อลูกค้า / วันที่</a:t>
-            </a:r>
-          </a:p>
-        </p:txBody>
-      </p:sp>
-      <p:sp>
-        <p:nvSpPr>
-          <p:cNvPr id="16" name="Footer Scrim"/>
-          <p:cNvSpPr/>
-          <p:nvPr/>
-        </p:nvSpPr>
-        <p:spPr>
-          <a:xfrm>
-            <a:off x="0" y="5394960"/>
-            <a:ext cx="12192000" cy="1463040"/>
-          </a:xfrm>
-          <a:prstGeom prst="rect">
-            <a:avLst/>
-          </a:prstGeom>
-          <a:gradFill rotWithShape="1">
-            <a:gsLst>
-              <a:gs pos="0">
-                <a:srgbClr val="16324F">
-                  <a:alpha val="0"/>
-                </a:srgbClr>
-              </a:gs>
-              <a:gs pos="55000">
-                <a:srgbClr val="16324F">
-                  <a:alpha val="60000"/>
-                </a:srgbClr>
-              </a:gs>
-              <a:gs pos="100000">
-                <a:srgbClr val="16324F">
-                  <a:alpha val="90000"/>
-                </a:srgbClr>
-              </a:gs>
-            </a:gsLst>
-            <a:lin ang="5400000" scaled="0"/>
-          </a:gradFill>
-          <a:ln>
-            <a:noFill/>
-          </a:ln>
-        </p:spPr>
-        <p:txBody>
-          <a:bodyPr/>
-          <a:lstStyle/>
-          <a:p>
-            <a:endParaRPr lang="th-TH"/>
-          </a:p>
-        </p:txBody>
-      </p:sp>
-      <p:sp>
-        <p:nvSpPr>
-          <p:cNvPr id="90" name="Foot Bar 1"/>
-          <p:cNvSpPr/>
-          <p:nvPr/>
-        </p:nvSpPr>
-        <p:spPr>
-          <a:xfrm>
-            <a:off x="0" y="6675120"/>
-            <a:ext cx="822960" cy="137160"/>
-          </a:xfrm>
-          <a:prstGeom prst="rect">
-            <a:avLst/>
-          </a:prstGeom>
-          <a:solidFill>
-            <a:srgbClr val="006666"/>
-          </a:solidFill>
-          <a:ln>
-            <a:noFill/>
-          </a:ln>
-        </p:spPr>
-        <p:txBody>
-          <a:bodyPr/>
-          <a:lstStyle/>
-          <a:p>
-            <a:endParaRPr lang="th-TH"/>
-          </a:p>
-        </p:txBody>
-      </p:sp>
-      <p:sp>
-        <p:nvSpPr>
-          <p:cNvPr id="91" name="Foot Bar 2"/>
-          <p:cNvSpPr/>
-          <p:nvPr/>
-        </p:nvSpPr>
-        <p:spPr>
-          <a:xfrm>
-            <a:off x="822960" y="6675120"/>
-            <a:ext cx="822960" cy="137160"/>
-          </a:xfrm>
-          <a:prstGeom prst="rect">
-            <a:avLst/>
-          </a:prstGeom>
-          <a:solidFill>
-            <a:srgbClr val="A9C2C2"/>
-          </a:solidFill>
-          <a:ln>
-            <a:noFill/>
-          </a:ln>
-        </p:spPr>
-        <p:txBody>
-          <a:bodyPr/>
-          <a:lstStyle/>
-          <a:p>
-            <a:endParaRPr lang="th-TH"/>
-          </a:p>
-        </p:txBody>
-      </p:sp>
-      <p:sp>
-        <p:nvSpPr>
-          <p:cNvPr id="92" name="Foot Bar 3"/>
-          <p:cNvSpPr/>
-          <p:nvPr/>
-        </p:nvSpPr>
-        <p:spPr>
-          <a:xfrm>
-            <a:off x="1645920" y="6675120"/>
-            <a:ext cx="822960" cy="137160"/>
-          </a:xfrm>
-          <a:prstGeom prst="rect">
-            <a:avLst/>
-          </a:prstGeom>
-          <a:solidFill>
-            <a:srgbClr val="E1E1E1"/>
-          </a:solidFill>
-          <a:ln>
-            <a:noFill/>
-          </a:ln>
-        </p:spPr>
-        <p:txBody>
-          <a:bodyPr/>
-          <a:lstStyle/>
-          <a:p>
-            <a:endParaRPr lang="th-TH"/>
-          </a:p>
-        </p:txBody>
-      </p:sp>
-      <p:sp>
-        <p:nvSpPr>
-          <p:cNvPr id="93" name="Footer Placeholder"/>
-          <p:cNvSpPr>
-            <a:spLocks noGrp="1"/>
-          </p:cNvSpPr>
-          <p:nvPr>
-            <p:ph type="ftr" idx="11"/>
-          </p:nvPr>
-        </p:nvSpPr>
-        <p:spPr>
-          <a:xfrm>
-            <a:off x="2697480" y="6400800"/>
+              <a:t>คำโปรย / ชื่อลูกค้า</a:t>
+            </a:r>
+          </a:p>
+        </p:txBody>
+      </p:sp>
+      <p:sp>
+        <p:nvSpPr>
+          <p:cNvPr id="44" name="Date Placeholder"/>
+          <p:cNvSpPr>
+            <a:spLocks noGrp="1"/>
+          </p:cNvSpPr>
+          <p:nvPr>
+            <p:ph type="dt" idx="10"/>
+          </p:nvPr>
+        </p:nvSpPr>
+        <p:spPr>
+          <a:xfrm>
+            <a:off x="228600" y="6400800"/>
             <a:ext cx="4572000" cy="274320"/>
           </a:xfrm>
           <a:prstGeom prst="rect">
@@ -550,9 +1258,7 @@
               <a:buNone/>
               <a:defRPr lang="th-TH" sz="1000" dirty="0">
                 <a:solidFill>
-                  <a:srgbClr val="FFFFFF">
-                    <a:alpha val="72000"/>
-                  </a:srgbClr>
+                  <a:srgbClr val="5F5F5F"/>
                 </a:solidFill>
                 <a:latin typeface="+mn-lt"/>
                 <a:ea typeface="+mn-ea"/>
@@ -573,7 +1279,7 @@
       </p:sp>
       <p:sp>
         <p:nvSpPr>
-          <p:cNvPr id="94" name="Slide Number Placeholder"/>
+          <p:cNvPr id="45" name="Slide Number Placeholder"/>
           <p:cNvSpPr>
             <a:spLocks noGrp="1"/>
           </p:cNvSpPr>
@@ -600,9 +1306,7 @@
               <a:buNone/>
               <a:defRPr lang="th-TH" sz="1000" dirty="0">
                 <a:solidFill>
-                  <a:srgbClr val="FFFFFF">
-                    <a:alpha val="72000"/>
-                  </a:srgbClr>
+                  <a:srgbClr val="5F5F5F"/>
                 </a:solidFill>
                 <a:latin typeface="+mn-lt"/>
                 <a:ea typeface="+mn-ea"/>
@@ -617,9 +1321,7 @@
             <a:fld id="{B7E3A1C2-4F5D-4A88-9C1E-6D2F0A93B451}" type="slidenum">
               <a:rPr lang="th-TH" sz="1000">
                 <a:solidFill>
-                  <a:srgbClr val="FFFFFF">
-                    <a:alpha val="60000"/>
-                  </a:srgbClr>
+                  <a:srgbClr val="5F5F5F"/>
                 </a:solidFill>
                 <a:latin typeface="+mn-lt"/>
                 <a:cs typeface="+mn-cs"/>

--- a/NCT-Slide-Template-Corp-Demo.pptx
+++ b/NCT-Slide-Template-Corp-Demo.pptx
@@ -1530,6 +1530,37 @@
       </p:sp>
       <p:sp>
         <p:nvSpPr>
+          <p:cNvPr id="20" name="Ask Veil"/>
+          <p:cNvSpPr/>
+          <p:nvPr/>
+        </p:nvSpPr>
+        <p:spPr>
+          <a:xfrm>
+            <a:off x="0" y="0"/>
+            <a:ext cx="7315200" cy="6858000"/>
+          </a:xfrm>
+          <a:prstGeom prst="rect">
+            <a:avLst/>
+          </a:prstGeom>
+          <a:solidFill>
+            <a:srgbClr val="16324F">
+              <a:alpha val="55000"/>
+            </a:srgbClr>
+          </a:solidFill>
+          <a:ln>
+            <a:noFill/>
+          </a:ln>
+        </p:spPr>
+        <p:txBody>
+          <a:bodyPr/>
+          <a:lstStyle/>
+          <a:p>
+            <a:endParaRPr lang="th-TH"/>
+          </a:p>
+        </p:txBody>
+      </p:sp>
+      <p:sp>
+        <p:nvSpPr>
           <p:cNvPr id="12" name="Title Placeholder"/>
           <p:cNvSpPr>
             <a:spLocks noGrp="1"/>
@@ -1646,7 +1677,9 @@
               <a:buNone/>
               <a:defRPr lang="th-TH" sz="1200" b="1" spc="120" dirty="0">
                 <a:solidFill>
-                  <a:srgbClr val="8FBACE"/>
+                  <a:srgbClr val="FFFFFF">
+                    <a:alpha val="75000"/>
+                  </a:srgbClr>
                 </a:solidFill>
                 <a:latin typeface="+mn-lt"/>
                 <a:ea typeface="+mn-ea"/>
@@ -1664,7 +1697,9 @@
             <a:r>
               <a:rPr lang="th-TH" sz="1200" b="1" spc="120" dirty="0">
                 <a:solidFill>
-                  <a:srgbClr val="8FBACE"/>
+                  <a:srgbClr val="FFFFFF">
+                    <a:alpha val="75000"/>
+                  </a:srgbClr>
                 </a:solidFill>
                 <a:latin typeface="+mn-lt"/>
                 <a:ea typeface="+mn-ea"/>
@@ -1699,13 +1734,13 @@
           <a:lstStyle>
             <a:lvl1pPr algn="l" marL="320040" indent="-320040">
               <a:lnSpc>
-                <a:spcPct val="140000"/>
+                <a:spcPct val="93000"/>
               </a:lnSpc>
               <a:spcBef>
                 <a:spcPts val="400"/>
               </a:spcBef>
               <a:buClr>
-                <a:srgbClr val="8FBACE"/>
+                <a:srgbClr val="FFFFFF"/>
               </a:buClr>
               <a:buSzPct val="90000"/>
               <a:buFont typeface="Arial"/>
@@ -1725,13 +1760,13 @@
           <a:p>
             <a:pPr algn="l" marL="320040" indent="-320040">
               <a:lnSpc>
-                <a:spcPct val="140000"/>
+                <a:spcPct val="93000"/>
               </a:lnSpc>
               <a:spcBef>
                 <a:spcPts val="400"/>
               </a:spcBef>
               <a:buClr>
-                <a:srgbClr val="8FBACE"/>
+                <a:srgbClr val="FFFFFF"/>
               </a:buClr>
               <a:buSzPct val="90000"/>
               <a:buFont typeface="Arial"/>
@@ -1766,7 +1801,7 @@
         <p:spPr>
           <a:xfrm>
             <a:off x="914400" y="4709160"/>
-            <a:ext cx="5486400" cy="228600"/>
+            <a:ext cx="5486400" cy="457200"/>
           </a:xfrm>
           <a:prstGeom prst="rect">
             <a:avLst/>
@@ -1777,12 +1812,72 @@
           <a:lstStyle>
             <a:lvl1pPr algn="l" marL="0" indent="0">
               <a:lnSpc>
-                <a:spcPct val="100000"/>
-              </a:lnSpc>
-              <a:buNone/>
-              <a:defRPr lang="th-TH" sz="1400" b="1" dirty="0">
-                <a:solidFill>
-                  <a:srgbClr val="8FBACE"/>
+                <a:spcPct val="115000"/>
+              </a:lnSpc>
+              <a:buNone/>
+              <a:defRPr lang="th-TH" sz="2000" b="1" dirty="0">
+                <a:solidFill>
+                  <a:srgbClr val="FFFFFF"/>
+                </a:solidFill>
+                <a:latin typeface="+mj-lt"/>
+                <a:ea typeface="+mj-ea"/>
+                <a:cs typeface="+mj-cs"/>
+              </a:defRPr>
+            </a:lvl1pPr>
+          </a:lstStyle>
+          <a:p>
+            <a:pPr algn="l" marL="0" indent="0">
+              <a:lnSpc>
+                <a:spcPct val="115000"/>
+              </a:lnSpc>
+              <a:buNone/>
+            </a:pPr>
+            <a:r>
+              <a:rPr lang="th-TH" sz="2000" b="1" dirty="0">
+                <a:solidFill>
+                  <a:srgbClr val="FFFFFF"/>
+                </a:solidFill>
+                <a:latin typeface="+mj-lt"/>
+                <a:ea typeface="+mj-ea"/>
+                <a:cs typeface="+mj-cs"/>
+              </a:rPr>
+              <a:t>ต้องการคำตอบภายในวันที่ ...</a:t>
+            </a:r>
+          </a:p>
+        </p:txBody>
+      </p:sp>
+      <p:sp>
+        <p:nvSpPr>
+          <p:cNvPr id="19" name="Contact"/>
+          <p:cNvSpPr>
+            <a:spLocks noGrp="1"/>
+          </p:cNvSpPr>
+          <p:nvPr>
+            <p:ph type="body" idx="4"/>
+          </p:nvPr>
+        </p:nvSpPr>
+        <p:spPr>
+          <a:xfrm>
+            <a:off x="914400" y="5303520"/>
+            <a:ext cx="5486400" cy="731520"/>
+          </a:xfrm>
+          <a:prstGeom prst="rect">
+            <a:avLst/>
+          </a:prstGeom>
+        </p:spPr>
+        <p:txBody>
+          <a:bodyPr wrap="square" anchor="t" lIns="0" tIns="0" rIns="0" bIns="0" rtlCol="0"/>
+          <a:lstStyle>
+            <a:lvl1pPr algn="l" marL="0" indent="0">
+              <a:lnSpc>
+                <a:spcPct val="89000"/>
+              </a:lnSpc>
+              <a:buNone/>
+              <a:defRPr lang="th-TH" sz="1400" dirty="0">
+                <a:solidFill>
+                  <a:srgbClr val="FFFFFF">
+                    <a:alpha val="88000"/>
+                  </a:srgbClr>
                 </a:solidFill>
                 <a:latin typeface="+mn-lt"/>
                 <a:ea typeface="+mn-ea"/>
@@ -1793,67 +1888,7 @@
           <a:p>
             <a:pPr algn="l" marL="0" indent="0">
               <a:lnSpc>
-                <a:spcPct val="100000"/>
-              </a:lnSpc>
-              <a:buNone/>
-            </a:pPr>
-            <a:r>
-              <a:rPr lang="th-TH" sz="1400" b="1" dirty="0">
-                <a:solidFill>
-                  <a:srgbClr val="8FBACE"/>
-                </a:solidFill>
-                <a:latin typeface="+mn-lt"/>
-                <a:ea typeface="+mn-ea"/>
-                <a:cs typeface="+mn-cs"/>
-              </a:rPr>
-              <a:t>ต้องการคำตอบภายในวันที่ ...</a:t>
-            </a:r>
-          </a:p>
-        </p:txBody>
-      </p:sp>
-      <p:sp>
-        <p:nvSpPr>
-          <p:cNvPr id="19" name="Contact"/>
-          <p:cNvSpPr>
-            <a:spLocks noGrp="1"/>
-          </p:cNvSpPr>
-          <p:nvPr>
-            <p:ph type="body" idx="4"/>
-          </p:nvPr>
-        </p:nvSpPr>
-        <p:spPr>
-          <a:xfrm>
-            <a:off x="914400" y="5303520"/>
-            <a:ext cx="5486400" cy="731520"/>
-          </a:xfrm>
-          <a:prstGeom prst="rect">
-            <a:avLst/>
-          </a:prstGeom>
-        </p:spPr>
-        <p:txBody>
-          <a:bodyPr wrap="square" anchor="t" lIns="0" tIns="0" rIns="0" bIns="0" rtlCol="0"/>
-          <a:lstStyle>
-            <a:lvl1pPr algn="l" marL="0" indent="0">
-              <a:lnSpc>
-                <a:spcPct val="135000"/>
-              </a:lnSpc>
-              <a:buNone/>
-              <a:defRPr lang="th-TH" sz="1400" dirty="0">
-                <a:solidFill>
-                  <a:srgbClr val="FFFFFF">
-                    <a:alpha val="88000"/>
-                  </a:srgbClr>
-                </a:solidFill>
-                <a:latin typeface="+mn-lt"/>
-                <a:ea typeface="+mn-ea"/>
-                <a:cs typeface="+mn-cs"/>
-              </a:defRPr>
-            </a:lvl1pPr>
-          </a:lstStyle>
-          <a:p>
-            <a:pPr algn="l" marL="0" indent="0">
-              <a:lnSpc>
-                <a:spcPct val="135000"/>
+                <a:spcPct val="89000"/>
               </a:lnSpc>
               <a:buNone/>
             </a:pPr>
@@ -1875,7 +1910,7 @@
       </p:sp>
       <p:sp>
         <p:nvSpPr>
-          <p:cNvPr id="20" name="Footer Scrim"/>
+          <p:cNvPr id="21" name="Footer Scrim"/>
           <p:cNvSpPr/>
           <p:nvPr/>
         </p:nvSpPr>
@@ -2352,7 +2387,7 @@
                 <a:spcPts val="500"/>
               </a:spcBef>
               <a:buClr>
-                <a:srgbClr val="8FBACE"/>
+                <a:srgbClr val="8CC2C2"/>
               </a:buClr>
               <a:buSzPct val="90000"/>
               <a:buFont typeface="Arial"/>
@@ -2376,7 +2411,7 @@
                 <a:spcPts val="350"/>
               </a:spcBef>
               <a:buClr>
-                <a:srgbClr val="8FBACE"/>
+                <a:srgbClr val="8CC2C2"/>
               </a:buClr>
               <a:buSzPct val="90000"/>
               <a:buFont typeface="Arial"/>
@@ -2402,7 +2437,7 @@
                 <a:spcPts val="500"/>
               </a:spcBef>
               <a:buClr>
-                <a:srgbClr val="8FBACE"/>
+                <a:srgbClr val="8CC2C2"/>
               </a:buClr>
               <a:buSzPct val="90000"/>
               <a:buFont typeface="Arial"/>
@@ -2431,7 +2466,7 @@
                 <a:spcPts val="350"/>
               </a:spcBef>
               <a:buClr>
-                <a:srgbClr val="8FBACE"/>
+                <a:srgbClr val="8CC2C2"/>
               </a:buClr>
               <a:buSzPct val="90000"/>
               <a:buFont typeface="Arial"/>
@@ -2570,7 +2605,7 @@
                 <a:spcPts val="500"/>
               </a:spcBef>
               <a:buClr>
-                <a:srgbClr val="216B7F"/>
+                <a:srgbClr val="006666"/>
               </a:buClr>
               <a:buSzPct val="90000"/>
               <a:buFont typeface="Arial"/>
@@ -2616,7 +2651,7 @@
                 <a:spcPts val="500"/>
               </a:spcBef>
               <a:buClr>
-                <a:srgbClr val="216B7F"/>
+                <a:srgbClr val="006666"/>
               </a:buClr>
               <a:buSzPct val="90000"/>
               <a:buFont typeface="Arial"/>
@@ -2721,7 +2756,7 @@
               <a:buNone/>
               <a:defRPr lang="th-TH" sz="1200" b="1" spc="120" dirty="0">
                 <a:solidFill>
-                  <a:srgbClr val="216B7F"/>
+                  <a:srgbClr val="006666"/>
                 </a:solidFill>
                 <a:latin typeface="+mn-lt"/>
                 <a:ea typeface="+mn-ea"/>
@@ -2739,7 +2774,7 @@
             <a:r>
               <a:rPr lang="th-TH" sz="1200" b="1" spc="120" dirty="0">
                 <a:solidFill>
-                  <a:srgbClr val="216B7F"/>
+                  <a:srgbClr val="006666"/>
                 </a:solidFill>
                 <a:latin typeface="+mn-lt"/>
                 <a:ea typeface="+mn-ea"/>
@@ -4186,7 +4221,7 @@
               <a:buNone/>
               <a:defRPr lang="th-TH" sz="1200" b="1" spc="120" dirty="0">
                 <a:solidFill>
-                  <a:srgbClr val="8FBACE"/>
+                  <a:srgbClr val="8CC2C2"/>
                 </a:solidFill>
                 <a:latin typeface="+mn-lt"/>
                 <a:ea typeface="+mn-ea"/>
@@ -4204,7 +4239,7 @@
             <a:r>
               <a:rPr lang="th-TH" sz="1200" b="1" spc="120" dirty="0">
                 <a:solidFill>
-                  <a:srgbClr val="8FBACE"/>
+                  <a:srgbClr val="8CC2C2"/>
                 </a:solidFill>
                 <a:latin typeface="+mn-lt"/>
                 <a:ea typeface="+mn-ea"/>
@@ -4743,7 +4778,7 @@
             <a:avLst/>
           </a:prstGeom>
           <a:solidFill>
-            <a:srgbClr val="216B7F"/>
+            <a:srgbClr val="006666"/>
           </a:solidFill>
           <a:ln>
             <a:noFill/>
@@ -4946,7 +4981,7 @@
             <a:avLst/>
           </a:prstGeom>
           <a:solidFill>
-            <a:srgbClr val="216B7F"/>
+            <a:srgbClr val="006666"/>
           </a:solidFill>
           <a:ln>
             <a:noFill/>
@@ -5004,7 +5039,7 @@
             <a:avLst/>
           </a:prstGeom>
           <a:solidFill>
-            <a:srgbClr val="216B7F"/>
+            <a:srgbClr val="006666"/>
           </a:solidFill>
           <a:ln>
             <a:noFill/>
@@ -5207,7 +5242,7 @@
             <a:avLst/>
           </a:prstGeom>
           <a:solidFill>
-            <a:srgbClr val="216B7F"/>
+            <a:srgbClr val="006666"/>
           </a:solidFill>
           <a:ln>
             <a:noFill/>
@@ -5265,7 +5300,7 @@
             <a:avLst/>
           </a:prstGeom>
           <a:solidFill>
-            <a:srgbClr val="216B7F"/>
+            <a:srgbClr val="006666"/>
           </a:solidFill>
           <a:ln>
             <a:noFill/>
@@ -5468,7 +5503,7 @@
             <a:avLst/>
           </a:prstGeom>
           <a:solidFill>
-            <a:srgbClr val="216B7F"/>
+            <a:srgbClr val="006666"/>
           </a:solidFill>
           <a:ln>
             <a:noFill/>
@@ -5526,7 +5561,7 @@
             <a:avLst/>
           </a:prstGeom>
           <a:solidFill>
-            <a:srgbClr val="216B7F"/>
+            <a:srgbClr val="006666"/>
           </a:solidFill>
           <a:ln>
             <a:noFill/>
@@ -5729,7 +5764,7 @@
             <a:avLst/>
           </a:prstGeom>
           <a:solidFill>
-            <a:srgbClr val="216B7F"/>
+            <a:srgbClr val="006666"/>
           </a:solidFill>
           <a:ln>
             <a:noFill/>
@@ -5787,7 +5822,7 @@
             <a:avLst/>
           </a:prstGeom>
           <a:solidFill>
-            <a:srgbClr val="216B7F"/>
+            <a:srgbClr val="006666"/>
           </a:solidFill>
           <a:ln>
             <a:noFill/>
@@ -6033,7 +6068,7 @@
               <a:buNone/>
               <a:defRPr lang="th-TH" sz="1200" b="1" spc="120" dirty="0">
                 <a:solidFill>
-                  <a:srgbClr val="216B7F"/>
+                  <a:srgbClr val="006666"/>
                 </a:solidFill>
                 <a:latin typeface="+mn-lt"/>
                 <a:ea typeface="+mn-ea"/>
@@ -6051,7 +6086,7 @@
             <a:r>
               <a:rPr lang="th-TH" sz="1200" b="1" spc="120" dirty="0">
                 <a:solidFill>
-                  <a:srgbClr val="216B7F"/>
+                  <a:srgbClr val="006666"/>
                 </a:solidFill>
                 <a:latin typeface="+mn-lt"/>
                 <a:ea typeface="+mn-ea"/>
@@ -6662,7 +6697,7 @@
               <a:buNone/>
               <a:defRPr lang="th-TH" sz="1200" b="1" spc="120" dirty="0">
                 <a:solidFill>
-                  <a:srgbClr val="216B7F"/>
+                  <a:srgbClr val="006666"/>
                 </a:solidFill>
                 <a:latin typeface="+mn-lt"/>
                 <a:ea typeface="+mn-ea"/>
@@ -6680,7 +6715,7 @@
             <a:r>
               <a:rPr lang="th-TH" sz="1200" b="1" spc="120" dirty="0">
                 <a:solidFill>
-                  <a:srgbClr val="216B7F"/>
+                  <a:srgbClr val="006666"/>
                 </a:solidFill>
                 <a:latin typeface="+mn-lt"/>
                 <a:ea typeface="+mn-ea"/>
@@ -7180,7 +7215,7 @@
               <a:buNone/>
               <a:defRPr lang="th-TH" sz="6000" b="1" dirty="0">
                 <a:solidFill>
-                  <a:srgbClr val="8FBACE"/>
+                  <a:srgbClr val="8CC2C2"/>
                 </a:solidFill>
                 <a:latin typeface="+mj-lt"/>
                 <a:ea typeface="+mj-ea"/>
@@ -7198,7 +7233,7 @@
             <a:r>
               <a:rPr lang="th-TH" sz="6000" b="1" dirty="0">
                 <a:solidFill>
-                  <a:srgbClr val="8FBACE"/>
+                  <a:srgbClr val="8CC2C2"/>
                 </a:solidFill>
                 <a:latin typeface="+mj-lt"/>
                 <a:ea typeface="+mj-ea"/>
@@ -7224,7 +7259,7 @@
             <a:avLst/>
           </a:prstGeom>
           <a:solidFill>
-            <a:srgbClr val="8FBACE"/>
+            <a:srgbClr val="8CC2C2"/>
           </a:solidFill>
           <a:ln>
             <a:noFill/>
@@ -7320,13 +7355,13 @@
           <a:lstStyle>
             <a:lvl1pPr algn="l" marL="274320" indent="-274320">
               <a:lnSpc>
-                <a:spcPct val="145000"/>
+                <a:spcPct val="96000"/>
               </a:lnSpc>
               <a:spcBef>
                 <a:spcPts val="300"/>
               </a:spcBef>
               <a:buClr>
-                <a:srgbClr val="8FBACE"/>
+                <a:srgbClr val="8CC2C2"/>
               </a:buClr>
               <a:buSzPct val="90000"/>
               <a:buFont typeface="Arial"/>
@@ -7344,13 +7379,13 @@
             </a:lvl1pPr>
             <a:lvl2pPr algn="l" marL="274320" indent="-274320">
               <a:lnSpc>
-                <a:spcPct val="145000"/>
+                <a:spcPct val="96000"/>
               </a:lnSpc>
               <a:spcBef>
                 <a:spcPts val="300"/>
               </a:spcBef>
               <a:buClr>
-                <a:srgbClr val="8FBACE"/>
+                <a:srgbClr val="8CC2C2"/>
               </a:buClr>
               <a:buSzPct val="90000"/>
               <a:buFont typeface="Arial"/>
@@ -7368,13 +7403,13 @@
             </a:lvl2pPr>
             <a:lvl3pPr algn="l" marL="274320" indent="-274320">
               <a:lnSpc>
-                <a:spcPct val="145000"/>
+                <a:spcPct val="96000"/>
               </a:lnSpc>
               <a:spcBef>
                 <a:spcPts val="300"/>
               </a:spcBef>
               <a:buClr>
-                <a:srgbClr val="8FBACE"/>
+                <a:srgbClr val="8CC2C2"/>
               </a:buClr>
               <a:buSzPct val="90000"/>
               <a:buFont typeface="Arial"/>
@@ -7394,13 +7429,13 @@
           <a:p>
             <a:pPr algn="l" marL="274320" indent="-274320">
               <a:lnSpc>
-                <a:spcPct val="145000"/>
+                <a:spcPct val="96000"/>
               </a:lnSpc>
               <a:spcBef>
                 <a:spcPts val="300"/>
               </a:spcBef>
               <a:buClr>
-                <a:srgbClr val="8FBACE"/>
+                <a:srgbClr val="8CC2C2"/>
               </a:buClr>
               <a:buSzPct val="90000"/>
               <a:buFont typeface="Arial"/>
@@ -7423,13 +7458,13 @@
           <a:p>
             <a:pPr algn="l" marL="274320" indent="-274320">
               <a:lnSpc>
-                <a:spcPct val="145000"/>
+                <a:spcPct val="96000"/>
               </a:lnSpc>
               <a:spcBef>
                 <a:spcPts val="300"/>
               </a:spcBef>
               <a:buClr>
-                <a:srgbClr val="8FBACE"/>
+                <a:srgbClr val="8CC2C2"/>
               </a:buClr>
               <a:buSzPct val="90000"/>
               <a:buFont typeface="Arial"/>
@@ -7452,13 +7487,13 @@
           <a:p>
             <a:pPr algn="l" marL="274320" indent="-274320">
               <a:lnSpc>
-                <a:spcPct val="145000"/>
+                <a:spcPct val="96000"/>
               </a:lnSpc>
               <a:spcBef>
                 <a:spcPts val="300"/>
               </a:spcBef>
               <a:buClr>
-                <a:srgbClr val="8FBACE"/>
+                <a:srgbClr val="8CC2C2"/>
               </a:buClr>
               <a:buSzPct val="90000"/>
               <a:buFont typeface="Arial"/>
@@ -7947,15 +7982,70 @@
               <a:buNone/>
             </a:pPr>
             <a:r>
-              <a:rPr lang="th-TH" sz="1000" dirty="0">
-                <a:solidFill>
-                  <a:srgbClr val="5F5F5F"/>
+              <a:rPr lang="th-TH" sz="1000" b="1" dirty="0">
+                <a:solidFill>
+                  <a:srgbClr val="23436D"/>
                 </a:solidFill>
                 <a:latin typeface="+mn-lt"/>
                 <a:ea typeface="+mn-ea"/>
                 <a:cs typeface="+mn-cs"/>
               </a:rPr>
-              <a:t>■ หมวด 1  ■ หมวด 2  ■ หมวด 3</a:t>
+              <a:t>■ </a:t>
+            </a:r>
+            <a:r>
+              <a:rPr lang="th-TH" sz="1000" dirty="0">
+                <a:solidFill>
+                  <a:srgbClr val="5F5F5F"/>
+                </a:solidFill>
+                <a:latin typeface="+mn-lt"/>
+                <a:ea typeface="+mn-ea"/>
+                <a:cs typeface="+mn-cs"/>
+              </a:rPr>
+              <a:t>หมวด 1   </a:t>
+            </a:r>
+            <a:r>
+              <a:rPr lang="th-TH" sz="1000" b="1" dirty="0">
+                <a:solidFill>
+                  <a:srgbClr val="216B7F"/>
+                </a:solidFill>
+                <a:latin typeface="+mn-lt"/>
+                <a:ea typeface="+mn-ea"/>
+                <a:cs typeface="+mn-cs"/>
+              </a:rPr>
+              <a:t>■ </a:t>
+            </a:r>
+            <a:r>
+              <a:rPr lang="th-TH" sz="1000" dirty="0">
+                <a:solidFill>
+                  <a:srgbClr val="5F5F5F"/>
+                </a:solidFill>
+                <a:latin typeface="+mn-lt"/>
+                <a:ea typeface="+mn-ea"/>
+                <a:cs typeface="+mn-cs"/>
+              </a:rPr>
+              <a:t>หมวด 2   </a:t>
+            </a:r>
+            <a:r>
+              <a:rPr lang="th-TH" sz="1000" b="1" dirty="0">
+                <a:solidFill>
+                  <a:srgbClr val="16324F"/>
+                </a:solidFill>
+                <a:latin typeface="+mn-lt"/>
+                <a:ea typeface="+mn-ea"/>
+                <a:cs typeface="+mn-cs"/>
+              </a:rPr>
+              <a:t>■ </a:t>
+            </a:r>
+            <a:r>
+              <a:rPr lang="th-TH" sz="1000" dirty="0">
+                <a:solidFill>
+                  <a:srgbClr val="5F5F5F"/>
+                </a:solidFill>
+                <a:latin typeface="+mn-lt"/>
+                <a:ea typeface="+mn-ea"/>
+                <a:cs typeface="+mn-cs"/>
+              </a:rPr>
+              <a:t>หมวด 3</a:t>
             </a:r>
           </a:p>
         </p:txBody>
@@ -8076,7 +8166,7 @@
               <a:buNone/>
               <a:defRPr lang="th-TH" sz="1200" b="1" spc="120" dirty="0">
                 <a:solidFill>
-                  <a:srgbClr val="216B7F"/>
+                  <a:srgbClr val="006666"/>
                 </a:solidFill>
                 <a:latin typeface="+mn-lt"/>
                 <a:ea typeface="+mn-ea"/>
@@ -8094,7 +8184,7 @@
             <a:r>
               <a:rPr lang="th-TH" sz="1200" b="1" spc="120" dirty="0">
                 <a:solidFill>
-                  <a:srgbClr val="216B7F"/>
+                  <a:srgbClr val="006666"/>
                 </a:solidFill>
                 <a:latin typeface="+mn-lt"/>
                 <a:ea typeface="+mn-ea"/>
@@ -10637,7 +10727,7 @@
               <a:buNone/>
               <a:defRPr lang="th-TH" sz="6000" b="1" dirty="0">
                 <a:solidFill>
-                  <a:srgbClr val="8FBACE"/>
+                  <a:srgbClr val="8CC2C2"/>
                 </a:solidFill>
                 <a:latin typeface="+mj-lt"/>
                 <a:ea typeface="+mj-ea"/>
@@ -10655,7 +10745,7 @@
             <a:r>
               <a:rPr lang="th-TH" sz="6000" b="1" dirty="0">
                 <a:solidFill>
-                  <a:srgbClr val="8FBACE"/>
+                  <a:srgbClr val="8CC2C2"/>
                 </a:solidFill>
                 <a:latin typeface="+mj-lt"/>
                 <a:ea typeface="+mj-ea"/>
@@ -10681,7 +10771,7 @@
             <a:avLst/>
           </a:prstGeom>
           <a:solidFill>
-            <a:srgbClr val="8FBACE"/>
+            <a:srgbClr val="8CC2C2"/>
           </a:solidFill>
           <a:ln>
             <a:noFill/>
@@ -11161,7 +11251,7 @@
                 <a:spcPts val="1000"/>
               </a:spcBef>
               <a:buClr>
-                <a:srgbClr val="216B7F"/>
+                <a:srgbClr val="006666"/>
               </a:buClr>
               <a:buSzPct val="90000"/>
               <a:buFont typeface="Arial"/>
@@ -11229,7 +11319,7 @@
                 <a:spcPts val="1000"/>
               </a:spcBef>
               <a:buClr>
-                <a:srgbClr val="216B7F"/>
+                <a:srgbClr val="006666"/>
               </a:buClr>
               <a:buSzPct val="90000"/>
               <a:buFont typeface="Arial"/>
@@ -11701,7 +11791,7 @@
                 <a:spcPts val="1000"/>
               </a:spcBef>
               <a:buClr>
-                <a:srgbClr val="216B7F"/>
+                <a:srgbClr val="006666"/>
               </a:buClr>
               <a:buSzPct val="90000"/>
               <a:buFont typeface="Arial"/>
@@ -11769,7 +11859,7 @@
                 <a:spcPts val="1000"/>
               </a:spcBef>
               <a:buClr>
-                <a:srgbClr val="216B7F"/>
+                <a:srgbClr val="006666"/>
               </a:buClr>
               <a:buSzPct val="90000"/>
               <a:buFont typeface="Arial"/>
@@ -11873,7 +11963,7 @@
                 <a:spcPts val="1000"/>
               </a:spcBef>
               <a:buClr>
-                <a:srgbClr val="216B7F"/>
+                <a:srgbClr val="006666"/>
               </a:buClr>
               <a:buSzPct val="90000"/>
               <a:buFont typeface="Arial"/>
@@ -11941,7 +12031,7 @@
                 <a:spcPts val="1000"/>
               </a:spcBef>
               <a:buClr>
-                <a:srgbClr val="216B7F"/>
+                <a:srgbClr val="006666"/>
               </a:buClr>
               <a:buSzPct val="90000"/>
               <a:buFont typeface="Arial"/>
@@ -12429,7 +12519,7 @@
             <a:avLst/>
           </a:prstGeom>
           <a:solidFill>
-            <a:srgbClr val="216B7F"/>
+            <a:srgbClr val="006666"/>
           </a:solidFill>
           <a:ln>
             <a:noFill/>
@@ -12611,7 +12701,7 @@
             <a:avLst/>
           </a:prstGeom>
           <a:solidFill>
-            <a:srgbClr val="216B7F"/>
+            <a:srgbClr val="006666"/>
           </a:solidFill>
           <a:ln>
             <a:noFill/>
@@ -12793,7 +12883,7 @@
             <a:avLst/>
           </a:prstGeom>
           <a:solidFill>
-            <a:srgbClr val="216B7F"/>
+            <a:srgbClr val="006666"/>
           </a:solidFill>
           <a:ln>
             <a:noFill/>
@@ -14062,7 +14152,7 @@
                 <a:srgbClr val="23436D"/>
               </a:gs>
               <a:gs pos="100000">
-                <a:srgbClr val="216B7F"/>
+                <a:srgbClr val="006666"/>
               </a:gs>
             </a:gsLst>
             <a:lin ang="5400000" scaled="0"/>
@@ -14111,7 +14201,7 @@
             <a:r>
               <a:rPr lang="th-TH" sz="12000" b="1" dirty="0">
                 <a:solidFill>
-                  <a:srgbClr val="216B7F">
+                  <a:srgbClr val="006666">
                     <a:alpha val="25000"/>
                   </a:srgbClr>
                 </a:solidFill>
@@ -15244,7 +15334,7 @@
               <a:buNone/>
               <a:defRPr lang="th-TH" sz="1200" b="1" spc="120" dirty="0">
                 <a:solidFill>
-                  <a:srgbClr val="216B7F"/>
+                  <a:srgbClr val="006666"/>
                 </a:solidFill>
                 <a:latin typeface="+mn-lt"/>
                 <a:ea typeface="+mn-ea"/>
@@ -15262,7 +15352,7 @@
             <a:r>
               <a:rPr lang="th-TH" sz="1200" b="1" spc="120" dirty="0">
                 <a:solidFill>
-                  <a:srgbClr val="216B7F"/>
+                  <a:srgbClr val="006666"/>
                 </a:solidFill>
                 <a:latin typeface="+mn-lt"/>
                 <a:ea typeface="+mn-ea"/>
@@ -15729,7 +15819,7 @@
                 <a:spcPts val="1000"/>
               </a:spcBef>
               <a:buClr>
-                <a:srgbClr val="216B7F"/>
+                <a:srgbClr val="006666"/>
               </a:buClr>
               <a:buSzPct val="90000"/>
               <a:buFont typeface="Arial"/>
@@ -15797,7 +15887,7 @@
                 <a:spcPts val="1000"/>
               </a:spcBef>
               <a:buClr>
-                <a:srgbClr val="216B7F"/>
+                <a:srgbClr val="006666"/>
               </a:buClr>
               <a:buSzPct val="90000"/>
               <a:buFont typeface="Arial"/>
@@ -16168,7 +16258,7 @@
           <a:spcPts val="1000"/>
         </a:spcBef>
         <a:buClr>
-          <a:srgbClr val="216B7F"/>
+          <a:srgbClr val="006666"/>
         </a:buClr>
         <a:buSzPct val="90000"/>
         <a:buFont typeface="Arial"/>
@@ -16704,6 +16794,12 @@
                     </a:p>
                   </a:txBody>
                   <a:tcPr marL="73152" marR="73152" marT="73152" marB="73152" anchor="ctr">
+                    <a:lnB w="12700" cap="flat">
+                      <a:solidFill>
+                        <a:srgbClr val="FFFFFF"/>
+                      </a:solidFill>
+                      <a:prstDash val="solid"/>
+                    </a:lnB>
                     <a:solidFill>
                       <a:srgbClr val="BFE3CA"/>
                     </a:solidFill>
@@ -16849,6 +16945,12 @@
                     </a:p>
                   </a:txBody>
                   <a:tcPr marL="73152" marR="73152" marT="73152" marB="73152" anchor="ctr">
+                    <a:lnB w="12700" cap="flat">
+                      <a:solidFill>
+                        <a:srgbClr val="FFFFFF"/>
+                      </a:solidFill>
+                      <a:prstDash val="solid"/>
+                    </a:lnB>
                     <a:solidFill>
                       <a:srgbClr val="BFE3CA"/>
                     </a:solidFill>
@@ -16994,6 +17096,12 @@
                     </a:p>
                   </a:txBody>
                   <a:tcPr marL="73152" marR="73152" marT="73152" marB="73152" anchor="ctr">
+                    <a:lnB w="12700" cap="flat">
+                      <a:solidFill>
+                        <a:srgbClr val="FFFFFF"/>
+                      </a:solidFill>
+                      <a:prstDash val="solid"/>
+                    </a:lnB>
                     <a:solidFill>
                       <a:srgbClr val="BFE3CA"/>
                     </a:solidFill>
@@ -17139,6 +17247,12 @@
                     </a:p>
                   </a:txBody>
                   <a:tcPr marL="73152" marR="73152" marT="73152" marB="73152" anchor="ctr">
+                    <a:lnB w="12700" cap="flat">
+                      <a:solidFill>
+                        <a:srgbClr val="FFFFFF"/>
+                      </a:solidFill>
+                      <a:prstDash val="solid"/>
+                    </a:lnB>
                     <a:solidFill>
                       <a:srgbClr val="F2D9AC"/>
                     </a:solidFill>
@@ -17284,6 +17398,12 @@
                     </a:p>
                   </a:txBody>
                   <a:tcPr marL="73152" marR="73152" marT="73152" marB="73152" anchor="ctr">
+                    <a:lnB w="12700" cap="flat">
+                      <a:solidFill>
+                        <a:srgbClr val="FFFFFF"/>
+                      </a:solidFill>
+                      <a:prstDash val="solid"/>
+                    </a:lnB>
                     <a:solidFill>
                       <a:srgbClr val="F2D9AC"/>
                     </a:solidFill>
@@ -17429,6 +17549,12 @@
                     </a:p>
                   </a:txBody>
                   <a:tcPr marL="73152" marR="73152" marT="73152" marB="73152" anchor="ctr">
+                    <a:lnB w="12700" cap="flat">
+                      <a:solidFill>
+                        <a:srgbClr val="FFFFFF"/>
+                      </a:solidFill>
+                      <a:prstDash val="solid"/>
+                    </a:lnB>
                     <a:solidFill>
                       <a:srgbClr val="F6D0CC"/>
                     </a:solidFill>
@@ -17574,6 +17700,12 @@
                     </a:p>
                   </a:txBody>
                   <a:tcPr marL="73152" marR="73152" marT="73152" marB="73152" anchor="ctr">
+                    <a:lnB w="12700" cap="flat">
+                      <a:solidFill>
+                        <a:srgbClr val="FFFFFF"/>
+                      </a:solidFill>
+                      <a:prstDash val="solid"/>
+                    </a:lnB>
                     <a:solidFill>
                       <a:srgbClr val="BFE3CA"/>
                     </a:solidFill>
@@ -17719,6 +17851,12 @@
                     </a:p>
                   </a:txBody>
                   <a:tcPr marL="73152" marR="73152" marT="73152" marB="73152" anchor="ctr">
+                    <a:lnB w="12700" cap="flat">
+                      <a:solidFill>
+                        <a:srgbClr val="FFFFFF"/>
+                      </a:solidFill>
+                      <a:prstDash val="solid"/>
+                    </a:lnB>
                     <a:solidFill>
                       <a:srgbClr val="F6D0CC"/>
                     </a:solidFill>
@@ -18563,7 +18701,7 @@
                   </a:txBody>
                   <a:tcPr marL="73152" marR="73152" marT="73152" marB="73152" anchor="ctr">
                     <a:solidFill>
-                      <a:srgbClr val="216B7F"/>
+                      <a:srgbClr val="006666"/>
                     </a:solidFill>
                   </a:tcPr>
                 </a:tc>
@@ -18655,7 +18793,11 @@
                       </a:r>
                     </a:p>
                   </a:txBody>
-                  <a:tcPr marL="73152" marR="73152" marT="73152" marB="73152" anchor="ctr"/>
+                  <a:tcPr marL="73152" marR="73152" marT="73152" marB="73152" anchor="ctr">
+                    <a:solidFill>
+                      <a:srgbClr val="EBF3F3"/>
+                    </a:solidFill>
+                  </a:tcPr>
                 </a:tc>
                 <a:tc>
                   <a:txBody>
@@ -18745,7 +18887,11 @@
                       </a:r>
                     </a:p>
                   </a:txBody>
-                  <a:tcPr marL="73152" marR="73152" marT="73152" marB="73152" anchor="ctr"/>
+                  <a:tcPr marL="73152" marR="73152" marT="73152" marB="73152" anchor="ctr">
+                    <a:solidFill>
+                      <a:srgbClr val="D5EAEA"/>
+                    </a:solidFill>
+                  </a:tcPr>
                 </a:tc>
                 <a:tc>
                   <a:txBody>
@@ -18835,7 +18981,11 @@
                       </a:r>
                     </a:p>
                   </a:txBody>
-                  <a:tcPr marL="73152" marR="73152" marT="73152" marB="73152" anchor="ctr"/>
+                  <a:tcPr marL="73152" marR="73152" marT="73152" marB="73152" anchor="ctr">
+                    <a:solidFill>
+                      <a:srgbClr val="EBF3F3"/>
+                    </a:solidFill>
+                  </a:tcPr>
                 </a:tc>
                 <a:tc>
                   <a:txBody>
@@ -18925,7 +19075,11 @@
                       </a:r>
                     </a:p>
                   </a:txBody>
-                  <a:tcPr marL="73152" marR="73152" marT="73152" marB="73152" anchor="ctr"/>
+                  <a:tcPr marL="73152" marR="73152" marT="73152" marB="73152" anchor="ctr">
+                    <a:solidFill>
+                      <a:srgbClr val="D5EAEA"/>
+                    </a:solidFill>
+                  </a:tcPr>
                 </a:tc>
                 <a:tc>
                   <a:txBody>
@@ -19015,7 +19169,11 @@
                       </a:r>
                     </a:p>
                   </a:txBody>
-                  <a:tcPr marL="73152" marR="73152" marT="73152" marB="73152" anchor="ctr"/>
+                  <a:tcPr marL="73152" marR="73152" marT="73152" marB="73152" anchor="ctr">
+                    <a:solidFill>
+                      <a:srgbClr val="EBF3F3"/>
+                    </a:solidFill>
+                  </a:tcPr>
                 </a:tc>
                 <a:tc>
                   <a:txBody>
@@ -19059,7 +19217,7 @@
             <a:avLst/>
           </a:prstGeom>
           <a:solidFill>
-            <a:srgbClr val="216B7F"/>
+            <a:srgbClr val="006666"/>
           </a:solidFill>
           <a:ln>
             <a:noFill/>

--- a/NCT-Slide-Template-Corp-Demo.pptx
+++ b/NCT-Slide-Template-Corp-Demo.pptx
@@ -23,6 +23,7 @@
     <p:sldId id="271" r:id="rId17"/>
     <p:sldId id="272" r:id="rId18"/>
     <p:sldId id="273" r:id="rId19"/>
+    <p:sldId id="274" r:id="rId20"/>
   </p:sldIdLst>
   <p:sldSz cx="12192000" cy="6858000"/>
   <p:notesSz cx="6858000" cy="9144000"/>
@@ -115,6 +116,259 @@
 </p:presentation>
 </file>
 
+<file path=ppt/charts/chart1.xml><?xml version="1.0" encoding="utf-8"?>
+<c:chartSpace xmlns:c="http://schemas.openxmlformats.org/drawingml/2006/chart" xmlns:a="http://schemas.openxmlformats.org/drawingml/2006/main" xmlns:r="http://schemas.openxmlformats.org/officeDocument/2006/relationships">
+  <c:roundedCorners val="0"/>
+  <c:chart>
+    <c:autoTitleDeleted val="1"/>
+    <c:plotArea>
+      <c:layout/>
+      <c:barChart>
+        <c:barDir val="col"/>
+        <c:grouping val="clustered"/>
+        <c:varyColors val="0"/>
+        <c:ser>
+          <c:idx val="0"/>
+          <c:order val="0"/>
+          <c:tx>
+            <c:v>เวลาปิดงบ</c:v>
+          </c:tx>
+          <c:spPr>
+            <a:solidFill>
+              <a:srgbClr val="A4A4A4"/>
+            </a:solidFill>
+          </c:spPr>
+          <c:invertIfNegative val="0"/>
+          <c:dPt>
+            <c:idx val="4"/>
+            <c:invertIfNegative val="0"/>
+            <c:bubble3D val="0"/>
+            <c:spPr>
+              <a:solidFill>
+                <a:srgbClr val="2A5EA0"/>
+              </a:solidFill>
+            </c:spPr>
+          </c:dPt>
+          <c:dLbls>
+            <c:dLbl>
+              <c:idx val="4"/>
+              <c:spPr>
+                <a:noFill/>
+                <a:ln>
+                  <a:noFill/>
+                </a:ln>
+              </c:spPr>
+              <c:txPr>
+                <a:bodyPr/>
+                <a:lstStyle/>
+                <a:p>
+                  <a:pPr>
+                    <a:defRPr sz="1400" b="1">
+                      <a:solidFill>
+                        <a:srgbClr val="333333"/>
+                      </a:solidFill>
+                      <a:latin typeface="+mn-lt"/>
+                      <a:ea typeface="+mn-ea"/>
+                      <a:cs typeface="+mn-cs"/>
+                    </a:defRPr>
+                  </a:pPr>
+                  <a:endParaRPr lang="th-TH"/>
+                </a:p>
+              </c:txPr>
+              <c:dLblPos val="outEnd"/>
+              <c:showLegendKey val="0"/>
+              <c:showVal val="1"/>
+              <c:showCatName val="0"/>
+              <c:showSerName val="0"/>
+              <c:showPercent val="0"/>
+              <c:showBubbleSize val="0"/>
+            </c:dLbl>
+            <c:showLegendKey val="0"/>
+            <c:showVal val="0"/>
+            <c:showCatName val="0"/>
+            <c:showSerName val="0"/>
+            <c:showPercent val="0"/>
+            <c:showBubbleSize val="0"/>
+          </c:dLbls>
+          <c:cat>
+            <c:strLit>
+              <c:ptCount val="6"/>
+              <c:pt idx="0">
+                <c:v>ม.ค.</c:v>
+              </c:pt>
+              <c:pt idx="1">
+                <c:v>ก.พ.</c:v>
+              </c:pt>
+              <c:pt idx="2">
+                <c:v>มี.ค.</c:v>
+              </c:pt>
+              <c:pt idx="3">
+                <c:v>เม.ย.</c:v>
+              </c:pt>
+              <c:pt idx="4">
+                <c:v>พ.ค.</c:v>
+              </c:pt>
+              <c:pt idx="5">
+                <c:v>มิ.ย.</c:v>
+              </c:pt>
+            </c:strLit>
+          </c:cat>
+          <c:val>
+            <c:numLit>
+              <c:formatCode>General</c:formatCode>
+              <c:ptCount val="6"/>
+              <c:pt idx="0">
+                <c:v>6</c:v>
+              </c:pt>
+              <c:pt idx="1">
+                <c:v>7</c:v>
+              </c:pt>
+              <c:pt idx="2">
+                <c:v>6</c:v>
+              </c:pt>
+              <c:pt idx="3">
+                <c:v>8</c:v>
+              </c:pt>
+              <c:pt idx="4">
+                <c:v>9</c:v>
+              </c:pt>
+              <c:pt idx="5">
+                <c:v>7</c:v>
+              </c:pt>
+            </c:numLit>
+          </c:val>
+        </c:ser>
+        <c:gapWidth val="360"/>
+        <c:overlap val="0"/>
+        <c:axId val="19001"/>
+        <c:axId val="19002"/>
+      </c:barChart>
+      <c:catAx>
+        <c:axId val="19001"/>
+        <c:scaling>
+          <c:orientation val="minMax"/>
+        </c:scaling>
+        <c:delete val="0"/>
+        <c:axPos val="b"/>
+        <c:numFmt formatCode="General" sourceLinked="0"/>
+        <c:majorTickMark val="none"/>
+        <c:minorTickMark val="none"/>
+        <c:tickLblPos val="nextTo"/>
+        <c:spPr>
+          <a:ln w="9525">
+            <a:solidFill>
+              <a:srgbClr val="A4A4A4"/>
+            </a:solidFill>
+          </a:ln>
+        </c:spPr>
+        <c:txPr>
+          <a:bodyPr/>
+          <a:lstStyle/>
+          <a:p>
+            <a:pPr>
+              <a:defRPr sz="1200">
+                <a:solidFill>
+                  <a:srgbClr val="5F5F5F"/>
+                </a:solidFill>
+                <a:latin typeface="+mn-lt"/>
+                <a:ea typeface="+mn-ea"/>
+                <a:cs typeface="+mn-cs"/>
+              </a:defRPr>
+            </a:pPr>
+            <a:endParaRPr lang="th-TH"/>
+          </a:p>
+        </c:txPr>
+        <c:crossAx val="19002"/>
+        <c:crosses val="autoZero"/>
+        <c:auto val="1"/>
+        <c:lblAlgn val="ctr"/>
+        <c:lblOffset val="100"/>
+        <c:noMultiLvlLbl val="0"/>
+      </c:catAx>
+      <c:valAx>
+        <c:axId val="19002"/>
+        <c:scaling>
+          <c:orientation val="minMax"/>
+          <c:min val="0"/>
+        </c:scaling>
+        <c:delete val="0"/>
+        <c:axPos val="l"/>
+        <c:majorGridlines>
+          <c:spPr>
+            <a:ln w="9525">
+              <a:solidFill>
+                <a:srgbClr val="E5E5E5"/>
+              </a:solidFill>
+            </a:ln>
+          </c:spPr>
+        </c:majorGridlines>
+        <c:numFmt formatCode="#,##0" sourceLinked="0"/>
+        <c:majorTickMark val="none"/>
+        <c:minorTickMark val="none"/>
+        <c:tickLblPos val="nextTo"/>
+        <c:spPr>
+          <a:ln>
+            <a:noFill/>
+          </a:ln>
+        </c:spPr>
+        <c:txPr>
+          <a:bodyPr/>
+          <a:lstStyle/>
+          <a:p>
+            <a:pPr>
+              <a:defRPr sz="1200">
+                <a:solidFill>
+                  <a:srgbClr val="5F5F5F"/>
+                </a:solidFill>
+                <a:latin typeface="+mn-lt"/>
+                <a:ea typeface="+mn-ea"/>
+                <a:cs typeface="+mn-cs"/>
+              </a:defRPr>
+            </a:pPr>
+            <a:endParaRPr lang="th-TH"/>
+          </a:p>
+        </c:txPr>
+        <c:crossAx val="19001"/>
+        <c:crosses val="autoZero"/>
+        <c:crossBetween val="between"/>
+        <c:majorUnit val="2"/>
+      </c:valAx>
+      <c:spPr>
+        <a:noFill/>
+        <a:ln>
+          <a:noFill/>
+        </a:ln>
+      </c:spPr>
+    </c:plotArea>
+    <c:plotVisOnly val="1"/>
+    <c:dispBlanksAs val="gap"/>
+  </c:chart>
+  <c:spPr>
+    <a:noFill/>
+    <a:ln>
+      <a:noFill/>
+    </a:ln>
+  </c:spPr>
+  <c:txPr>
+    <a:bodyPr/>
+    <a:lstStyle/>
+    <a:p>
+      <a:pPr>
+        <a:defRPr sz="1200">
+          <a:solidFill>
+            <a:srgbClr val="5F5F5F"/>
+          </a:solidFill>
+          <a:latin typeface="+mn-lt"/>
+          <a:ea typeface="+mn-ea"/>
+          <a:cs typeface="+mn-cs"/>
+        </a:defRPr>
+      </a:pPr>
+      <a:endParaRPr lang="th-TH"/>
+    </a:p>
+  </c:txPr>
+</c:chartSpace>
+</file>
+
 <file path=ppt/slideLayouts/slideLayout1.xml><?xml version="1.0" encoding="utf-8"?>
 <p:sldLayout xmlns:a="http://schemas.openxmlformats.org/drawingml/2006/main" xmlns:r="http://schemas.openxmlformats.org/officeDocument/2006/relationships" xmlns:p="http://schemas.openxmlformats.org/presentationml/2006/main" type="title" showMasterSp="0" preserve="1">
   <p:cSld name="01 Title Slide">
@@ -3255,7 +3509,7 @@
             <a:avLst/>
           </a:prstGeom>
           <a:solidFill>
-            <a:srgbClr val="23436D"/>
+            <a:srgbClr val="2A5EA0"/>
           </a:solidFill>
           <a:ln>
             <a:noFill/>
@@ -3298,7 +3552,7 @@
               <a:buNone/>
               <a:defRPr lang="th-TH" sz="2400" b="1" dirty="0">
                 <a:solidFill>
-                  <a:srgbClr val="23436D"/>
+                  <a:srgbClr val="2A5EA0"/>
                 </a:solidFill>
                 <a:latin typeface="+mj-lt"/>
                 <a:ea typeface="+mj-ea"/>
@@ -3316,7 +3570,7 @@
             <a:r>
               <a:rPr lang="th-TH" sz="2400" b="1" dirty="0">
                 <a:solidFill>
-                  <a:srgbClr val="23436D"/>
+                  <a:srgbClr val="2A5EA0"/>
                 </a:solidFill>
                 <a:latin typeface="+mj-lt"/>
                 <a:ea typeface="+mj-ea"/>
@@ -3493,7 +3747,7 @@
             <a:avLst/>
           </a:prstGeom>
           <a:solidFill>
-            <a:srgbClr val="216B7F"/>
+            <a:srgbClr val="BB731B"/>
           </a:solidFill>
           <a:ln>
             <a:noFill/>
@@ -3536,7 +3790,7 @@
               <a:buNone/>
               <a:defRPr lang="th-TH" sz="2400" b="1" dirty="0">
                 <a:solidFill>
-                  <a:srgbClr val="216B7F"/>
+                  <a:srgbClr val="BB731B"/>
                 </a:solidFill>
                 <a:latin typeface="+mj-lt"/>
                 <a:ea typeface="+mj-ea"/>
@@ -3554,7 +3808,7 @@
             <a:r>
               <a:rPr lang="th-TH" sz="2400" b="1" dirty="0">
                 <a:solidFill>
-                  <a:srgbClr val="216B7F"/>
+                  <a:srgbClr val="BB731B"/>
                 </a:solidFill>
                 <a:latin typeface="+mj-lt"/>
                 <a:ea typeface="+mj-ea"/>
@@ -3731,7 +3985,7 @@
             <a:avLst/>
           </a:prstGeom>
           <a:solidFill>
-            <a:srgbClr val="4E8FA8"/>
+            <a:srgbClr val="0D9298"/>
           </a:solidFill>
           <a:ln>
             <a:noFill/>
@@ -3774,7 +4028,7 @@
               <a:buNone/>
               <a:defRPr lang="th-TH" sz="2400" b="1" dirty="0">
                 <a:solidFill>
-                  <a:srgbClr val="4E8FA8"/>
+                  <a:srgbClr val="0D9298"/>
                 </a:solidFill>
                 <a:latin typeface="+mj-lt"/>
                 <a:ea typeface="+mj-ea"/>
@@ -3792,7 +4046,7 @@
             <a:r>
               <a:rPr lang="th-TH" sz="2400" b="1" dirty="0">
                 <a:solidFill>
-                  <a:srgbClr val="4E8FA8"/>
+                  <a:srgbClr val="0D9298"/>
                 </a:solidFill>
                 <a:latin typeface="+mj-lt"/>
                 <a:ea typeface="+mj-ea"/>
@@ -3969,7 +4223,7 @@
             <a:avLst/>
           </a:prstGeom>
           <a:solidFill>
-            <a:srgbClr val="16324F"/>
+            <a:srgbClr val="6C4289"/>
           </a:solidFill>
           <a:ln>
             <a:noFill/>
@@ -4012,7 +4266,7 @@
               <a:buNone/>
               <a:defRPr lang="th-TH" sz="2400" b="1" dirty="0">
                 <a:solidFill>
-                  <a:srgbClr val="16324F"/>
+                  <a:srgbClr val="6C4289"/>
                 </a:solidFill>
                 <a:latin typeface="+mj-lt"/>
                 <a:ea typeface="+mj-ea"/>
@@ -4030,7 +4284,7 @@
             <a:r>
               <a:rPr lang="th-TH" sz="2400" b="1" dirty="0">
                 <a:solidFill>
-                  <a:srgbClr val="16324F"/>
+                  <a:srgbClr val="6C4289"/>
                 </a:solidFill>
                 <a:latin typeface="+mj-lt"/>
                 <a:ea typeface="+mj-ea"/>
@@ -7984,7 +8238,7 @@
             <a:r>
               <a:rPr lang="th-TH" sz="1000" b="1" dirty="0">
                 <a:solidFill>
-                  <a:srgbClr val="23436D"/>
+                  <a:srgbClr val="2A5EA0"/>
                 </a:solidFill>
                 <a:latin typeface="+mn-lt"/>
                 <a:ea typeface="+mn-ea"/>
@@ -8006,7 +8260,7 @@
             <a:r>
               <a:rPr lang="th-TH" sz="1000" b="1" dirty="0">
                 <a:solidFill>
-                  <a:srgbClr val="216B7F"/>
+                  <a:srgbClr val="BB731B"/>
                 </a:solidFill>
                 <a:latin typeface="+mn-lt"/>
                 <a:ea typeface="+mn-ea"/>
@@ -8028,7 +8282,7 @@
             <a:r>
               <a:rPr lang="th-TH" sz="1000" b="1" dirty="0">
                 <a:solidFill>
-                  <a:srgbClr val="16324F"/>
+                  <a:srgbClr val="0D9298"/>
                 </a:solidFill>
                 <a:latin typeface="+mn-lt"/>
                 <a:ea typeface="+mn-ea"/>
@@ -10293,6 +10547,815 @@
               <a:buNone/>
             </a:pPr>
             <a:endParaRPr lang="th-TH" sz="1400"/>
+          </a:p>
+        </p:txBody>
+      </p:sp>
+      <p:sp>
+        <p:nvSpPr>
+          <p:cNvPr id="90" name="Foot Bar 1"/>
+          <p:cNvSpPr/>
+          <p:nvPr/>
+        </p:nvSpPr>
+        <p:spPr>
+          <a:xfrm>
+            <a:off x="0" y="6675120"/>
+            <a:ext cx="822960" cy="137160"/>
+          </a:xfrm>
+          <a:prstGeom prst="rect">
+            <a:avLst/>
+          </a:prstGeom>
+          <a:solidFill>
+            <a:srgbClr val="006666"/>
+          </a:solidFill>
+          <a:ln>
+            <a:noFill/>
+          </a:ln>
+        </p:spPr>
+        <p:txBody>
+          <a:bodyPr/>
+          <a:lstStyle/>
+          <a:p>
+            <a:endParaRPr lang="th-TH"/>
+          </a:p>
+        </p:txBody>
+      </p:sp>
+      <p:sp>
+        <p:nvSpPr>
+          <p:cNvPr id="91" name="Foot Bar 2"/>
+          <p:cNvSpPr/>
+          <p:nvPr/>
+        </p:nvSpPr>
+        <p:spPr>
+          <a:xfrm>
+            <a:off x="822960" y="6675120"/>
+            <a:ext cx="822960" cy="137160"/>
+          </a:xfrm>
+          <a:prstGeom prst="rect">
+            <a:avLst/>
+          </a:prstGeom>
+          <a:solidFill>
+            <a:srgbClr val="A9C2C2"/>
+          </a:solidFill>
+          <a:ln>
+            <a:noFill/>
+          </a:ln>
+        </p:spPr>
+        <p:txBody>
+          <a:bodyPr/>
+          <a:lstStyle/>
+          <a:p>
+            <a:endParaRPr lang="th-TH"/>
+          </a:p>
+        </p:txBody>
+      </p:sp>
+      <p:sp>
+        <p:nvSpPr>
+          <p:cNvPr id="92" name="Foot Bar 3"/>
+          <p:cNvSpPr/>
+          <p:nvPr/>
+        </p:nvSpPr>
+        <p:spPr>
+          <a:xfrm>
+            <a:off x="1645920" y="6675120"/>
+            <a:ext cx="822960" cy="137160"/>
+          </a:xfrm>
+          <a:prstGeom prst="rect">
+            <a:avLst/>
+          </a:prstGeom>
+          <a:solidFill>
+            <a:srgbClr val="E1E1E1"/>
+          </a:solidFill>
+          <a:ln>
+            <a:noFill/>
+          </a:ln>
+        </p:spPr>
+        <p:txBody>
+          <a:bodyPr/>
+          <a:lstStyle/>
+          <a:p>
+            <a:endParaRPr lang="th-TH"/>
+          </a:p>
+        </p:txBody>
+      </p:sp>
+      <p:sp>
+        <p:nvSpPr>
+          <p:cNvPr id="93" name="Footer Placeholder"/>
+          <p:cNvSpPr>
+            <a:spLocks noGrp="1"/>
+          </p:cNvSpPr>
+          <p:nvPr>
+            <p:ph type="ftr" idx="11"/>
+          </p:nvPr>
+        </p:nvSpPr>
+        <p:spPr>
+          <a:xfrm>
+            <a:off x="2697480" y="6400800"/>
+            <a:ext cx="4572000" cy="274320"/>
+          </a:xfrm>
+          <a:prstGeom prst="rect">
+            <a:avLst/>
+          </a:prstGeom>
+        </p:spPr>
+        <p:txBody>
+          <a:bodyPr wrap="square" anchor="ctr" lIns="0" tIns="0" rIns="0" bIns="0" rtlCol="0"/>
+          <a:lstStyle>
+            <a:lvl1pPr algn="l" marL="0" indent="0">
+              <a:lnSpc>
+                <a:spcPct val="100000"/>
+              </a:lnSpc>
+              <a:buNone/>
+              <a:defRPr lang="th-TH" sz="1000" dirty="0">
+                <a:solidFill>
+                  <a:srgbClr val="5F5F5F"/>
+                </a:solidFill>
+                <a:latin typeface="+mn-lt"/>
+                <a:ea typeface="+mn-ea"/>
+                <a:cs typeface="+mn-cs"/>
+              </a:defRPr>
+            </a:lvl1pPr>
+          </a:lstStyle>
+          <a:p>
+            <a:pPr algn="l" marL="0" indent="0">
+              <a:lnSpc>
+                <a:spcPct val="100000"/>
+              </a:lnSpc>
+              <a:buNone/>
+            </a:pPr>
+            <a:endParaRPr lang="th-TH" sz="1000"/>
+          </a:p>
+        </p:txBody>
+      </p:sp>
+      <p:sp>
+        <p:nvSpPr>
+          <p:cNvPr id="94" name="Slide Number Placeholder"/>
+          <p:cNvSpPr>
+            <a:spLocks noGrp="1"/>
+          </p:cNvSpPr>
+          <p:nvPr>
+            <p:ph type="sldNum" sz="quarter" idx="12"/>
+          </p:nvPr>
+        </p:nvSpPr>
+        <p:spPr>
+          <a:xfrm>
+            <a:off x="10591800" y="6400800"/>
+            <a:ext cx="1371600" cy="274320"/>
+          </a:xfrm>
+          <a:prstGeom prst="rect">
+            <a:avLst/>
+          </a:prstGeom>
+        </p:spPr>
+        <p:txBody>
+          <a:bodyPr anchor="ctr"/>
+          <a:lstStyle>
+            <a:lvl1pPr algn="r" marL="0" indent="0">
+              <a:lnSpc>
+                <a:spcPct val="100000"/>
+              </a:lnSpc>
+              <a:buNone/>
+              <a:defRPr lang="th-TH" sz="1000" dirty="0">
+                <a:solidFill>
+                  <a:srgbClr val="5F5F5F"/>
+                </a:solidFill>
+                <a:latin typeface="+mn-lt"/>
+                <a:ea typeface="+mn-ea"/>
+                <a:cs typeface="+mn-cs"/>
+              </a:defRPr>
+            </a:lvl1pPr>
+          </a:lstStyle>
+          <a:p>
+            <a:pPr algn="r" marL="0" indent="0">
+              <a:buNone/>
+            </a:pPr>
+            <a:fld id="{B7E3A1C2-4F5D-4A88-9C1E-6D2F0A93B451}" type="slidenum">
+              <a:rPr lang="th-TH" sz="1000">
+                <a:solidFill>
+                  <a:srgbClr val="5F5F5F"/>
+                </a:solidFill>
+                <a:latin typeface="+mn-lt"/>
+                <a:cs typeface="+mn-cs"/>
+              </a:rPr>
+              <a:t>2</a:t>
+            </a:fld>
+            <a:endParaRPr lang="th-TH" sz="1000"/>
+          </a:p>
+        </p:txBody>
+      </p:sp>
+      <p:sp>
+        <p:nvSpPr>
+          <p:cNvPr id="95" name="Corner Lockup"/>
+          <p:cNvSpPr/>
+          <p:nvPr/>
+        </p:nvSpPr>
+        <p:spPr>
+          <a:xfrm rot="10800000">
+            <a:off x="10546080" y="-274320"/>
+            <a:ext cx="1645920" cy="822960"/>
+          </a:xfrm>
+          <a:prstGeom prst="round2SameRect">
+            <a:avLst>
+              <a:gd name="adj1" fmla="val 12000"/>
+              <a:gd name="adj2" fmla="val 0"/>
+            </a:avLst>
+          </a:prstGeom>
+          <a:solidFill>
+            <a:srgbClr val="FFFFFF"/>
+          </a:solidFill>
+          <a:ln w="12700">
+            <a:solidFill>
+              <a:srgbClr val="006666"/>
+            </a:solidFill>
+          </a:ln>
+        </p:spPr>
+        <p:txBody>
+          <a:bodyPr/>
+          <a:lstStyle/>
+          <a:p>
+            <a:endParaRPr lang="th-TH"/>
+          </a:p>
+        </p:txBody>
+      </p:sp>
+      <p:pic>
+        <p:nvPicPr>
+          <p:cNvPr id="96" name="NCT Mark"/>
+          <p:cNvPicPr>
+            <a:picLocks noChangeAspect="1"/>
+          </p:cNvPicPr>
+          <p:nvPr/>
+        </p:nvPicPr>
+        <p:blipFill>
+          <a:blip r:embed="rId2"/>
+          <a:stretch>
+            <a:fillRect/>
+          </a:stretch>
+        </p:blipFill>
+        <p:spPr>
+          <a:xfrm>
+            <a:off x="11094720" y="99822"/>
+            <a:ext cx="548640" cy="348996"/>
+          </a:xfrm>
+          <a:prstGeom prst="rect">
+            <a:avLst/>
+          </a:prstGeom>
+        </p:spPr>
+      </p:pic>
+    </p:spTree>
+  </p:cSld>
+  <p:clrMapOvr>
+    <a:masterClrMapping/>
+  </p:clrMapOvr>
+</p:sldLayout>
+</file>
+
+<file path=ppt/slideLayouts/slideLayout19.xml><?xml version="1.0" encoding="utf-8"?>
+<p:sldLayout xmlns:a="http://schemas.openxmlformats.org/drawingml/2006/main" xmlns:r="http://schemas.openxmlformats.org/officeDocument/2006/relationships" xmlns:p="http://schemas.openxmlformats.org/presentationml/2006/main" type="chartAndTx" showMasterSp="0" preserve="1">
+  <p:cSld name="19 Chart + Insight">
+    <p:bg>
+      <p:bgPr>
+        <a:solidFill>
+          <a:srgbClr val="FFFFFF"/>
+        </a:solidFill>
+        <a:effectLst/>
+      </p:bgPr>
+    </p:bg>
+    <p:spTree>
+      <p:nvGrpSpPr>
+        <p:cNvPr id="1" name=""/>
+        <p:cNvGrpSpPr/>
+        <p:nvPr/>
+      </p:nvGrpSpPr>
+      <p:grpSpPr>
+        <a:xfrm>
+          <a:off x="0" y="0"/>
+          <a:ext cx="0" cy="0"/>
+          <a:chOff x="0" y="0"/>
+          <a:chExt cx="0" cy="0"/>
+        </a:xfrm>
+      </p:grpSpPr>
+      <p:sp>
+        <p:nvSpPr>
+          <p:cNvPr id="10" name="Title Placeholder"/>
+          <p:cNvSpPr>
+            <a:spLocks noGrp="1"/>
+          </p:cNvSpPr>
+          <p:nvPr>
+            <p:ph type="title"/>
+          </p:nvPr>
+        </p:nvSpPr>
+        <p:spPr>
+          <a:xfrm>
+            <a:off x="914400" y="548640"/>
+            <a:ext cx="10363200" cy="731520"/>
+          </a:xfrm>
+          <a:prstGeom prst="rect">
+            <a:avLst/>
+          </a:prstGeom>
+        </p:spPr>
+        <p:txBody>
+          <a:bodyPr wrap="square" anchor="b" lIns="0" tIns="0" rIns="0" bIns="0" rtlCol="0"/>
+          <a:lstStyle>
+            <a:lvl1pPr algn="l" marL="0" indent="0">
+              <a:lnSpc>
+                <a:spcPct val="108000"/>
+              </a:lnSpc>
+              <a:buNone/>
+              <a:defRPr lang="th-TH" sz="3200" b="1" dirty="0">
+                <a:solidFill>
+                  <a:srgbClr val="333333"/>
+                </a:solidFill>
+                <a:latin typeface="+mj-lt"/>
+                <a:ea typeface="+mj-ea"/>
+                <a:cs typeface="+mj-cs"/>
+              </a:defRPr>
+            </a:lvl1pPr>
+          </a:lstStyle>
+          <a:p>
+            <a:pPr algn="l" marL="0" indent="0">
+              <a:lnSpc>
+                <a:spcPct val="108000"/>
+              </a:lnSpc>
+              <a:buNone/>
+            </a:pPr>
+            <a:r>
+              <a:rPr lang="th-TH" sz="3200" b="1" dirty="0">
+                <a:solidFill>
+                  <a:srgbClr val="333333"/>
+                </a:solidFill>
+                <a:latin typeface="+mj-lt"/>
+                <a:ea typeface="+mj-ea"/>
+                <a:cs typeface="+mj-cs"/>
+              </a:rPr>
+              <a:t>ชื่อสไลด์</a:t>
+            </a:r>
+          </a:p>
+        </p:txBody>
+      </p:sp>
+      <p:sp>
+        <p:nvSpPr>
+          <p:cNvPr id="11" name="Accent Rule"/>
+          <p:cNvSpPr/>
+          <p:nvPr/>
+        </p:nvSpPr>
+        <p:spPr>
+          <a:xfrm>
+            <a:off x="0" y="1371600"/>
+            <a:ext cx="12192000" cy="68580"/>
+          </a:xfrm>
+          <a:prstGeom prst="rect">
+            <a:avLst/>
+          </a:prstGeom>
+          <a:solidFill>
+            <a:srgbClr val="006666"/>
+          </a:solidFill>
+          <a:ln>
+            <a:noFill/>
+          </a:ln>
+        </p:spPr>
+        <p:txBody>
+          <a:bodyPr/>
+          <a:lstStyle/>
+          <a:p>
+            <a:endParaRPr lang="th-TH"/>
+          </a:p>
+        </p:txBody>
+      </p:sp>
+      <p:sp>
+        <p:nvSpPr>
+          <p:cNvPr id="12" name="Chart Placeholder"/>
+          <p:cNvSpPr>
+            <a:spLocks noGrp="1"/>
+          </p:cNvSpPr>
+          <p:nvPr>
+            <p:ph type="chart" idx="1"/>
+          </p:nvPr>
+        </p:nvSpPr>
+        <p:spPr>
+          <a:xfrm>
+            <a:off x="914400" y="1691640"/>
+            <a:ext cx="6847840" cy="3474720"/>
+          </a:xfrm>
+          <a:prstGeom prst="rect">
+            <a:avLst/>
+          </a:prstGeom>
+        </p:spPr>
+        <p:txBody>
+          <a:bodyPr wrap="square" anchor="ctr" lIns="0" tIns="0" rIns="0" bIns="0" rtlCol="0"/>
+          <a:lstStyle>
+            <a:lvl1pPr algn="l" marL="0" indent="0">
+              <a:lnSpc>
+                <a:spcPct val="100000"/>
+              </a:lnSpc>
+              <a:buNone/>
+              <a:defRPr lang="th-TH" sz="1200" dirty="0">
+                <a:solidFill>
+                  <a:srgbClr val="5F5F5F"/>
+                </a:solidFill>
+                <a:latin typeface="+mn-lt"/>
+                <a:ea typeface="+mn-ea"/>
+                <a:cs typeface="+mn-cs"/>
+              </a:defRPr>
+            </a:lvl1pPr>
+          </a:lstStyle>
+          <a:p>
+            <a:pPr algn="l" marL="0" indent="0">
+              <a:lnSpc>
+                <a:spcPct val="100000"/>
+              </a:lnSpc>
+              <a:buNone/>
+            </a:pPr>
+            <a:endParaRPr lang="th-TH" sz="1200"/>
+          </a:p>
+        </p:txBody>
+      </p:sp>
+      <p:sp>
+        <p:nvSpPr>
+          <p:cNvPr id="13" name="Figure"/>
+          <p:cNvSpPr>
+            <a:spLocks noGrp="1"/>
+          </p:cNvSpPr>
+          <p:nvPr>
+            <p:ph type="body" idx="2"/>
+          </p:nvPr>
+        </p:nvSpPr>
+        <p:spPr>
+          <a:xfrm>
+            <a:off x="7945120" y="1691640"/>
+            <a:ext cx="3332480" cy="1005840"/>
+          </a:xfrm>
+          <a:prstGeom prst="rect">
+            <a:avLst/>
+          </a:prstGeom>
+        </p:spPr>
+        <p:txBody>
+          <a:bodyPr wrap="square" anchor="b" lIns="0" tIns="0" rIns="0" bIns="0" rtlCol="0"/>
+          <a:lstStyle>
+            <a:lvl1pPr algn="l" marL="0" indent="0">
+              <a:lnSpc>
+                <a:spcPct val="100000"/>
+              </a:lnSpc>
+              <a:buNone/>
+              <a:defRPr lang="th-TH" sz="7200" b="1" dirty="0">
+                <a:solidFill>
+                  <a:srgbClr val="23436D"/>
+                </a:solidFill>
+                <a:latin typeface="+mj-lt"/>
+                <a:ea typeface="+mj-ea"/>
+                <a:cs typeface="+mj-cs"/>
+              </a:defRPr>
+            </a:lvl1pPr>
+          </a:lstStyle>
+          <a:p>
+            <a:pPr algn="l" marL="0" indent="0">
+              <a:lnSpc>
+                <a:spcPct val="100000"/>
+              </a:lnSpc>
+              <a:buNone/>
+            </a:pPr>
+            <a:r>
+              <a:rPr lang="th-TH" sz="7200" b="1" dirty="0">
+                <a:solidFill>
+                  <a:srgbClr val="23436D"/>
+                </a:solidFill>
+                <a:latin typeface="+mj-lt"/>
+                <a:ea typeface="+mj-ea"/>
+                <a:cs typeface="+mj-cs"/>
+              </a:rPr>
+              <a:t>00%</a:t>
+            </a:r>
+          </a:p>
+        </p:txBody>
+      </p:sp>
+      <p:sp>
+        <p:nvSpPr>
+          <p:cNvPr id="14" name="Figure Label"/>
+          <p:cNvSpPr>
+            <a:spLocks noGrp="1"/>
+          </p:cNvSpPr>
+          <p:nvPr>
+            <p:ph type="body" idx="3"/>
+          </p:nvPr>
+        </p:nvSpPr>
+        <p:spPr>
+          <a:xfrm>
+            <a:off x="7945120" y="2697480"/>
+            <a:ext cx="3332480" cy="457200"/>
+          </a:xfrm>
+          <a:prstGeom prst="rect">
+            <a:avLst/>
+          </a:prstGeom>
+        </p:spPr>
+        <p:txBody>
+          <a:bodyPr wrap="square" anchor="t" lIns="0" tIns="0" rIns="0" bIns="0" rtlCol="0"/>
+          <a:lstStyle>
+            <a:lvl1pPr algn="l" marL="0" indent="0">
+              <a:lnSpc>
+                <a:spcPct val="130000"/>
+              </a:lnSpc>
+              <a:buNone/>
+              <a:defRPr lang="th-TH" sz="1200" b="1" spc="120" dirty="0">
+                <a:solidFill>
+                  <a:srgbClr val="5F5F5F"/>
+                </a:solidFill>
+                <a:latin typeface="+mn-lt"/>
+                <a:ea typeface="+mn-ea"/>
+                <a:cs typeface="+mn-cs"/>
+              </a:defRPr>
+            </a:lvl1pPr>
+          </a:lstStyle>
+          <a:p>
+            <a:pPr algn="l" marL="0" indent="0">
+              <a:lnSpc>
+                <a:spcPct val="130000"/>
+              </a:lnSpc>
+              <a:buNone/>
+            </a:pPr>
+            <a:r>
+              <a:rPr lang="th-TH" sz="1200" b="1" spc="120" dirty="0">
+                <a:solidFill>
+                  <a:srgbClr val="5F5F5F"/>
+                </a:solidFill>
+                <a:latin typeface="+mn-lt"/>
+                <a:ea typeface="+mn-ea"/>
+                <a:cs typeface="+mn-cs"/>
+              </a:rPr>
+              <a:t>ตัวเลขนี้วัดอะไร</a:t>
+            </a:r>
+          </a:p>
+        </p:txBody>
+      </p:sp>
+      <p:sp>
+        <p:nvSpPr>
+          <p:cNvPr id="15" name="Insight"/>
+          <p:cNvSpPr>
+            <a:spLocks noGrp="1"/>
+          </p:cNvSpPr>
+          <p:nvPr>
+            <p:ph type="body" idx="4"/>
+          </p:nvPr>
+        </p:nvSpPr>
+        <p:spPr>
+          <a:xfrm>
+            <a:off x="7945120" y="3291840"/>
+            <a:ext cx="3332480" cy="1874520"/>
+          </a:xfrm>
+          <a:prstGeom prst="rect">
+            <a:avLst/>
+          </a:prstGeom>
+        </p:spPr>
+        <p:txBody>
+          <a:bodyPr wrap="square" anchor="t" lIns="0" tIns="0" rIns="0" bIns="0" rtlCol="0"/>
+          <a:lstStyle>
+            <a:lvl1pPr algn="l" marL="228600" indent="-228600">
+              <a:lnSpc>
+                <a:spcPct val="86000"/>
+              </a:lnSpc>
+              <a:spcBef>
+                <a:spcPts val="600"/>
+              </a:spcBef>
+              <a:buClr>
+                <a:srgbClr val="006666"/>
+              </a:buClr>
+              <a:buSzPct val="90000"/>
+              <a:buFont typeface="Arial"/>
+              <a:buChar char="•"/>
+              <a:defRPr lang="th-TH" sz="1600" dirty="0">
+                <a:solidFill>
+                  <a:srgbClr val="333333"/>
+                </a:solidFill>
+                <a:latin typeface="+mn-lt"/>
+                <a:ea typeface="+mn-ea"/>
+                <a:cs typeface="+mn-cs"/>
+              </a:defRPr>
+            </a:lvl1pPr>
+          </a:lstStyle>
+          <a:p>
+            <a:pPr algn="l" marL="228600" indent="-228600">
+              <a:lnSpc>
+                <a:spcPct val="86000"/>
+              </a:lnSpc>
+              <a:spcBef>
+                <a:spcPts val="600"/>
+              </a:spcBef>
+              <a:buClr>
+                <a:srgbClr val="006666"/>
+              </a:buClr>
+              <a:buSzPct val="90000"/>
+              <a:buFont typeface="Arial"/>
+              <a:buChar char="•"/>
+            </a:pPr>
+            <a:r>
+              <a:rPr lang="th-TH" sz="1600" dirty="0">
+                <a:solidFill>
+                  <a:srgbClr val="333333"/>
+                </a:solidFill>
+                <a:latin typeface="+mn-lt"/>
+                <a:ea typeface="+mn-ea"/>
+                <a:cs typeface="+mn-cs"/>
+              </a:rPr>
+              <a:t>สิ่งที่กราฟบอก ไม่เกินสามข้อ</a:t>
+            </a:r>
+          </a:p>
+        </p:txBody>
+      </p:sp>
+      <p:sp>
+        <p:nvSpPr>
+          <p:cNvPr id="16" name="Source"/>
+          <p:cNvSpPr>
+            <a:spLocks noGrp="1"/>
+          </p:cNvSpPr>
+          <p:nvPr>
+            <p:ph type="body" idx="5"/>
+          </p:nvPr>
+        </p:nvSpPr>
+        <p:spPr>
+          <a:xfrm>
+            <a:off x="914400" y="5257800"/>
+            <a:ext cx="10363200" cy="274320"/>
+          </a:xfrm>
+          <a:prstGeom prst="rect">
+            <a:avLst/>
+          </a:prstGeom>
+        </p:spPr>
+        <p:txBody>
+          <a:bodyPr wrap="square" anchor="t" lIns="0" tIns="0" rIns="0" bIns="0" rtlCol="0"/>
+          <a:lstStyle>
+            <a:lvl1pPr algn="l" marL="0" indent="0">
+              <a:lnSpc>
+                <a:spcPct val="130000"/>
+              </a:lnSpc>
+              <a:buNone/>
+              <a:defRPr lang="th-TH" sz="1000" dirty="0">
+                <a:solidFill>
+                  <a:srgbClr val="5F5F5F"/>
+                </a:solidFill>
+                <a:latin typeface="+mn-lt"/>
+                <a:ea typeface="+mn-ea"/>
+                <a:cs typeface="+mn-cs"/>
+              </a:defRPr>
+            </a:lvl1pPr>
+          </a:lstStyle>
+          <a:p>
+            <a:pPr algn="l" marL="0" indent="0">
+              <a:lnSpc>
+                <a:spcPct val="130000"/>
+              </a:lnSpc>
+              <a:buNone/>
+            </a:pPr>
+            <a:r>
+              <a:rPr lang="th-TH" sz="1000" dirty="0">
+                <a:solidFill>
+                  <a:srgbClr val="5F5F5F"/>
+                </a:solidFill>
+                <a:latin typeface="+mn-lt"/>
+                <a:ea typeface="+mn-ea"/>
+                <a:cs typeface="+mn-cs"/>
+              </a:rPr>
+              <a:t>ที่มาของข้อมูล</a:t>
+            </a:r>
+          </a:p>
+        </p:txBody>
+      </p:sp>
+      <p:sp>
+        <p:nvSpPr>
+          <p:cNvPr id="17" name="Takeaway Band"/>
+          <p:cNvSpPr/>
+          <p:nvPr/>
+        </p:nvSpPr>
+        <p:spPr>
+          <a:xfrm>
+            <a:off x="914400" y="5623560"/>
+            <a:ext cx="10363200" cy="411480"/>
+          </a:xfrm>
+          <a:prstGeom prst="rect">
+            <a:avLst/>
+          </a:prstGeom>
+          <a:solidFill>
+            <a:srgbClr val="E8F6F5"/>
+          </a:solidFill>
+          <a:ln>
+            <a:noFill/>
+          </a:ln>
+        </p:spPr>
+        <p:txBody>
+          <a:bodyPr/>
+          <a:lstStyle/>
+          <a:p>
+            <a:endParaRPr lang="th-TH"/>
+          </a:p>
+        </p:txBody>
+      </p:sp>
+      <p:sp>
+        <p:nvSpPr>
+          <p:cNvPr id="18" name="Takeaway Label"/>
+          <p:cNvSpPr>
+            <a:spLocks noGrp="1"/>
+          </p:cNvSpPr>
+          <p:nvPr>
+            <p:ph type="body" idx="6"/>
+          </p:nvPr>
+        </p:nvSpPr>
+        <p:spPr>
+          <a:xfrm>
+            <a:off x="1097280" y="5684520"/>
+            <a:ext cx="1828800" cy="289560"/>
+          </a:xfrm>
+          <a:prstGeom prst="rect">
+            <a:avLst/>
+          </a:prstGeom>
+        </p:spPr>
+        <p:txBody>
+          <a:bodyPr wrap="square" anchor="ctr" lIns="0" tIns="0" rIns="0" bIns="0" rtlCol="0"/>
+          <a:lstStyle>
+            <a:lvl1pPr algn="l" marL="0" indent="0">
+              <a:lnSpc>
+                <a:spcPct val="100000"/>
+              </a:lnSpc>
+              <a:buNone/>
+              <a:defRPr lang="th-TH" sz="1200" b="1" spc="120" dirty="0">
+                <a:solidFill>
+                  <a:srgbClr val="006666"/>
+                </a:solidFill>
+                <a:latin typeface="+mn-lt"/>
+                <a:ea typeface="+mn-ea"/>
+                <a:cs typeface="+mn-cs"/>
+              </a:defRPr>
+            </a:lvl1pPr>
+          </a:lstStyle>
+          <a:p>
+            <a:pPr algn="l" marL="0" indent="0">
+              <a:lnSpc>
+                <a:spcPct val="100000"/>
+              </a:lnSpc>
+              <a:buNone/>
+            </a:pPr>
+            <a:r>
+              <a:rPr lang="th-TH" sz="1200" b="1" spc="120" dirty="0">
+                <a:solidFill>
+                  <a:srgbClr val="006666"/>
+                </a:solidFill>
+                <a:latin typeface="+mn-lt"/>
+                <a:ea typeface="+mn-ea"/>
+                <a:cs typeface="+mn-cs"/>
+              </a:rPr>
+              <a:t>สรุป</a:t>
+            </a:r>
+          </a:p>
+        </p:txBody>
+      </p:sp>
+      <p:sp>
+        <p:nvSpPr>
+          <p:cNvPr id="19" name="Takeaway Copy"/>
+          <p:cNvSpPr>
+            <a:spLocks noGrp="1"/>
+          </p:cNvSpPr>
+          <p:nvPr>
+            <p:ph type="body" idx="7"/>
+          </p:nvPr>
+        </p:nvSpPr>
+        <p:spPr>
+          <a:xfrm>
+            <a:off x="2926080" y="5684520"/>
+            <a:ext cx="8168640" cy="289560"/>
+          </a:xfrm>
+          <a:prstGeom prst="rect">
+            <a:avLst/>
+          </a:prstGeom>
+        </p:spPr>
+        <p:txBody>
+          <a:bodyPr wrap="square" anchor="ctr" lIns="0" tIns="0" rIns="0" bIns="0" rtlCol="0"/>
+          <a:lstStyle>
+            <a:lvl1pPr algn="l" marL="0" indent="0">
+              <a:lnSpc>
+                <a:spcPct val="100000"/>
+              </a:lnSpc>
+              <a:buNone/>
+              <a:defRPr lang="th-TH" sz="1400" dirty="0">
+                <a:solidFill>
+                  <a:srgbClr val="333333"/>
+                </a:solidFill>
+                <a:latin typeface="+mn-lt"/>
+                <a:ea typeface="+mn-ea"/>
+                <a:cs typeface="+mn-cs"/>
+              </a:defRPr>
+            </a:lvl1pPr>
+          </a:lstStyle>
+          <a:p>
+            <a:pPr algn="l" marL="0" indent="0">
+              <a:lnSpc>
+                <a:spcPct val="100000"/>
+              </a:lnSpc>
+              <a:buNone/>
+            </a:pPr>
+            <a:r>
+              <a:rPr lang="th-TH" sz="1400" dirty="0">
+                <a:solidFill>
+                  <a:srgbClr val="333333"/>
+                </a:solidFill>
+                <a:latin typeface="+mn-lt"/>
+                <a:ea typeface="+mn-ea"/>
+                <a:cs typeface="+mn-cs"/>
+              </a:rPr>
+              <a:t>ประเด็นสรุปหนึ่งบรรทัด</a:t>
+            </a:r>
           </a:p>
         </p:txBody>
       </p:sp>
@@ -16194,7 +17257,7 @@
           <p:nvPr/>
         </p:nvPicPr>
         <p:blipFill>
-          <a:blip r:embed="rId20"/>
+          <a:blip r:embed="rId21"/>
           <a:stretch>
             <a:fillRect/>
           </a:stretch>
@@ -16231,6 +17294,7 @@
     <p:sldLayoutId id="2147483664" r:id="rId16"/>
     <p:sldLayoutId id="2147483665" r:id="rId17"/>
     <p:sldLayoutId id="2147483666" r:id="rId18"/>
+    <p:sldLayoutId id="2147483667" r:id="rId19"/>
   </p:sldLayoutIdLst>
   <p:txStyles>
     <p:titleStyle>
@@ -16453,6 +17517,596 @@
 </file>
 
 <file path=ppt/slides/slide10.xml><?xml version="1.0" encoding="utf-8"?>
+<p:sld xmlns:a="http://schemas.openxmlformats.org/drawingml/2006/main" xmlns:r="http://schemas.openxmlformats.org/officeDocument/2006/relationships" xmlns:p="http://schemas.openxmlformats.org/presentationml/2006/main">
+  <p:cSld name="">
+    <p:spTree>
+      <p:nvGrpSpPr>
+        <p:cNvPr id="1" name=""/>
+        <p:cNvGrpSpPr/>
+        <p:nvPr/>
+      </p:nvGrpSpPr>
+      <p:grpSpPr>
+        <a:xfrm>
+          <a:off x="0" y="0"/>
+          <a:ext cx="0" cy="0"/>
+          <a:chOff x="0" y="0"/>
+          <a:chExt cx="0" cy="0"/>
+        </a:xfrm>
+      </p:grpSpPr>
+      <p:sp>
+        <p:nvSpPr>
+          <p:cNvPr id="2" name="Title"/>
+          <p:cNvSpPr>
+            <a:spLocks noGrp="1"/>
+          </p:cNvSpPr>
+          <p:nvPr>
+            <p:ph type="title"/>
+          </p:nvPr>
+        </p:nvSpPr>
+        <p:spPr/>
+        <p:txBody>
+          <a:bodyPr/>
+          <a:lstStyle/>
+          <a:p>
+            <a:pPr/>
+            <a:r>
+              <a:rPr lang="th-TH" dirty="0"/>
+              <a:t>ภาพรวมสถาปัตยกรรมระบบ</a:t>
+            </a:r>
+          </a:p>
+        </p:txBody>
+      </p:sp>
+      <p:sp>
+        <p:nvSpPr>
+          <p:cNvPr id="3" name="Sub"/>
+          <p:cNvSpPr>
+            <a:spLocks noGrp="1"/>
+          </p:cNvSpPr>
+          <p:nvPr>
+            <p:ph type="body" idx="1"/>
+          </p:nvPr>
+        </p:nvSpPr>
+        <p:spPr/>
+        <p:txBody>
+          <a:bodyPr/>
+          <a:lstStyle/>
+          <a:p>
+            <a:pPr/>
+            <a:r>
+              <a:rPr lang="th-TH" dirty="0"/>
+              <a:t>ใช้ชุดชิ้นส่วนมาตรฐาน — กล่องมุมตรง เส้นหักมุมฉาก ไม่มีเงา</a:t>
+            </a:r>
+          </a:p>
+        </p:txBody>
+      </p:sp>
+      <p:sp>
+        <p:nvSpPr>
+          <p:cNvPr id="4" name="Leg"/>
+          <p:cNvSpPr>
+            <a:spLocks noGrp="1"/>
+          </p:cNvSpPr>
+          <p:nvPr>
+            <p:ph type="body" idx="2"/>
+          </p:nvPr>
+        </p:nvSpPr>
+        <p:spPr/>
+        <p:txBody>
+          <a:bodyPr/>
+          <a:lstStyle/>
+          <a:p>
+            <a:pPr/>
+            <a:r>
+              <a:rPr lang="th-TH" dirty="0"/>
+              <a:t>กล่องทึบ = ระบบที่มีอยู่  ·  กล่องมีสีหมวด = ส่วนที่เพิ่ม  ·  เส้นทึบ = ข้อมูลไหลอัตโนมัติ</a:t>
+            </a:r>
+          </a:p>
+        </p:txBody>
+      </p:sp>
+      <p:sp>
+        <p:nvSpPr>
+          <p:cNvPr id="5" name="TL"/>
+          <p:cNvSpPr>
+            <a:spLocks noGrp="1"/>
+          </p:cNvSpPr>
+          <p:nvPr>
+            <p:ph type="body" idx="3"/>
+          </p:nvPr>
+        </p:nvSpPr>
+        <p:spPr/>
+        <p:txBody>
+          <a:bodyPr/>
+          <a:lstStyle/>
+          <a:p>
+            <a:pPr/>
+            <a:r>
+              <a:rPr lang="th-TH" dirty="0"/>
+              <a:t>สรุป</a:t>
+            </a:r>
+          </a:p>
+        </p:txBody>
+      </p:sp>
+      <p:sp>
+        <p:nvSpPr>
+          <p:cNvPr id="6" name="TC"/>
+          <p:cNvSpPr>
+            <a:spLocks noGrp="1"/>
+          </p:cNvSpPr>
+          <p:nvPr>
+            <p:ph type="body" idx="4"/>
+          </p:nvPr>
+        </p:nvSpPr>
+        <p:spPr/>
+        <p:txBody>
+          <a:bodyPr/>
+          <a:lstStyle/>
+          <a:p>
+            <a:pPr/>
+            <a:r>
+              <a:rPr lang="th-TH" dirty="0"/>
+              <a:t>ระบบเดิมไม่ถูกแก้ ของใหม่แทรกเป็นคิวและตัวตรวจกฎคั่นกลางเท่านั้น</a:t>
+            </a:r>
+          </a:p>
+        </p:txBody>
+      </p:sp>
+      <p:sp>
+        <p:nvSpPr>
+          <p:cNvPr id="10" name="Group Zone"/>
+          <p:cNvSpPr/>
+          <p:nvPr/>
+        </p:nvSpPr>
+        <p:spPr>
+          <a:xfrm>
+            <a:off x="3566160" y="2766060"/>
+            <a:ext cx="5257800" cy="1645920"/>
+          </a:xfrm>
+          <a:prstGeom prst="rect">
+            <a:avLst/>
+          </a:prstGeom>
+          <a:solidFill>
+            <a:srgbClr val="E8F6F5"/>
+          </a:solidFill>
+          <a:ln>
+            <a:noFill/>
+          </a:ln>
+        </p:spPr>
+        <p:txBody>
+          <a:bodyPr/>
+          <a:lstStyle/>
+          <a:p>
+            <a:endParaRPr lang="th-TH"/>
+          </a:p>
+        </p:txBody>
+      </p:sp>
+      <p:sp>
+        <p:nvSpPr>
+          <p:cNvPr id="11" name="Group Label"/>
+          <p:cNvSpPr/>
+          <p:nvPr/>
+        </p:nvSpPr>
+        <p:spPr>
+          <a:xfrm>
+            <a:off x="3840480" y="2926080"/>
+            <a:ext cx="3200400" cy="228600"/>
+          </a:xfrm>
+          <a:prstGeom prst="rect">
+            <a:avLst/>
+          </a:prstGeom>
+          <a:noFill/>
+          <a:ln>
+            <a:noFill/>
+          </a:ln>
+        </p:spPr>
+        <p:txBody>
+          <a:bodyPr wrap="square" anchor="ctr" lIns="0" tIns="0" rIns="0" bIns="0" rtlCol="0"/>
+          <a:lstStyle/>
+          <a:p>
+            <a:pPr algn="l" marL="0" indent="0">
+              <a:lnSpc>
+                <a:spcPct val="100000"/>
+              </a:lnSpc>
+              <a:buNone/>
+            </a:pPr>
+            <a:r>
+              <a:rPr lang="th-TH" sz="1200" b="1" spc="120" dirty="0">
+                <a:solidFill>
+                  <a:srgbClr val="216B7F"/>
+                </a:solidFill>
+                <a:latin typeface="+mn-lt"/>
+                <a:ea typeface="+mn-ea"/>
+                <a:cs typeface="+mn-cs"/>
+              </a:rPr>
+              <a:t>ส่วนที่เพิ่มใหม่</a:t>
+            </a:r>
+          </a:p>
+        </p:txBody>
+      </p:sp>
+      <p:sp>
+        <p:nvSpPr>
+          <p:cNvPr id="12" name="Box 1"/>
+          <p:cNvSpPr/>
+          <p:nvPr/>
+        </p:nvSpPr>
+        <p:spPr>
+          <a:xfrm>
+            <a:off x="1143000" y="3223260"/>
+            <a:ext cx="2011680" cy="731520"/>
+          </a:xfrm>
+          <a:prstGeom prst="rect">
+            <a:avLst/>
+          </a:prstGeom>
+          <a:solidFill>
+            <a:srgbClr val="23436D"/>
+          </a:solidFill>
+          <a:ln>
+            <a:noFill/>
+          </a:ln>
+        </p:spPr>
+        <p:txBody>
+          <a:bodyPr wrap="square" anchor="ctr" lIns="0" tIns="0" rIns="0" bIns="0" rtlCol="0"/>
+          <a:lstStyle/>
+          <a:p>
+            <a:pPr algn="ctr" marL="0" indent="0">
+              <a:lnSpc>
+                <a:spcPct val="110000"/>
+              </a:lnSpc>
+              <a:buNone/>
+            </a:pPr>
+            <a:r>
+              <a:rPr lang="th-TH" sz="1200" dirty="0">
+                <a:solidFill>
+                  <a:srgbClr val="FFFFFF"/>
+                </a:solidFill>
+                <a:latin typeface="+mn-lt"/>
+                <a:ea typeface="+mn-ea"/>
+                <a:cs typeface="+mn-cs"/>
+              </a:rPr>
+              <a:t>ระบบ ERP ปัจจุบัน</a:t>
+            </a:r>
+          </a:p>
+        </p:txBody>
+      </p:sp>
+      <p:sp>
+        <p:nvSpPr>
+          <p:cNvPr id="13" name="Box 2"/>
+          <p:cNvSpPr/>
+          <p:nvPr/>
+        </p:nvSpPr>
+        <p:spPr>
+          <a:xfrm>
+            <a:off x="3840480" y="3223260"/>
+            <a:ext cx="2011680" cy="731520"/>
+          </a:xfrm>
+          <a:prstGeom prst="rect">
+            <a:avLst/>
+          </a:prstGeom>
+          <a:solidFill>
+            <a:srgbClr val="FFFFFF"/>
+          </a:solidFill>
+          <a:ln w="12700">
+            <a:solidFill>
+              <a:srgbClr val="2A5EA0"/>
+            </a:solidFill>
+          </a:ln>
+        </p:spPr>
+        <p:txBody>
+          <a:bodyPr wrap="square" anchor="ctr" lIns="0" tIns="0" rIns="0" bIns="0" rtlCol="0"/>
+          <a:lstStyle/>
+          <a:p>
+            <a:pPr algn="ctr" marL="0" indent="0">
+              <a:lnSpc>
+                <a:spcPct val="110000"/>
+              </a:lnSpc>
+              <a:buNone/>
+            </a:pPr>
+            <a:r>
+              <a:rPr lang="th-TH" sz="1200" dirty="0">
+                <a:solidFill>
+                  <a:srgbClr val="333333"/>
+                </a:solidFill>
+                <a:latin typeface="+mn-lt"/>
+                <a:ea typeface="+mn-ea"/>
+                <a:cs typeface="+mn-cs"/>
+              </a:rPr>
+              <a:t>คิวเอกสารกลาง</a:t>
+            </a:r>
+          </a:p>
+        </p:txBody>
+      </p:sp>
+      <p:sp>
+        <p:nvSpPr>
+          <p:cNvPr id="113" name="Box 2 Tab"/>
+          <p:cNvSpPr/>
+          <p:nvPr/>
+        </p:nvSpPr>
+        <p:spPr>
+          <a:xfrm>
+            <a:off x="3954780" y="3337560"/>
+            <a:ext cx="205740" cy="45720"/>
+          </a:xfrm>
+          <a:prstGeom prst="rect">
+            <a:avLst/>
+          </a:prstGeom>
+          <a:solidFill>
+            <a:srgbClr val="2A5EA0"/>
+          </a:solidFill>
+          <a:ln>
+            <a:noFill/>
+          </a:ln>
+        </p:spPr>
+        <p:txBody>
+          <a:bodyPr/>
+          <a:lstStyle/>
+          <a:p>
+            <a:endParaRPr lang="th-TH"/>
+          </a:p>
+        </p:txBody>
+      </p:sp>
+      <p:sp>
+        <p:nvSpPr>
+          <p:cNvPr id="14" name="Box 3"/>
+          <p:cNvSpPr/>
+          <p:nvPr/>
+        </p:nvSpPr>
+        <p:spPr>
+          <a:xfrm>
+            <a:off x="6537960" y="3223260"/>
+            <a:ext cx="2011680" cy="731520"/>
+          </a:xfrm>
+          <a:prstGeom prst="rect">
+            <a:avLst/>
+          </a:prstGeom>
+          <a:solidFill>
+            <a:srgbClr val="FFFFFF"/>
+          </a:solidFill>
+          <a:ln w="12700">
+            <a:solidFill>
+              <a:srgbClr val="BB731B"/>
+            </a:solidFill>
+          </a:ln>
+        </p:spPr>
+        <p:txBody>
+          <a:bodyPr wrap="square" anchor="ctr" lIns="0" tIns="0" rIns="0" bIns="0" rtlCol="0"/>
+          <a:lstStyle/>
+          <a:p>
+            <a:pPr algn="ctr" marL="0" indent="0">
+              <a:lnSpc>
+                <a:spcPct val="110000"/>
+              </a:lnSpc>
+              <a:buNone/>
+            </a:pPr>
+            <a:r>
+              <a:rPr lang="th-TH" sz="1200" dirty="0">
+                <a:solidFill>
+                  <a:srgbClr val="333333"/>
+                </a:solidFill>
+                <a:latin typeface="+mn-lt"/>
+                <a:ea typeface="+mn-ea"/>
+                <a:cs typeface="+mn-cs"/>
+              </a:rPr>
+              <a:t>ตัวตรวจกฎธุรกิจ</a:t>
+            </a:r>
+          </a:p>
+        </p:txBody>
+      </p:sp>
+      <p:sp>
+        <p:nvSpPr>
+          <p:cNvPr id="114" name="Box 3 Tab"/>
+          <p:cNvSpPr/>
+          <p:nvPr/>
+        </p:nvSpPr>
+        <p:spPr>
+          <a:xfrm>
+            <a:off x="6652260" y="3337560"/>
+            <a:ext cx="205740" cy="45720"/>
+          </a:xfrm>
+          <a:prstGeom prst="rect">
+            <a:avLst/>
+          </a:prstGeom>
+          <a:solidFill>
+            <a:srgbClr val="BB731B"/>
+          </a:solidFill>
+          <a:ln>
+            <a:noFill/>
+          </a:ln>
+        </p:spPr>
+        <p:txBody>
+          <a:bodyPr/>
+          <a:lstStyle/>
+          <a:p>
+            <a:endParaRPr lang="th-TH"/>
+          </a:p>
+        </p:txBody>
+      </p:sp>
+      <p:sp>
+        <p:nvSpPr>
+          <p:cNvPr id="15" name="Box 4"/>
+          <p:cNvSpPr/>
+          <p:nvPr/>
+        </p:nvSpPr>
+        <p:spPr>
+          <a:xfrm>
+            <a:off x="9235440" y="3223260"/>
+            <a:ext cx="2011680" cy="731520"/>
+          </a:xfrm>
+          <a:prstGeom prst="rect">
+            <a:avLst/>
+          </a:prstGeom>
+          <a:solidFill>
+            <a:srgbClr val="23436D"/>
+          </a:solidFill>
+          <a:ln>
+            <a:noFill/>
+          </a:ln>
+        </p:spPr>
+        <p:txBody>
+          <a:bodyPr wrap="square" anchor="ctr" lIns="0" tIns="0" rIns="0" bIns="0" rtlCol="0"/>
+          <a:lstStyle/>
+          <a:p>
+            <a:pPr algn="ctr" marL="0" indent="0">
+              <a:lnSpc>
+                <a:spcPct val="110000"/>
+              </a:lnSpc>
+              <a:buNone/>
+            </a:pPr>
+            <a:r>
+              <a:rPr lang="th-TH" sz="1200" dirty="0">
+                <a:solidFill>
+                  <a:srgbClr val="FFFFFF"/>
+                </a:solidFill>
+                <a:latin typeface="+mn-lt"/>
+                <a:ea typeface="+mn-ea"/>
+                <a:cs typeface="+mn-cs"/>
+              </a:rPr>
+              <a:t>ระบบบัญชี</a:t>
+            </a:r>
+          </a:p>
+        </p:txBody>
+      </p:sp>
+      <p:sp>
+        <p:nvSpPr>
+          <p:cNvPr id="16" name="Link 1"/>
+          <p:cNvSpPr/>
+          <p:nvPr/>
+        </p:nvSpPr>
+        <p:spPr>
+          <a:xfrm>
+            <a:off x="3268980" y="3589020"/>
+            <a:ext cx="457200" cy="0"/>
+          </a:xfrm>
+          <a:prstGeom prst="line">
+            <a:avLst/>
+          </a:prstGeom>
+          <a:noFill/>
+          <a:ln w="15875" cap="flat">
+            <a:solidFill>
+              <a:srgbClr val="216B7F"/>
+            </a:solidFill>
+            <a:prstDash val="solid"/>
+            <a:tailEnd type="triangle" w="med" len="med"/>
+          </a:ln>
+        </p:spPr>
+        <p:txBody>
+          <a:bodyPr/>
+          <a:lstStyle/>
+          <a:p>
+            <a:endParaRPr lang="th-TH"/>
+          </a:p>
+        </p:txBody>
+      </p:sp>
+      <p:sp>
+        <p:nvSpPr>
+          <p:cNvPr id="17" name="Link 2"/>
+          <p:cNvSpPr/>
+          <p:nvPr/>
+        </p:nvSpPr>
+        <p:spPr>
+          <a:xfrm>
+            <a:off x="5966460" y="3589020"/>
+            <a:ext cx="457200" cy="0"/>
+          </a:xfrm>
+          <a:prstGeom prst="line">
+            <a:avLst/>
+          </a:prstGeom>
+          <a:noFill/>
+          <a:ln w="15875" cap="flat">
+            <a:solidFill>
+              <a:srgbClr val="216B7F"/>
+            </a:solidFill>
+            <a:prstDash val="solid"/>
+            <a:tailEnd type="triangle" w="med" len="med"/>
+          </a:ln>
+        </p:spPr>
+        <p:txBody>
+          <a:bodyPr/>
+          <a:lstStyle/>
+          <a:p>
+            <a:endParaRPr lang="th-TH"/>
+          </a:p>
+        </p:txBody>
+      </p:sp>
+      <p:sp>
+        <p:nvSpPr>
+          <p:cNvPr id="18" name="Link 3"/>
+          <p:cNvSpPr/>
+          <p:nvPr/>
+        </p:nvSpPr>
+        <p:spPr>
+          <a:xfrm>
+            <a:off x="8663940" y="3589020"/>
+            <a:ext cx="457200" cy="0"/>
+          </a:xfrm>
+          <a:prstGeom prst="line">
+            <a:avLst/>
+          </a:prstGeom>
+          <a:noFill/>
+          <a:ln w="15875" cap="flat">
+            <a:solidFill>
+              <a:srgbClr val="216B7F"/>
+            </a:solidFill>
+            <a:prstDash val="solid"/>
+            <a:tailEnd type="triangle" w="med" len="med"/>
+          </a:ln>
+        </p:spPr>
+        <p:txBody>
+          <a:bodyPr/>
+          <a:lstStyle/>
+          <a:p>
+            <a:endParaRPr lang="th-TH"/>
+          </a:p>
+        </p:txBody>
+      </p:sp>
+      <p:sp>
+        <p:nvSpPr>
+          <p:cNvPr id="19" name="Edge Label"/>
+          <p:cNvSpPr/>
+          <p:nvPr/>
+        </p:nvSpPr>
+        <p:spPr>
+          <a:xfrm>
+            <a:off x="5806440" y="3268980"/>
+            <a:ext cx="822960" cy="228600"/>
+          </a:xfrm>
+          <a:prstGeom prst="rect">
+            <a:avLst/>
+          </a:prstGeom>
+          <a:noFill/>
+          <a:ln>
+            <a:noFill/>
+          </a:ln>
+        </p:spPr>
+        <p:txBody>
+          <a:bodyPr wrap="square" anchor="ctr" lIns="0" tIns="0" rIns="0" bIns="0" rtlCol="0"/>
+          <a:lstStyle/>
+          <a:p>
+            <a:pPr algn="ctr" marL="0" indent="0">
+              <a:lnSpc>
+                <a:spcPct val="100000"/>
+              </a:lnSpc>
+              <a:buNone/>
+            </a:pPr>
+            <a:r>
+              <a:rPr lang="th-TH" sz="1000" dirty="0">
+                <a:solidFill>
+                  <a:srgbClr val="5F5F5F"/>
+                </a:solidFill>
+                <a:latin typeface="+mn-lt"/>
+                <a:ea typeface="+mn-ea"/>
+                <a:cs typeface="+mn-cs"/>
+              </a:rPr>
+              <a:t>ผ่านกฎ</a:t>
+            </a:r>
+          </a:p>
+        </p:txBody>
+      </p:sp>
+    </p:spTree>
+  </p:cSld>
+  <p:clrMapOvr>
+    <a:masterClrMapping/>
+  </p:clrMapOvr>
+</p:sld>
+</file>
+
+<file path=ppt/slides/slide11.xml><?xml version="1.0" encoding="utf-8"?>
 <p:sld xmlns:a="http://schemas.openxmlformats.org/drawingml/2006/main" xmlns:r="http://schemas.openxmlformats.org/officeDocument/2006/relationships" xmlns:p="http://schemas.openxmlformats.org/presentationml/2006/main">
   <p:cSld name="">
     <p:spTree>
@@ -16701,7 +18355,7 @@
                   <a:tcPr marL="73152" marR="73152" marT="73152" marB="73152" anchor="ctr">
                     <a:lnB w="34925" cap="flat">
                       <a:solidFill>
-                        <a:srgbClr val="23436D"/>
+                        <a:srgbClr val="2A5EA0"/>
                       </a:solidFill>
                       <a:prstDash val="solid"/>
                     </a:lnB>
@@ -16740,7 +18394,7 @@
                       <a:r>
                         <a:rPr lang="th-TH" sz="1000" b="1" dirty="0">
                           <a:solidFill>
-                            <a:srgbClr val="23436D"/>
+                            <a:srgbClr val="2A5EA0"/>
                           </a:solidFill>
                           <a:latin typeface="+mn-lt"/>
                           <a:cs typeface="+mn-cs"/>
@@ -16852,7 +18506,7 @@
                   <a:tcPr marL="73152" marR="73152" marT="73152" marB="73152" anchor="ctr">
                     <a:lnB w="34925" cap="flat">
                       <a:solidFill>
-                        <a:srgbClr val="23436D"/>
+                        <a:srgbClr val="2A5EA0"/>
                       </a:solidFill>
                       <a:prstDash val="solid"/>
                     </a:lnB>
@@ -16891,7 +18545,7 @@
                       <a:r>
                         <a:rPr lang="th-TH" sz="1000" b="1" dirty="0">
                           <a:solidFill>
-                            <a:srgbClr val="23436D"/>
+                            <a:srgbClr val="2A5EA0"/>
                           </a:solidFill>
                           <a:latin typeface="+mn-lt"/>
                           <a:cs typeface="+mn-cs"/>
@@ -17003,7 +18657,7 @@
                   <a:tcPr marL="73152" marR="73152" marT="73152" marB="73152" anchor="ctr">
                     <a:lnB w="34925" cap="flat">
                       <a:solidFill>
-                        <a:srgbClr val="216B7F"/>
+                        <a:srgbClr val="BB731B"/>
                       </a:solidFill>
                       <a:prstDash val="solid"/>
                     </a:lnB>
@@ -17042,7 +18696,7 @@
                       <a:r>
                         <a:rPr lang="th-TH" sz="1000" b="1" dirty="0">
                           <a:solidFill>
-                            <a:srgbClr val="216B7F"/>
+                            <a:srgbClr val="BB731B"/>
                           </a:solidFill>
                           <a:latin typeface="+mn-lt"/>
                           <a:cs typeface="+mn-cs"/>
@@ -17154,7 +18808,7 @@
                   <a:tcPr marL="73152" marR="73152" marT="73152" marB="73152" anchor="ctr">
                     <a:lnB w="34925" cap="flat">
                       <a:solidFill>
-                        <a:srgbClr val="216B7F"/>
+                        <a:srgbClr val="BB731B"/>
                       </a:solidFill>
                       <a:prstDash val="solid"/>
                     </a:lnB>
@@ -17193,7 +18847,7 @@
                       <a:r>
                         <a:rPr lang="th-TH" sz="1000" b="1" dirty="0">
                           <a:solidFill>
-                            <a:srgbClr val="216B7F"/>
+                            <a:srgbClr val="BB731B"/>
                           </a:solidFill>
                           <a:latin typeface="+mn-lt"/>
                           <a:cs typeface="+mn-cs"/>
@@ -17305,7 +18959,7 @@
                   <a:tcPr marL="73152" marR="73152" marT="73152" marB="73152" anchor="ctr">
                     <a:lnB w="34925" cap="flat">
                       <a:solidFill>
-                        <a:srgbClr val="23436D"/>
+                        <a:srgbClr val="2A5EA0"/>
                       </a:solidFill>
                       <a:prstDash val="solid"/>
                     </a:lnB>
@@ -17344,7 +18998,7 @@
                       <a:r>
                         <a:rPr lang="th-TH" sz="1000" b="1" dirty="0">
                           <a:solidFill>
-                            <a:srgbClr val="23436D"/>
+                            <a:srgbClr val="2A5EA0"/>
                           </a:solidFill>
                           <a:latin typeface="+mn-lt"/>
                           <a:cs typeface="+mn-cs"/>
@@ -17456,7 +19110,7 @@
                   <a:tcPr marL="73152" marR="73152" marT="73152" marB="73152" anchor="ctr">
                     <a:lnB w="34925" cap="flat">
                       <a:solidFill>
-                        <a:srgbClr val="16324F"/>
+                        <a:srgbClr val="0D9298"/>
                       </a:solidFill>
                       <a:prstDash val="solid"/>
                     </a:lnB>
@@ -17495,7 +19149,7 @@
                       <a:r>
                         <a:rPr lang="th-TH" sz="1000" b="1" dirty="0">
                           <a:solidFill>
-                            <a:srgbClr val="16324F"/>
+                            <a:srgbClr val="0D9298"/>
                           </a:solidFill>
                           <a:latin typeface="+mn-lt"/>
                           <a:cs typeface="+mn-cs"/>
@@ -17607,7 +19261,7 @@
                   <a:tcPr marL="73152" marR="73152" marT="73152" marB="73152" anchor="ctr">
                     <a:lnB w="34925" cap="flat">
                       <a:solidFill>
-                        <a:srgbClr val="16324F"/>
+                        <a:srgbClr val="0D9298"/>
                       </a:solidFill>
                       <a:prstDash val="solid"/>
                     </a:lnB>
@@ -17646,7 +19300,7 @@
                       <a:r>
                         <a:rPr lang="th-TH" sz="1000" b="1" dirty="0">
                           <a:solidFill>
-                            <a:srgbClr val="16324F"/>
+                            <a:srgbClr val="0D9298"/>
                           </a:solidFill>
                           <a:latin typeface="+mn-lt"/>
                           <a:cs typeface="+mn-cs"/>
@@ -17758,7 +19412,7 @@
                   <a:tcPr marL="73152" marR="73152" marT="73152" marB="73152" anchor="ctr">
                     <a:lnB w="34925" cap="flat">
                       <a:solidFill>
-                        <a:srgbClr val="16324F"/>
+                        <a:srgbClr val="0D9298"/>
                       </a:solidFill>
                       <a:prstDash val="solid"/>
                     </a:lnB>
@@ -17797,7 +19451,7 @@
                       <a:r>
                         <a:rPr lang="th-TH" sz="1000" b="1" dirty="0">
                           <a:solidFill>
-                            <a:srgbClr val="16324F"/>
+                            <a:srgbClr val="0D9298"/>
                           </a:solidFill>
                           <a:latin typeface="+mn-lt"/>
                           <a:cs typeface="+mn-cs"/>
@@ -17989,105 +19643,6 @@
 </p:sld>
 </file>
 
-<file path=ppt/slides/slide11.xml><?xml version="1.0" encoding="utf-8"?>
-<p:sld xmlns:a="http://schemas.openxmlformats.org/drawingml/2006/main" xmlns:r="http://schemas.openxmlformats.org/officeDocument/2006/relationships" xmlns:p="http://schemas.openxmlformats.org/presentationml/2006/main">
-  <p:cSld name="">
-    <p:spTree>
-      <p:nvGrpSpPr>
-        <p:cNvPr id="1" name=""/>
-        <p:cNvGrpSpPr/>
-        <p:nvPr/>
-      </p:nvGrpSpPr>
-      <p:grpSpPr>
-        <a:xfrm>
-          <a:off x="0" y="0"/>
-          <a:ext cx="0" cy="0"/>
-          <a:chOff x="0" y="0"/>
-          <a:chExt cx="0" cy="0"/>
-        </a:xfrm>
-      </p:grpSpPr>
-      <p:sp>
-        <p:nvSpPr>
-          <p:cNvPr id="2" name="Title"/>
-          <p:cNvSpPr>
-            <a:spLocks noGrp="1"/>
-          </p:cNvSpPr>
-          <p:nvPr>
-            <p:ph type="title"/>
-          </p:nvPr>
-        </p:nvSpPr>
-        <p:spPr/>
-        <p:txBody>
-          <a:bodyPr/>
-          <a:lstStyle/>
-          <a:p>
-            <a:pPr/>
-            <a:r>
-              <a:rPr lang="th-TH" dirty="0"/>
-              <a:t>ขอบเขตบริการของ NCT</a:t>
-            </a:r>
-          </a:p>
-        </p:txBody>
-      </p:sp>
-      <p:sp>
-        <p:nvSpPr>
-          <p:cNvPr id="3" name="Body"/>
-          <p:cNvSpPr>
-            <a:spLocks noGrp="1"/>
-          </p:cNvSpPr>
-          <p:nvPr>
-            <p:ph type="body" idx="1"/>
-          </p:nvPr>
-        </p:nvSpPr>
-        <p:spPr/>
-        <p:txBody>
-          <a:bodyPr/>
-          <a:lstStyle/>
-          <a:p>
-            <a:pPr/>
-            <a:r>
-              <a:rPr lang="th-TH" dirty="0"/>
-              <a:t>วางระบบโครงสร้างพื้นฐานไอทีสำหรับองค์กร</a:t>
-            </a:r>
-          </a:p>
-          <a:p>
-            <a:pPr lvl="1"/>
-            <a:r>
-              <a:rPr lang="th-TH" dirty="0"/>
-              <a:t>ออกแบบเครือข่าย ระบบสำรองข้อมูล และความปลอดภัย</a:t>
-            </a:r>
-          </a:p>
-          <a:p>
-            <a:pPr/>
-            <a:r>
-              <a:rPr lang="th-TH" dirty="0"/>
-              <a:t>ดูแลระบบต่อเนื่องแบบ Managed Service</a:t>
-            </a:r>
-          </a:p>
-          <a:p>
-            <a:pPr lvl="1"/>
-            <a:r>
-              <a:rPr lang="th-TH" dirty="0"/>
-              <a:t>มีทีมซัพพอร์ตตอบกลับภายใน SLA ที่ตกลงกัน</a:t>
-            </a:r>
-          </a:p>
-          <a:p>
-            <a:pPr/>
-            <a:r>
-              <a:rPr lang="th-TH" dirty="0"/>
-              <a:t>ให้คำปรึกษาการย้ายระบบขึ้นคลาวด์</a:t>
-            </a:r>
-          </a:p>
-        </p:txBody>
-      </p:sp>
-    </p:spTree>
-  </p:cSld>
-  <p:clrMapOvr>
-    <a:masterClrMapping/>
-  </p:clrMapOvr>
-</p:sld>
-</file>
-
 <file path=ppt/slides/slide12.xml><?xml version="1.0" encoding="utf-8"?>
 <p:sld xmlns:a="http://schemas.openxmlformats.org/drawingml/2006/main" xmlns:r="http://schemas.openxmlformats.org/officeDocument/2006/relationships" xmlns:p="http://schemas.openxmlformats.org/presentationml/2006/main">
   <p:cSld name="">
@@ -18123,14 +19678,14 @@
             <a:pPr/>
             <a:r>
               <a:rPr lang="th-TH" dirty="0"/>
-              <a:t>สามเสาหลักของบริการ</a:t>
-            </a:r>
-          </a:p>
-        </p:txBody>
-      </p:sp>
-      <p:sp>
-        <p:nvSpPr>
-          <p:cNvPr id="3" name="C1H"/>
+              <a:t>ขอบเขตบริการของ NCT</a:t>
+            </a:r>
+          </a:p>
+        </p:txBody>
+      </p:sp>
+      <p:sp>
+        <p:nvSpPr>
+          <p:cNvPr id="3" name="Body"/>
           <p:cNvSpPr>
             <a:spLocks noGrp="1"/>
           </p:cNvSpPr>
@@ -18146,122 +19701,35 @@
             <a:pPr/>
             <a:r>
               <a:rPr lang="th-TH" dirty="0"/>
-              <a:t>Infrastructure</a:t>
-            </a:r>
-          </a:p>
-        </p:txBody>
-      </p:sp>
-      <p:sp>
-        <p:nvSpPr>
-          <p:cNvPr id="4" name="C1B"/>
-          <p:cNvSpPr>
-            <a:spLocks noGrp="1"/>
-          </p:cNvSpPr>
-          <p:nvPr>
-            <p:ph type="body" idx="2"/>
-          </p:nvPr>
-        </p:nvSpPr>
-        <p:spPr/>
-        <p:txBody>
-          <a:bodyPr/>
-          <a:lstStyle/>
+              <a:t>วางระบบโครงสร้างพื้นฐานไอทีสำหรับองค์กร</a:t>
+            </a:r>
+          </a:p>
+          <a:p>
+            <a:pPr lvl="1"/>
+            <a:r>
+              <a:rPr lang="th-TH" dirty="0"/>
+              <a:t>ออกแบบเครือข่าย ระบบสำรองข้อมูล และความปลอดภัย</a:t>
+            </a:r>
+          </a:p>
           <a:p>
             <a:pPr/>
             <a:r>
               <a:rPr lang="th-TH" dirty="0"/>
-              <a:t>ออกแบบและติดตั้งเครือข่าย เซิร์ฟเวอร์ และระบบสำรองข้อมูล</a:t>
-            </a:r>
-          </a:p>
-        </p:txBody>
-      </p:sp>
-      <p:sp>
-        <p:nvSpPr>
-          <p:cNvPr id="5" name="C2H"/>
-          <p:cNvSpPr>
-            <a:spLocks noGrp="1"/>
-          </p:cNvSpPr>
-          <p:nvPr>
-            <p:ph type="body" idx="3"/>
-          </p:nvPr>
-        </p:nvSpPr>
-        <p:spPr/>
-        <p:txBody>
-          <a:bodyPr/>
-          <a:lstStyle/>
+              <a:t>ดูแลระบบต่อเนื่องแบบ Managed Service</a:t>
+            </a:r>
+          </a:p>
+          <a:p>
+            <a:pPr lvl="1"/>
+            <a:r>
+              <a:rPr lang="th-TH" dirty="0"/>
+              <a:t>มีทีมซัพพอร์ตตอบกลับภายใน SLA ที่ตกลงกัน</a:t>
+            </a:r>
+          </a:p>
           <a:p>
             <a:pPr/>
             <a:r>
               <a:rPr lang="th-TH" dirty="0"/>
-              <a:t>Managed Service</a:t>
-            </a:r>
-          </a:p>
-        </p:txBody>
-      </p:sp>
-      <p:sp>
-        <p:nvSpPr>
-          <p:cNvPr id="6" name="C2B"/>
-          <p:cNvSpPr>
-            <a:spLocks noGrp="1"/>
-          </p:cNvSpPr>
-          <p:nvPr>
-            <p:ph type="body" idx="4"/>
-          </p:nvPr>
-        </p:nvSpPr>
-        <p:spPr/>
-        <p:txBody>
-          <a:bodyPr/>
-          <a:lstStyle/>
-          <a:p>
-            <a:pPr/>
-            <a:r>
-              <a:rPr lang="th-TH" dirty="0"/>
-              <a:t>ดูแลระบบรายเดือน พร้อมทีมซัพพอร์ตและรายงานสุขภาพระบบ</a:t>
-            </a:r>
-          </a:p>
-        </p:txBody>
-      </p:sp>
-      <p:sp>
-        <p:nvSpPr>
-          <p:cNvPr id="7" name="C3H"/>
-          <p:cNvSpPr>
-            <a:spLocks noGrp="1"/>
-          </p:cNvSpPr>
-          <p:nvPr>
-            <p:ph type="body" idx="5"/>
-          </p:nvPr>
-        </p:nvSpPr>
-        <p:spPr/>
-        <p:txBody>
-          <a:bodyPr/>
-          <a:lstStyle/>
-          <a:p>
-            <a:pPr/>
-            <a:r>
-              <a:rPr lang="th-TH" dirty="0"/>
-              <a:t>Cloud &amp; Security</a:t>
-            </a:r>
-          </a:p>
-        </p:txBody>
-      </p:sp>
-      <p:sp>
-        <p:nvSpPr>
-          <p:cNvPr id="8" name="C3B"/>
-          <p:cNvSpPr>
-            <a:spLocks noGrp="1"/>
-          </p:cNvSpPr>
-          <p:nvPr>
-            <p:ph type="body" idx="6"/>
-          </p:nvPr>
-        </p:nvSpPr>
-        <p:spPr/>
-        <p:txBody>
-          <a:bodyPr/>
-          <a:lstStyle/>
-          <a:p>
-            <a:pPr/>
-            <a:r>
-              <a:rPr lang="th-TH" dirty="0"/>
-              <a:t>ย้ายระบบขึ้นคลาวด์ และวางมาตรการความปลอดภัยตามมาตรฐาน</a:t>
+              <a:t>ให้คำปรึกษาการย้ายระบบขึ้นคลาวด์</a:t>
             </a:r>
           </a:p>
         </p:txBody>
@@ -18309,14 +19777,14 @@
             <a:pPr/>
             <a:r>
               <a:rPr lang="th-TH" dirty="0"/>
-              <a:t>ตัวเลขที่บอกเรื่องเรา</a:t>
-            </a:r>
-          </a:p>
-        </p:txBody>
-      </p:sp>
-      <p:sp>
-        <p:nvSpPr>
-          <p:cNvPr id="3" name="F1"/>
+              <a:t>สามเสาหลักของบริการ</a:t>
+            </a:r>
+          </a:p>
+        </p:txBody>
+      </p:sp>
+      <p:sp>
+        <p:nvSpPr>
+          <p:cNvPr id="3" name="C1H"/>
           <p:cNvSpPr>
             <a:spLocks noGrp="1"/>
           </p:cNvSpPr>
@@ -18332,14 +19800,14 @@
             <a:pPr/>
             <a:r>
               <a:rPr lang="th-TH" dirty="0"/>
-              <a:t>12</a:t>
-            </a:r>
-          </a:p>
-        </p:txBody>
-      </p:sp>
-      <p:sp>
-        <p:nvSpPr>
-          <p:cNvPr id="4" name="F1L"/>
+              <a:t>Infrastructure</a:t>
+            </a:r>
+          </a:p>
+        </p:txBody>
+      </p:sp>
+      <p:sp>
+        <p:nvSpPr>
+          <p:cNvPr id="4" name="C1B"/>
           <p:cNvSpPr>
             <a:spLocks noGrp="1"/>
           </p:cNvSpPr>
@@ -18355,14 +19823,14 @@
             <a:pPr/>
             <a:r>
               <a:rPr lang="th-TH" dirty="0"/>
-              <a:t>ปีที่ให้บริการองค์กรไทย</a:t>
-            </a:r>
-          </a:p>
-        </p:txBody>
-      </p:sp>
-      <p:sp>
-        <p:nvSpPr>
-          <p:cNvPr id="5" name="F2"/>
+              <a:t>ออกแบบและติดตั้งเครือข่าย เซิร์ฟเวอร์ และระบบสำรองข้อมูล</a:t>
+            </a:r>
+          </a:p>
+        </p:txBody>
+      </p:sp>
+      <p:sp>
+        <p:nvSpPr>
+          <p:cNvPr id="5" name="C2H"/>
           <p:cNvSpPr>
             <a:spLocks noGrp="1"/>
           </p:cNvSpPr>
@@ -18378,14 +19846,14 @@
             <a:pPr/>
             <a:r>
               <a:rPr lang="th-TH" dirty="0"/>
-              <a:t>99.9%</a:t>
-            </a:r>
-          </a:p>
-        </p:txBody>
-      </p:sp>
-      <p:sp>
-        <p:nvSpPr>
-          <p:cNvPr id="6" name="F2L"/>
+              <a:t>Managed Service</a:t>
+            </a:r>
+          </a:p>
+        </p:txBody>
+      </p:sp>
+      <p:sp>
+        <p:nvSpPr>
+          <p:cNvPr id="6" name="C2B"/>
           <p:cNvSpPr>
             <a:spLocks noGrp="1"/>
           </p:cNvSpPr>
@@ -18401,14 +19869,14 @@
             <a:pPr/>
             <a:r>
               <a:rPr lang="th-TH" dirty="0"/>
-              <a:t>Uptime เฉลี่ยของระบบที่ดูแล</a:t>
-            </a:r>
-          </a:p>
-        </p:txBody>
-      </p:sp>
-      <p:sp>
-        <p:nvSpPr>
-          <p:cNvPr id="7" name="F3"/>
+              <a:t>ดูแลระบบรายเดือน พร้อมทีมซัพพอร์ตและรายงานสุขภาพระบบ</a:t>
+            </a:r>
+          </a:p>
+        </p:txBody>
+      </p:sp>
+      <p:sp>
+        <p:nvSpPr>
+          <p:cNvPr id="7" name="C3H"/>
           <p:cNvSpPr>
             <a:spLocks noGrp="1"/>
           </p:cNvSpPr>
@@ -18424,14 +19892,14 @@
             <a:pPr/>
             <a:r>
               <a:rPr lang="th-TH" dirty="0"/>
-              <a:t>24/7</a:t>
-            </a:r>
-          </a:p>
-        </p:txBody>
-      </p:sp>
-      <p:sp>
-        <p:nvSpPr>
-          <p:cNvPr id="8" name="F3L"/>
+              <a:t>Cloud &amp; Security</a:t>
+            </a:r>
+          </a:p>
+        </p:txBody>
+      </p:sp>
+      <p:sp>
+        <p:nvSpPr>
+          <p:cNvPr id="8" name="C3B"/>
           <p:cNvSpPr>
             <a:spLocks noGrp="1"/>
           </p:cNvSpPr>
@@ -18447,30 +19915,7 @@
             <a:pPr/>
             <a:r>
               <a:rPr lang="th-TH" dirty="0"/>
-              <a:t>ทีมเฝ้าระวังและตอบกลับ</a:t>
-            </a:r>
-          </a:p>
-        </p:txBody>
-      </p:sp>
-      <p:sp>
-        <p:nvSpPr>
-          <p:cNvPr id="9" name="FN"/>
-          <p:cNvSpPr>
-            <a:spLocks noGrp="1"/>
-          </p:cNvSpPr>
-          <p:nvPr>
-            <p:ph type="body" idx="7"/>
-          </p:nvPr>
-        </p:nvSpPr>
-        <p:spPr/>
-        <p:txBody>
-          <a:bodyPr/>
-          <a:lstStyle/>
-          <a:p>
-            <a:pPr/>
-            <a:r>
-              <a:rPr lang="th-TH" dirty="0"/>
-              <a:t>ข้อมูล ณ ไตรมาส 1 ปี 2569</a:t>
+              <a:t>ย้ายระบบขึ้นคลาวด์ และวางมาตรการความปลอดภัยตามมาตรฐาน</a:t>
             </a:r>
           </a:p>
         </p:txBody>
@@ -18502,7 +19947,30 @@
       </p:grpSpPr>
       <p:sp>
         <p:nvSpPr>
-          <p:cNvPr id="2" name="Q"/>
+          <p:cNvPr id="2" name="Title"/>
+          <p:cNvSpPr>
+            <a:spLocks noGrp="1"/>
+          </p:cNvSpPr>
+          <p:nvPr>
+            <p:ph type="title"/>
+          </p:nvPr>
+        </p:nvSpPr>
+        <p:spPr/>
+        <p:txBody>
+          <a:bodyPr/>
+          <a:lstStyle/>
+          <a:p>
+            <a:pPr/>
+            <a:r>
+              <a:rPr lang="th-TH" dirty="0"/>
+              <a:t>ตัวเลขที่บอกเรื่องเรา</a:t>
+            </a:r>
+          </a:p>
+        </p:txBody>
+      </p:sp>
+      <p:sp>
+        <p:nvSpPr>
+          <p:cNvPr id="3" name="F1"/>
           <p:cNvSpPr>
             <a:spLocks noGrp="1"/>
           </p:cNvSpPr>
@@ -18518,14 +19986,14 @@
             <a:pPr/>
             <a:r>
               <a:rPr lang="th-TH" dirty="0"/>
-              <a:t>ระบบไม่ล่มอีกเลยตั้งแต่เปลี่ยนมาใช้ทีมนี้ดูแล และเราวางแผนงบประมาณได้ล่วงหน้าจริง ๆ</a:t>
-            </a:r>
-          </a:p>
-        </p:txBody>
-      </p:sp>
-      <p:sp>
-        <p:nvSpPr>
-          <p:cNvPr id="3" name="A"/>
+              <a:t>12</a:t>
+            </a:r>
+          </a:p>
+        </p:txBody>
+      </p:sp>
+      <p:sp>
+        <p:nvSpPr>
+          <p:cNvPr id="4" name="F1L"/>
           <p:cNvSpPr>
             <a:spLocks noGrp="1"/>
           </p:cNvSpPr>
@@ -18541,7 +20009,122 @@
             <a:pPr/>
             <a:r>
               <a:rPr lang="th-TH" dirty="0"/>
-              <a:t>คุณสมชาย ป. — ผู้จัดการฝ่ายไอที, บริษัทตัวอย่าง จำกัด</a:t>
+              <a:t>ปีที่ให้บริการองค์กรไทย</a:t>
+            </a:r>
+          </a:p>
+        </p:txBody>
+      </p:sp>
+      <p:sp>
+        <p:nvSpPr>
+          <p:cNvPr id="5" name="F2"/>
+          <p:cNvSpPr>
+            <a:spLocks noGrp="1"/>
+          </p:cNvSpPr>
+          <p:nvPr>
+            <p:ph type="body" idx="3"/>
+          </p:nvPr>
+        </p:nvSpPr>
+        <p:spPr/>
+        <p:txBody>
+          <a:bodyPr/>
+          <a:lstStyle/>
+          <a:p>
+            <a:pPr/>
+            <a:r>
+              <a:rPr lang="th-TH" dirty="0"/>
+              <a:t>99.9%</a:t>
+            </a:r>
+          </a:p>
+        </p:txBody>
+      </p:sp>
+      <p:sp>
+        <p:nvSpPr>
+          <p:cNvPr id="6" name="F2L"/>
+          <p:cNvSpPr>
+            <a:spLocks noGrp="1"/>
+          </p:cNvSpPr>
+          <p:nvPr>
+            <p:ph type="body" idx="4"/>
+          </p:nvPr>
+        </p:nvSpPr>
+        <p:spPr/>
+        <p:txBody>
+          <a:bodyPr/>
+          <a:lstStyle/>
+          <a:p>
+            <a:pPr/>
+            <a:r>
+              <a:rPr lang="th-TH" dirty="0"/>
+              <a:t>Uptime เฉลี่ยของระบบที่ดูแล</a:t>
+            </a:r>
+          </a:p>
+        </p:txBody>
+      </p:sp>
+      <p:sp>
+        <p:nvSpPr>
+          <p:cNvPr id="7" name="F3"/>
+          <p:cNvSpPr>
+            <a:spLocks noGrp="1"/>
+          </p:cNvSpPr>
+          <p:nvPr>
+            <p:ph type="body" idx="5"/>
+          </p:nvPr>
+        </p:nvSpPr>
+        <p:spPr/>
+        <p:txBody>
+          <a:bodyPr/>
+          <a:lstStyle/>
+          <a:p>
+            <a:pPr/>
+            <a:r>
+              <a:rPr lang="th-TH" dirty="0"/>
+              <a:t>24/7</a:t>
+            </a:r>
+          </a:p>
+        </p:txBody>
+      </p:sp>
+      <p:sp>
+        <p:nvSpPr>
+          <p:cNvPr id="8" name="F3L"/>
+          <p:cNvSpPr>
+            <a:spLocks noGrp="1"/>
+          </p:cNvSpPr>
+          <p:nvPr>
+            <p:ph type="body" idx="6"/>
+          </p:nvPr>
+        </p:nvSpPr>
+        <p:spPr/>
+        <p:txBody>
+          <a:bodyPr/>
+          <a:lstStyle/>
+          <a:p>
+            <a:pPr/>
+            <a:r>
+              <a:rPr lang="th-TH" dirty="0"/>
+              <a:t>ทีมเฝ้าระวังและตอบกลับ</a:t>
+            </a:r>
+          </a:p>
+        </p:txBody>
+      </p:sp>
+      <p:sp>
+        <p:nvSpPr>
+          <p:cNvPr id="9" name="FN"/>
+          <p:cNvSpPr>
+            <a:spLocks noGrp="1"/>
+          </p:cNvSpPr>
+          <p:nvPr>
+            <p:ph type="body" idx="7"/>
+          </p:nvPr>
+        </p:nvSpPr>
+        <p:spPr/>
+        <p:txBody>
+          <a:bodyPr/>
+          <a:lstStyle/>
+          <a:p>
+            <a:pPr/>
+            <a:r>
+              <a:rPr lang="th-TH" dirty="0"/>
+              <a:t>ข้อมูล ณ ไตรมาส 1 ปี 2569</a:t>
             </a:r>
           </a:p>
         </p:txBody>
@@ -18555,6 +20138,77 @@
 </file>
 
 <file path=ppt/slides/slide15.xml><?xml version="1.0" encoding="utf-8"?>
+<p:sld xmlns:a="http://schemas.openxmlformats.org/drawingml/2006/main" xmlns:r="http://schemas.openxmlformats.org/officeDocument/2006/relationships" xmlns:p="http://schemas.openxmlformats.org/presentationml/2006/main">
+  <p:cSld name="">
+    <p:spTree>
+      <p:nvGrpSpPr>
+        <p:cNvPr id="1" name=""/>
+        <p:cNvGrpSpPr/>
+        <p:nvPr/>
+      </p:nvGrpSpPr>
+      <p:grpSpPr>
+        <a:xfrm>
+          <a:off x="0" y="0"/>
+          <a:ext cx="0" cy="0"/>
+          <a:chOff x="0" y="0"/>
+          <a:chExt cx="0" cy="0"/>
+        </a:xfrm>
+      </p:grpSpPr>
+      <p:sp>
+        <p:nvSpPr>
+          <p:cNvPr id="2" name="Q"/>
+          <p:cNvSpPr>
+            <a:spLocks noGrp="1"/>
+          </p:cNvSpPr>
+          <p:nvPr>
+            <p:ph type="body" idx="1"/>
+          </p:nvPr>
+        </p:nvSpPr>
+        <p:spPr/>
+        <p:txBody>
+          <a:bodyPr/>
+          <a:lstStyle/>
+          <a:p>
+            <a:pPr/>
+            <a:r>
+              <a:rPr lang="th-TH" dirty="0"/>
+              <a:t>ระบบไม่ล่มอีกเลยตั้งแต่เปลี่ยนมาใช้ทีมนี้ดูแล และเราวางแผนงบประมาณได้ล่วงหน้าจริง ๆ</a:t>
+            </a:r>
+          </a:p>
+        </p:txBody>
+      </p:sp>
+      <p:sp>
+        <p:nvSpPr>
+          <p:cNvPr id="3" name="A"/>
+          <p:cNvSpPr>
+            <a:spLocks noGrp="1"/>
+          </p:cNvSpPr>
+          <p:nvPr>
+            <p:ph type="body" idx="2"/>
+          </p:nvPr>
+        </p:nvSpPr>
+        <p:spPr/>
+        <p:txBody>
+          <a:bodyPr/>
+          <a:lstStyle/>
+          <a:p>
+            <a:pPr/>
+            <a:r>
+              <a:rPr lang="th-TH" dirty="0"/>
+              <a:t>คุณสมชาย ป. — ผู้จัดการฝ่ายไอที, บริษัทตัวอย่าง จำกัด</a:t>
+            </a:r>
+          </a:p>
+        </p:txBody>
+      </p:sp>
+    </p:spTree>
+  </p:cSld>
+  <p:clrMapOvr>
+    <a:masterClrMapping/>
+  </p:clrMapOvr>
+</p:sld>
+</file>
+
+<file path=ppt/slides/slide16.xml><?xml version="1.0" encoding="utf-8"?>
 <p:sld xmlns:a="http://schemas.openxmlformats.org/drawingml/2006/main" xmlns:r="http://schemas.openxmlformats.org/officeDocument/2006/relationships" xmlns:p="http://schemas.openxmlformats.org/presentationml/2006/main">
   <p:cSld name="">
     <p:spTree>
@@ -19285,7 +20939,7 @@
 </p:sld>
 </file>
 
-<file path=ppt/slides/slide16.xml><?xml version="1.0" encoding="utf-8"?>
+<file path=ppt/slides/slide17.xml><?xml version="1.0" encoding="utf-8"?>
 <p:sld xmlns:a="http://schemas.openxmlformats.org/drawingml/2006/main" xmlns:r="http://schemas.openxmlformats.org/officeDocument/2006/relationships" xmlns:p="http://schemas.openxmlformats.org/presentationml/2006/main">
   <p:cSld name="">
     <p:spTree>
@@ -19538,7 +21192,7 @@
 </p:sld>
 </file>
 
-<file path=ppt/slides/slide17.xml><?xml version="1.0" encoding="utf-8"?>
+<file path=ppt/slides/slide18.xml><?xml version="1.0" encoding="utf-8"?>
 <p:sld xmlns:a="http://schemas.openxmlformats.org/drawingml/2006/main" xmlns:r="http://schemas.openxmlformats.org/officeDocument/2006/relationships" xmlns:p="http://schemas.openxmlformats.org/presentationml/2006/main">
   <p:cSld name="">
     <p:spTree>
@@ -20024,7 +21678,7 @@
 </p:sld>
 </file>
 
-<file path=ppt/slides/slide18.xml><?xml version="1.0" encoding="utf-8"?>
+<file path=ppt/slides/slide19.xml><?xml version="1.0" encoding="utf-8"?>
 <p:sld xmlns:a="http://schemas.openxmlformats.org/drawingml/2006/main" xmlns:r="http://schemas.openxmlformats.org/officeDocument/2006/relationships" xmlns:p="http://schemas.openxmlformats.org/presentationml/2006/main">
   <p:cSld name="">
     <p:spTree>
@@ -20678,19 +22332,39 @@
             <a:pPr/>
             <a:r>
               <a:rPr lang="th-TH" dirty="0"/>
-              <a:t>ก่อนและหลังใช้บริการ</a:t>
-            </a:r>
-          </a:p>
-        </p:txBody>
-      </p:sp>
-      <p:sp>
-        <p:nvSpPr>
-          <p:cNvPr id="3" name="L"/>
-          <p:cNvSpPr>
-            <a:spLocks noGrp="1"/>
-          </p:cNvSpPr>
-          <p:nvPr>
-            <p:ph type="body" idx="1"/>
+              <a:t>ปิดงบ พ.ค. ใช้ 9 วัน นานสุดในรอบครึ่งปี</a:t>
+            </a:r>
+          </a:p>
+        </p:txBody>
+      </p:sp>
+      <p:graphicFrame>
+        <p:nvGraphicFramePr>
+          <p:cNvPr id="3" name="Close Days"/>
+          <p:cNvGraphicFramePr>
+            <a:graphicFrameLocks noGrp="1"/>
+          </p:cNvGraphicFramePr>
+          <p:nvPr>
+            <p:ph type="chart" idx="1"/>
+          </p:nvPr>
+        </p:nvGraphicFramePr>
+        <p:xfrm>
+          <a:off x="914400" y="1691640"/>
+          <a:ext cx="6847840" cy="3474720"/>
+        </p:xfrm>
+        <a:graphic>
+          <a:graphicData uri="http://schemas.openxmlformats.org/drawingml/2006/chart">
+            <c:chart xmlns:c="http://schemas.openxmlformats.org/drawingml/2006/chart" r:id="rId2"/>
+          </a:graphicData>
+        </a:graphic>
+      </p:graphicFrame>
+      <p:sp>
+        <p:nvSpPr>
+          <p:cNvPr id="4" name="Fig"/>
+          <p:cNvSpPr>
+            <a:spLocks noGrp="1"/>
+          </p:cNvSpPr>
+          <p:nvPr>
+            <p:ph type="body" idx="2"/>
           </p:nvPr>
         </p:nvSpPr>
         <p:spPr/>
@@ -20701,33 +22375,79 @@
             <a:pPr/>
             <a:r>
               <a:rPr lang="th-TH" dirty="0"/>
-              <a:t>ก่อน</a:t>
-            </a:r>
-          </a:p>
-          <a:p>
-            <a:pPr lvl="1"/>
+              <a:t>9 วัน</a:t>
+            </a:r>
+          </a:p>
+        </p:txBody>
+      </p:sp>
+      <p:sp>
+        <p:nvSpPr>
+          <p:cNvPr id="5" name="FigL"/>
+          <p:cNvSpPr>
+            <a:spLocks noGrp="1"/>
+          </p:cNvSpPr>
+          <p:nvPr>
+            <p:ph type="body" idx="3"/>
+          </p:nvPr>
+        </p:nvSpPr>
+        <p:spPr/>
+        <p:txBody>
+          <a:bodyPr/>
+          <a:lstStyle/>
+          <a:p>
+            <a:pPr/>
             <a:r>
               <a:rPr lang="th-TH" dirty="0"/>
-              <a:t>ระบบล่มบ่อย ไม่มีคนดูแลประจำ</a:t>
-            </a:r>
-          </a:p>
-          <a:p>
-            <a:pPr lvl="1"/>
+              <a:t>เวลาปิดงบ พ.ค. 2569 · เป้าหมาย 2 วัน</a:t>
+            </a:r>
+          </a:p>
+        </p:txBody>
+      </p:sp>
+      <p:sp>
+        <p:nvSpPr>
+          <p:cNvPr id="6" name="Ins"/>
+          <p:cNvSpPr>
+            <a:spLocks noGrp="1"/>
+          </p:cNvSpPr>
+          <p:nvPr>
+            <p:ph type="body" idx="4"/>
+          </p:nvPr>
+        </p:nvSpPr>
+        <p:spPr/>
+        <p:txBody>
+          <a:bodyPr/>
+          <a:lstStyle/>
+          <a:p>
+            <a:pPr/>
             <a:r>
               <a:rPr lang="th-TH" dirty="0"/>
-              <a:t>ค่าใช้จ่ายไม่แน่นอน</a:t>
-            </a:r>
-          </a:p>
-        </p:txBody>
-      </p:sp>
-      <p:sp>
-        <p:nvSpPr>
-          <p:cNvPr id="4" name="R"/>
-          <p:cNvSpPr>
-            <a:spLocks noGrp="1"/>
-          </p:cNvSpPr>
-          <p:nvPr>
-            <p:ph type="body" idx="2"/>
+              <a:t>เดือนที่เอกสารเข้ามากสุด คือเดือนที่ปิดงบนานสุด</a:t>
+            </a:r>
+          </a:p>
+          <a:p>
+            <a:pPr/>
+            <a:r>
+              <a:rPr lang="th-TH" dirty="0"/>
+              <a:t>ทุกเดือนเกินเป้าอย่างน้อยสามเท่า</a:t>
+            </a:r>
+          </a:p>
+          <a:p>
+            <a:pPr/>
+            <a:r>
+              <a:rPr lang="th-TH" dirty="0"/>
+              <a:t>ความล่าช้าเกิดที่ขั้นกระทบยอด ไม่ใช่ขั้นคีย์</a:t>
+            </a:r>
+          </a:p>
+        </p:txBody>
+      </p:sp>
+      <p:sp>
+        <p:nvSpPr>
+          <p:cNvPr id="7" name="Src"/>
+          <p:cNvSpPr>
+            <a:spLocks noGrp="1"/>
+          </p:cNvSpPr>
+          <p:nvPr>
+            <p:ph type="body" idx="5"/>
           </p:nvPr>
         </p:nvSpPr>
         <p:spPr/>
@@ -20738,21 +22458,53 @@
             <a:pPr/>
             <a:r>
               <a:rPr lang="th-TH" dirty="0"/>
-              <a:t>หลัง</a:t>
-            </a:r>
-          </a:p>
-          <a:p>
-            <a:pPr lvl="1"/>
+              <a:t>ระบบบัญชีของลูกค้า · ม.ค.–มิ.ย. 2569 · หน่วย: วันทำการ</a:t>
+            </a:r>
+          </a:p>
+        </p:txBody>
+      </p:sp>
+      <p:sp>
+        <p:nvSpPr>
+          <p:cNvPr id="8" name="TkL"/>
+          <p:cNvSpPr>
+            <a:spLocks noGrp="1"/>
+          </p:cNvSpPr>
+          <p:nvPr>
+            <p:ph type="body" idx="6"/>
+          </p:nvPr>
+        </p:nvSpPr>
+        <p:spPr/>
+        <p:txBody>
+          <a:bodyPr/>
+          <a:lstStyle/>
+          <a:p>
+            <a:pPr/>
             <a:r>
               <a:rPr lang="th-TH" dirty="0"/>
-              <a:t>มอนิเตอร์ 24 ชั่วโมง แจ้งเตือนอัตโนมัติ</a:t>
-            </a:r>
-          </a:p>
-          <a:p>
-            <a:pPr lvl="1"/>
+              <a:t>สรุป</a:t>
+            </a:r>
+          </a:p>
+        </p:txBody>
+      </p:sp>
+      <p:sp>
+        <p:nvSpPr>
+          <p:cNvPr id="9" name="TkC"/>
+          <p:cNvSpPr>
+            <a:spLocks noGrp="1"/>
+          </p:cNvSpPr>
+          <p:nvPr>
+            <p:ph type="body" idx="7"/>
+          </p:nvPr>
+        </p:nvSpPr>
+        <p:spPr/>
+        <p:txBody>
+          <a:bodyPr/>
+          <a:lstStyle/>
+          <a:p>
+            <a:pPr/>
             <a:r>
               <a:rPr lang="th-TH" dirty="0"/>
-              <a:t>ค่าใช้จ่ายคงที่ต่อเดือน</a:t>
+              <a:t>เวลาปิดงบแปรตามปริมาณเอกสาร การลดงานคีย์ซ้ำจึงลดเวลาปิดงบได้จริง</a:t>
             </a:r>
           </a:p>
         </p:txBody>
@@ -20800,19 +22552,19 @@
             <a:pPr/>
             <a:r>
               <a:rPr lang="th-TH" dirty="0"/>
-              <a:t>สี่ผลลัพธ์ที่ข้อเสนอนี้ให้</a:t>
-            </a:r>
-          </a:p>
-        </p:txBody>
-      </p:sp>
-      <p:sp>
-        <p:nvSpPr>
-          <p:cNvPr id="3" name="N0"/>
-          <p:cNvSpPr>
-            <a:spLocks noGrp="1"/>
-          </p:cNvSpPr>
-          <p:nvPr>
-            <p:ph type="body" idx="20"/>
+              <a:t>ก่อนและหลังใช้บริการ</a:t>
+            </a:r>
+          </a:p>
+        </p:txBody>
+      </p:sp>
+      <p:sp>
+        <p:nvSpPr>
+          <p:cNvPr id="3" name="L"/>
+          <p:cNvSpPr>
+            <a:spLocks noGrp="1"/>
+          </p:cNvSpPr>
+          <p:nvPr>
+            <p:ph type="body" idx="1"/>
           </p:nvPr>
         </p:nvSpPr>
         <p:spPr/>
@@ -20823,19 +22575,33 @@
             <a:pPr/>
             <a:r>
               <a:rPr lang="th-TH" dirty="0"/>
-              <a:t>01</a:t>
-            </a:r>
-          </a:p>
-        </p:txBody>
-      </p:sp>
-      <p:sp>
-        <p:nvSpPr>
-          <p:cNvPr id="4" name="H0"/>
-          <p:cNvSpPr>
-            <a:spLocks noGrp="1"/>
-          </p:cNvSpPr>
-          <p:nvPr>
-            <p:ph type="body" idx="21"/>
+              <a:t>ก่อน</a:t>
+            </a:r>
+          </a:p>
+          <a:p>
+            <a:pPr lvl="1"/>
+            <a:r>
+              <a:rPr lang="th-TH" dirty="0"/>
+              <a:t>ระบบล่มบ่อย ไม่มีคนดูแลประจำ</a:t>
+            </a:r>
+          </a:p>
+          <a:p>
+            <a:pPr lvl="1"/>
+            <a:r>
+              <a:rPr lang="th-TH" dirty="0"/>
+              <a:t>ค่าใช้จ่ายไม่แน่นอน</a:t>
+            </a:r>
+          </a:p>
+        </p:txBody>
+      </p:sp>
+      <p:sp>
+        <p:nvSpPr>
+          <p:cNvPr id="4" name="R"/>
+          <p:cNvSpPr>
+            <a:spLocks noGrp="1"/>
+          </p:cNvSpPr>
+          <p:nvPr>
+            <p:ph type="body" idx="2"/>
           </p:nvPr>
         </p:nvSpPr>
         <p:spPr/>
@@ -20846,283 +22612,21 @@
             <a:pPr/>
             <a:r>
               <a:rPr lang="th-TH" dirty="0"/>
-              <a:t>ลดงานคีย์ซ้ำ</a:t>
-            </a:r>
-          </a:p>
-        </p:txBody>
-      </p:sp>
-      <p:sp>
-        <p:nvSpPr>
-          <p:cNvPr id="5" name="B0"/>
-          <p:cNvSpPr>
-            <a:spLocks noGrp="1"/>
-          </p:cNvSpPr>
-          <p:nvPr>
-            <p:ph type="body" idx="22"/>
-          </p:nvPr>
-        </p:nvSpPr>
-        <p:spPr/>
-        <p:txBody>
-          <a:bodyPr/>
-          <a:lstStyle/>
-          <a:p>
-            <a:pPr/>
+              <a:t>หลัง</a:t>
+            </a:r>
+          </a:p>
+          <a:p>
+            <a:pPr lvl="1"/>
             <a:r>
               <a:rPr lang="th-TH" dirty="0"/>
-              <a:t>รับเอกสารเข้าระบบเดียว แล้วกระจายต่อให้ทุกปลายทางอัตโนมัติ</a:t>
-            </a:r>
-          </a:p>
-        </p:txBody>
-      </p:sp>
-      <p:sp>
-        <p:nvSpPr>
-          <p:cNvPr id="6" name="N1"/>
-          <p:cNvSpPr>
-            <a:spLocks noGrp="1"/>
-          </p:cNvSpPr>
-          <p:nvPr>
-            <p:ph type="body" idx="23"/>
-          </p:nvPr>
-        </p:nvSpPr>
-        <p:spPr/>
-        <p:txBody>
-          <a:bodyPr/>
-          <a:lstStyle/>
-          <a:p>
-            <a:pPr/>
+              <a:t>มอนิเตอร์ 24 ชั่วโมง แจ้งเตือนอัตโนมัติ</a:t>
+            </a:r>
+          </a:p>
+          <a:p>
+            <a:pPr lvl="1"/>
             <a:r>
               <a:rPr lang="th-TH" dirty="0"/>
-              <a:t>02</a:t>
-            </a:r>
-          </a:p>
-        </p:txBody>
-      </p:sp>
-      <p:sp>
-        <p:nvSpPr>
-          <p:cNvPr id="7" name="H1"/>
-          <p:cNvSpPr>
-            <a:spLocks noGrp="1"/>
-          </p:cNvSpPr>
-          <p:nvPr>
-            <p:ph type="body" idx="24"/>
-          </p:nvPr>
-        </p:nvSpPr>
-        <p:spPr/>
-        <p:txBody>
-          <a:bodyPr/>
-          <a:lstStyle/>
-          <a:p>
-            <a:pPr/>
-            <a:r>
-              <a:rPr lang="th-TH" dirty="0"/>
-              <a:t>ตรวจสอบได้</a:t>
-            </a:r>
-          </a:p>
-        </p:txBody>
-      </p:sp>
-      <p:sp>
-        <p:nvSpPr>
-          <p:cNvPr id="8" name="B1"/>
-          <p:cNvSpPr>
-            <a:spLocks noGrp="1"/>
-          </p:cNvSpPr>
-          <p:nvPr>
-            <p:ph type="body" idx="25"/>
-          </p:nvPr>
-        </p:nvSpPr>
-        <p:spPr/>
-        <p:txBody>
-          <a:bodyPr/>
-          <a:lstStyle/>
-          <a:p>
-            <a:pPr/>
-            <a:r>
-              <a:rPr lang="th-TH" dirty="0"/>
-              <a:t>ทุกรายการมี audit trail ผู้ทำ เวลา และค่าก่อนหลัง</a:t>
-            </a:r>
-          </a:p>
-        </p:txBody>
-      </p:sp>
-      <p:sp>
-        <p:nvSpPr>
-          <p:cNvPr id="9" name="N2"/>
-          <p:cNvSpPr>
-            <a:spLocks noGrp="1"/>
-          </p:cNvSpPr>
-          <p:nvPr>
-            <p:ph type="body" idx="26"/>
-          </p:nvPr>
-        </p:nvSpPr>
-        <p:spPr/>
-        <p:txBody>
-          <a:bodyPr/>
-          <a:lstStyle/>
-          <a:p>
-            <a:pPr/>
-            <a:r>
-              <a:rPr lang="th-TH" dirty="0"/>
-              <a:t>03</a:t>
-            </a:r>
-          </a:p>
-        </p:txBody>
-      </p:sp>
-      <p:sp>
-        <p:nvSpPr>
-          <p:cNvPr id="10" name="H2"/>
-          <p:cNvSpPr>
-            <a:spLocks noGrp="1"/>
-          </p:cNvSpPr>
-          <p:nvPr>
-            <p:ph type="body" idx="27"/>
-          </p:nvPr>
-        </p:nvSpPr>
-        <p:spPr/>
-        <p:txBody>
-          <a:bodyPr/>
-          <a:lstStyle/>
-          <a:p>
-            <a:pPr/>
-            <a:r>
-              <a:rPr lang="th-TH" dirty="0"/>
-              <a:t>ปิดงบเร็วขึ้น</a:t>
-            </a:r>
-          </a:p>
-        </p:txBody>
-      </p:sp>
-      <p:sp>
-        <p:nvSpPr>
-          <p:cNvPr id="11" name="B2"/>
-          <p:cNvSpPr>
-            <a:spLocks noGrp="1"/>
-          </p:cNvSpPr>
-          <p:nvPr>
-            <p:ph type="body" idx="28"/>
-          </p:nvPr>
-        </p:nvSpPr>
-        <p:spPr/>
-        <p:txBody>
-          <a:bodyPr/>
-          <a:lstStyle/>
-          <a:p>
-            <a:pPr/>
-            <a:r>
-              <a:rPr lang="th-TH" dirty="0"/>
-              <a:t>กระทบยอดอัตโนมัติรายวัน ไม่ต้องรอสิ้นเดือน</a:t>
-            </a:r>
-          </a:p>
-        </p:txBody>
-      </p:sp>
-      <p:sp>
-        <p:nvSpPr>
-          <p:cNvPr id="12" name="N3"/>
-          <p:cNvSpPr>
-            <a:spLocks noGrp="1"/>
-          </p:cNvSpPr>
-          <p:nvPr>
-            <p:ph type="body" idx="29"/>
-          </p:nvPr>
-        </p:nvSpPr>
-        <p:spPr/>
-        <p:txBody>
-          <a:bodyPr/>
-          <a:lstStyle/>
-          <a:p>
-            <a:pPr/>
-            <a:r>
-              <a:rPr lang="th-TH" dirty="0"/>
-              <a:t>04</a:t>
-            </a:r>
-          </a:p>
-        </p:txBody>
-      </p:sp>
-      <p:sp>
-        <p:nvSpPr>
-          <p:cNvPr id="13" name="H3"/>
-          <p:cNvSpPr>
-            <a:spLocks noGrp="1"/>
-          </p:cNvSpPr>
-          <p:nvPr>
-            <p:ph type="body" idx="30"/>
-          </p:nvPr>
-        </p:nvSpPr>
-        <p:spPr/>
-        <p:txBody>
-          <a:bodyPr/>
-          <a:lstStyle/>
-          <a:p>
-            <a:pPr/>
-            <a:r>
-              <a:rPr lang="th-TH" dirty="0"/>
-              <a:t>ขยายต่อได้</a:t>
-            </a:r>
-          </a:p>
-        </p:txBody>
-      </p:sp>
-      <p:sp>
-        <p:nvSpPr>
-          <p:cNvPr id="14" name="B3"/>
-          <p:cNvSpPr>
-            <a:spLocks noGrp="1"/>
-          </p:cNvSpPr>
-          <p:nvPr>
-            <p:ph type="body" idx="31"/>
-          </p:nvPr>
-        </p:nvSpPr>
-        <p:spPr/>
-        <p:txBody>
-          <a:bodyPr/>
-          <a:lstStyle/>
-          <a:p>
-            <a:pPr/>
-            <a:r>
-              <a:rPr lang="th-TH" dirty="0"/>
-              <a:t>เพิ่มกระบวนการใหม่โดยไม่แก้ของเดิม</a:t>
-            </a:r>
-          </a:p>
-        </p:txBody>
-      </p:sp>
-      <p:sp>
-        <p:nvSpPr>
-          <p:cNvPr id="15" name="BL"/>
-          <p:cNvSpPr>
-            <a:spLocks noGrp="1"/>
-          </p:cNvSpPr>
-          <p:nvPr>
-            <p:ph type="body" idx="32"/>
-          </p:nvPr>
-        </p:nvSpPr>
-        <p:spPr/>
-        <p:txBody>
-          <a:bodyPr/>
-          <a:lstStyle/>
-          <a:p>
-            <a:pPr/>
-            <a:r>
-              <a:rPr lang="th-TH" dirty="0"/>
-              <a:t>สรุป</a:t>
-            </a:r>
-          </a:p>
-        </p:txBody>
-      </p:sp>
-      <p:sp>
-        <p:nvSpPr>
-          <p:cNvPr id="16" name="BC"/>
-          <p:cNvSpPr>
-            <a:spLocks noGrp="1"/>
-          </p:cNvSpPr>
-          <p:nvPr>
-            <p:ph type="body" idx="33"/>
-          </p:nvPr>
-        </p:nvSpPr>
-        <p:spPr/>
-        <p:txBody>
-          <a:bodyPr/>
-          <a:lstStyle/>
-          <a:p>
-            <a:pPr/>
-            <a:r>
-              <a:rPr lang="th-TH" dirty="0"/>
-              <a:t>ทั้งสี่ข้อมาจากการแก้จุดเดียวกัน คือรวมจุดรับเอกสาร</a:t>
+              <a:t>ค่าใช้จ่ายคงที่ต่อเดือน</a:t>
             </a:r>
           </a:p>
         </p:txBody>
@@ -21170,19 +22674,19 @@
             <a:pPr/>
             <a:r>
               <a:rPr lang="th-TH" dirty="0"/>
-              <a:t>วิธีการทำงาน</a:t>
-            </a:r>
-          </a:p>
-        </p:txBody>
-      </p:sp>
-      <p:sp>
-        <p:nvSpPr>
-          <p:cNvPr id="3" name="Cap"/>
-          <p:cNvSpPr>
-            <a:spLocks noGrp="1"/>
-          </p:cNvSpPr>
-          <p:nvPr>
-            <p:ph type="body" idx="2"/>
+              <a:t>สี่ผลลัพธ์ที่ข้อเสนอนี้ให้</a:t>
+            </a:r>
+          </a:p>
+        </p:txBody>
+      </p:sp>
+      <p:sp>
+        <p:nvSpPr>
+          <p:cNvPr id="3" name="N0"/>
+          <p:cNvSpPr>
+            <a:spLocks noGrp="1"/>
+          </p:cNvSpPr>
+          <p:nvPr>
+            <p:ph type="body" idx="20"/>
           </p:nvPr>
         </p:nvSpPr>
         <p:spPr/>
@@ -21193,7 +22697,306 @@
             <a:pPr/>
             <a:r>
               <a:rPr lang="th-TH" dirty="0"/>
-              <a:t>กระบวนการ สถาปัตยกรรม และขอบเขตที่ตกลงกัน</a:t>
+              <a:t>01</a:t>
+            </a:r>
+          </a:p>
+        </p:txBody>
+      </p:sp>
+      <p:sp>
+        <p:nvSpPr>
+          <p:cNvPr id="4" name="H0"/>
+          <p:cNvSpPr>
+            <a:spLocks noGrp="1"/>
+          </p:cNvSpPr>
+          <p:nvPr>
+            <p:ph type="body" idx="21"/>
+          </p:nvPr>
+        </p:nvSpPr>
+        <p:spPr/>
+        <p:txBody>
+          <a:bodyPr/>
+          <a:lstStyle/>
+          <a:p>
+            <a:pPr/>
+            <a:r>
+              <a:rPr lang="th-TH" dirty="0"/>
+              <a:t>ลดงานคีย์ซ้ำ</a:t>
+            </a:r>
+          </a:p>
+        </p:txBody>
+      </p:sp>
+      <p:sp>
+        <p:nvSpPr>
+          <p:cNvPr id="5" name="B0"/>
+          <p:cNvSpPr>
+            <a:spLocks noGrp="1"/>
+          </p:cNvSpPr>
+          <p:nvPr>
+            <p:ph type="body" idx="22"/>
+          </p:nvPr>
+        </p:nvSpPr>
+        <p:spPr/>
+        <p:txBody>
+          <a:bodyPr/>
+          <a:lstStyle/>
+          <a:p>
+            <a:pPr/>
+            <a:r>
+              <a:rPr lang="th-TH" dirty="0"/>
+              <a:t>รับเอกสารเข้าระบบเดียว แล้วกระจายต่อให้ทุกปลายทางอัตโนมัติ</a:t>
+            </a:r>
+          </a:p>
+        </p:txBody>
+      </p:sp>
+      <p:sp>
+        <p:nvSpPr>
+          <p:cNvPr id="6" name="N1"/>
+          <p:cNvSpPr>
+            <a:spLocks noGrp="1"/>
+          </p:cNvSpPr>
+          <p:nvPr>
+            <p:ph type="body" idx="23"/>
+          </p:nvPr>
+        </p:nvSpPr>
+        <p:spPr/>
+        <p:txBody>
+          <a:bodyPr/>
+          <a:lstStyle/>
+          <a:p>
+            <a:pPr/>
+            <a:r>
+              <a:rPr lang="th-TH" dirty="0"/>
+              <a:t>02</a:t>
+            </a:r>
+          </a:p>
+        </p:txBody>
+      </p:sp>
+      <p:sp>
+        <p:nvSpPr>
+          <p:cNvPr id="7" name="H1"/>
+          <p:cNvSpPr>
+            <a:spLocks noGrp="1"/>
+          </p:cNvSpPr>
+          <p:nvPr>
+            <p:ph type="body" idx="24"/>
+          </p:nvPr>
+        </p:nvSpPr>
+        <p:spPr/>
+        <p:txBody>
+          <a:bodyPr/>
+          <a:lstStyle/>
+          <a:p>
+            <a:pPr/>
+            <a:r>
+              <a:rPr lang="th-TH" dirty="0"/>
+              <a:t>ตรวจสอบได้</a:t>
+            </a:r>
+          </a:p>
+        </p:txBody>
+      </p:sp>
+      <p:sp>
+        <p:nvSpPr>
+          <p:cNvPr id="8" name="B1"/>
+          <p:cNvSpPr>
+            <a:spLocks noGrp="1"/>
+          </p:cNvSpPr>
+          <p:nvPr>
+            <p:ph type="body" idx="25"/>
+          </p:nvPr>
+        </p:nvSpPr>
+        <p:spPr/>
+        <p:txBody>
+          <a:bodyPr/>
+          <a:lstStyle/>
+          <a:p>
+            <a:pPr/>
+            <a:r>
+              <a:rPr lang="th-TH" dirty="0"/>
+              <a:t>ทุกรายการมี audit trail ผู้ทำ เวลา และค่าก่อนหลัง</a:t>
+            </a:r>
+          </a:p>
+        </p:txBody>
+      </p:sp>
+      <p:sp>
+        <p:nvSpPr>
+          <p:cNvPr id="9" name="N2"/>
+          <p:cNvSpPr>
+            <a:spLocks noGrp="1"/>
+          </p:cNvSpPr>
+          <p:nvPr>
+            <p:ph type="body" idx="26"/>
+          </p:nvPr>
+        </p:nvSpPr>
+        <p:spPr/>
+        <p:txBody>
+          <a:bodyPr/>
+          <a:lstStyle/>
+          <a:p>
+            <a:pPr/>
+            <a:r>
+              <a:rPr lang="th-TH" dirty="0"/>
+              <a:t>03</a:t>
+            </a:r>
+          </a:p>
+        </p:txBody>
+      </p:sp>
+      <p:sp>
+        <p:nvSpPr>
+          <p:cNvPr id="10" name="H2"/>
+          <p:cNvSpPr>
+            <a:spLocks noGrp="1"/>
+          </p:cNvSpPr>
+          <p:nvPr>
+            <p:ph type="body" idx="27"/>
+          </p:nvPr>
+        </p:nvSpPr>
+        <p:spPr/>
+        <p:txBody>
+          <a:bodyPr/>
+          <a:lstStyle/>
+          <a:p>
+            <a:pPr/>
+            <a:r>
+              <a:rPr lang="th-TH" dirty="0"/>
+              <a:t>ปิดงบเร็วขึ้น</a:t>
+            </a:r>
+          </a:p>
+        </p:txBody>
+      </p:sp>
+      <p:sp>
+        <p:nvSpPr>
+          <p:cNvPr id="11" name="B2"/>
+          <p:cNvSpPr>
+            <a:spLocks noGrp="1"/>
+          </p:cNvSpPr>
+          <p:nvPr>
+            <p:ph type="body" idx="28"/>
+          </p:nvPr>
+        </p:nvSpPr>
+        <p:spPr/>
+        <p:txBody>
+          <a:bodyPr/>
+          <a:lstStyle/>
+          <a:p>
+            <a:pPr/>
+            <a:r>
+              <a:rPr lang="th-TH" dirty="0"/>
+              <a:t>กระทบยอดอัตโนมัติรายวัน ไม่ต้องรอสิ้นเดือน</a:t>
+            </a:r>
+          </a:p>
+        </p:txBody>
+      </p:sp>
+      <p:sp>
+        <p:nvSpPr>
+          <p:cNvPr id="12" name="N3"/>
+          <p:cNvSpPr>
+            <a:spLocks noGrp="1"/>
+          </p:cNvSpPr>
+          <p:nvPr>
+            <p:ph type="body" idx="29"/>
+          </p:nvPr>
+        </p:nvSpPr>
+        <p:spPr/>
+        <p:txBody>
+          <a:bodyPr/>
+          <a:lstStyle/>
+          <a:p>
+            <a:pPr/>
+            <a:r>
+              <a:rPr lang="th-TH" dirty="0"/>
+              <a:t>04</a:t>
+            </a:r>
+          </a:p>
+        </p:txBody>
+      </p:sp>
+      <p:sp>
+        <p:nvSpPr>
+          <p:cNvPr id="13" name="H3"/>
+          <p:cNvSpPr>
+            <a:spLocks noGrp="1"/>
+          </p:cNvSpPr>
+          <p:nvPr>
+            <p:ph type="body" idx="30"/>
+          </p:nvPr>
+        </p:nvSpPr>
+        <p:spPr/>
+        <p:txBody>
+          <a:bodyPr/>
+          <a:lstStyle/>
+          <a:p>
+            <a:pPr/>
+            <a:r>
+              <a:rPr lang="th-TH" dirty="0"/>
+              <a:t>ขยายต่อได้</a:t>
+            </a:r>
+          </a:p>
+        </p:txBody>
+      </p:sp>
+      <p:sp>
+        <p:nvSpPr>
+          <p:cNvPr id="14" name="B3"/>
+          <p:cNvSpPr>
+            <a:spLocks noGrp="1"/>
+          </p:cNvSpPr>
+          <p:nvPr>
+            <p:ph type="body" idx="31"/>
+          </p:nvPr>
+        </p:nvSpPr>
+        <p:spPr/>
+        <p:txBody>
+          <a:bodyPr/>
+          <a:lstStyle/>
+          <a:p>
+            <a:pPr/>
+            <a:r>
+              <a:rPr lang="th-TH" dirty="0"/>
+              <a:t>เพิ่มกระบวนการใหม่โดยไม่แก้ของเดิม</a:t>
+            </a:r>
+          </a:p>
+        </p:txBody>
+      </p:sp>
+      <p:sp>
+        <p:nvSpPr>
+          <p:cNvPr id="15" name="BL"/>
+          <p:cNvSpPr>
+            <a:spLocks noGrp="1"/>
+          </p:cNvSpPr>
+          <p:nvPr>
+            <p:ph type="body" idx="32"/>
+          </p:nvPr>
+        </p:nvSpPr>
+        <p:spPr/>
+        <p:txBody>
+          <a:bodyPr/>
+          <a:lstStyle/>
+          <a:p>
+            <a:pPr/>
+            <a:r>
+              <a:rPr lang="th-TH" dirty="0"/>
+              <a:t>สรุป</a:t>
+            </a:r>
+          </a:p>
+        </p:txBody>
+      </p:sp>
+      <p:sp>
+        <p:nvSpPr>
+          <p:cNvPr id="16" name="BC"/>
+          <p:cNvSpPr>
+            <a:spLocks noGrp="1"/>
+          </p:cNvSpPr>
+          <p:nvPr>
+            <p:ph type="body" idx="33"/>
+          </p:nvPr>
+        </p:nvSpPr>
+        <p:spPr/>
+        <p:txBody>
+          <a:bodyPr/>
+          <a:lstStyle/>
+          <a:p>
+            <a:pPr/>
+            <a:r>
+              <a:rPr lang="th-TH" dirty="0"/>
+              <a:t>ทั้งสี่ข้อมาจากการแก้จุดเดียวกัน คือรวมจุดรับเอกสาร</a:t>
             </a:r>
           </a:p>
         </p:txBody>
@@ -21241,19 +23044,19 @@
             <a:pPr/>
             <a:r>
               <a:rPr lang="th-TH" dirty="0"/>
-              <a:t>กระบวนการที่เสนอ</a:t>
-            </a:r>
-          </a:p>
-        </p:txBody>
-      </p:sp>
-      <p:sp>
-        <p:nvSpPr>
-          <p:cNvPr id="3" name="Sub"/>
-          <p:cNvSpPr>
-            <a:spLocks noGrp="1"/>
-          </p:cNvSpPr>
-          <p:nvPr>
-            <p:ph type="body" idx="1"/>
+              <a:t>วิธีการทำงาน</a:t>
+            </a:r>
+          </a:p>
+        </p:txBody>
+      </p:sp>
+      <p:sp>
+        <p:nvSpPr>
+          <p:cNvPr id="3" name="Cap"/>
+          <p:cNvSpPr>
+            <a:spLocks noGrp="1"/>
+          </p:cNvSpPr>
+          <p:nvPr>
+            <p:ph type="body" idx="2"/>
           </p:nvPr>
         </p:nvSpPr>
         <p:spPr/>
@@ -21264,398 +23067,7 @@
             <a:pPr/>
             <a:r>
               <a:rPr lang="th-TH" dirty="0"/>
-              <a:t>ห้าขั้นตอน ทำงานต่อเนื่องโดยไม่ต้องคีย์ซ้ำ</a:t>
-            </a:r>
-          </a:p>
-        </p:txBody>
-      </p:sp>
-      <p:sp>
-        <p:nvSpPr>
-          <p:cNvPr id="4" name="C0"/>
-          <p:cNvSpPr>
-            <a:spLocks noGrp="1"/>
-          </p:cNvSpPr>
-          <p:nvPr>
-            <p:ph type="body" idx="20"/>
-          </p:nvPr>
-        </p:nvSpPr>
-        <p:spPr/>
-        <p:txBody>
-          <a:bodyPr/>
-          <a:lstStyle/>
-          <a:p>
-            <a:pPr/>
-            <a:r>
-              <a:rPr lang="th-TH" dirty="0"/>
-              <a:t>1</a:t>
-            </a:r>
-          </a:p>
-        </p:txBody>
-      </p:sp>
-      <p:sp>
-        <p:nvSpPr>
-          <p:cNvPr id="5" name="H0"/>
-          <p:cNvSpPr>
-            <a:spLocks noGrp="1"/>
-          </p:cNvSpPr>
-          <p:nvPr>
-            <p:ph type="body" idx="21"/>
-          </p:nvPr>
-        </p:nvSpPr>
-        <p:spPr/>
-        <p:txBody>
-          <a:bodyPr/>
-          <a:lstStyle/>
-          <a:p>
-            <a:pPr/>
-            <a:r>
-              <a:rPr lang="th-TH" dirty="0"/>
-              <a:t>รับเอกสาร</a:t>
-            </a:r>
-          </a:p>
-        </p:txBody>
-      </p:sp>
-      <p:sp>
-        <p:nvSpPr>
-          <p:cNvPr id="6" name="B0"/>
-          <p:cNvSpPr>
-            <a:spLocks noGrp="1"/>
-          </p:cNvSpPr>
-          <p:nvPr>
-            <p:ph type="body" idx="22"/>
-          </p:nvPr>
-        </p:nvSpPr>
-        <p:spPr/>
-        <p:txBody>
-          <a:bodyPr/>
-          <a:lstStyle/>
-          <a:p>
-            <a:pPr/>
-            <a:r>
-              <a:rPr lang="th-TH" dirty="0"/>
-              <a:t>สแกนหรือรับไฟล์เข้าคิวกลาง</a:t>
-            </a:r>
-          </a:p>
-        </p:txBody>
-      </p:sp>
-      <p:sp>
-        <p:nvSpPr>
-          <p:cNvPr id="7" name="C1"/>
-          <p:cNvSpPr>
-            <a:spLocks noGrp="1"/>
-          </p:cNvSpPr>
-          <p:nvPr>
-            <p:ph type="body" idx="23"/>
-          </p:nvPr>
-        </p:nvSpPr>
-        <p:spPr/>
-        <p:txBody>
-          <a:bodyPr/>
-          <a:lstStyle/>
-          <a:p>
-            <a:pPr/>
-            <a:r>
-              <a:rPr lang="th-TH" dirty="0"/>
-              <a:t>2</a:t>
-            </a:r>
-          </a:p>
-        </p:txBody>
-      </p:sp>
-      <p:sp>
-        <p:nvSpPr>
-          <p:cNvPr id="8" name="H1"/>
-          <p:cNvSpPr>
-            <a:spLocks noGrp="1"/>
-          </p:cNvSpPr>
-          <p:nvPr>
-            <p:ph type="body" idx="24"/>
-          </p:nvPr>
-        </p:nvSpPr>
-        <p:spPr/>
-        <p:txBody>
-          <a:bodyPr/>
-          <a:lstStyle/>
-          <a:p>
-            <a:pPr/>
-            <a:r>
-              <a:rPr lang="th-TH" dirty="0"/>
-              <a:t>อ่านข้อมูล</a:t>
-            </a:r>
-          </a:p>
-        </p:txBody>
-      </p:sp>
-      <p:sp>
-        <p:nvSpPr>
-          <p:cNvPr id="9" name="B1"/>
-          <p:cNvSpPr>
-            <a:spLocks noGrp="1"/>
-          </p:cNvSpPr>
-          <p:nvPr>
-            <p:ph type="body" idx="25"/>
-          </p:nvPr>
-        </p:nvSpPr>
-        <p:spPr/>
-        <p:txBody>
-          <a:bodyPr/>
-          <a:lstStyle/>
-          <a:p>
-            <a:pPr/>
-            <a:r>
-              <a:rPr lang="th-TH" dirty="0"/>
-              <a:t>ดึงฟิลด์สำคัญ ตรวจกับต้นทาง</a:t>
-            </a:r>
-          </a:p>
-        </p:txBody>
-      </p:sp>
-      <p:sp>
-        <p:nvSpPr>
-          <p:cNvPr id="10" name="C2"/>
-          <p:cNvSpPr>
-            <a:spLocks noGrp="1"/>
-          </p:cNvSpPr>
-          <p:nvPr>
-            <p:ph type="body" idx="26"/>
-          </p:nvPr>
-        </p:nvSpPr>
-        <p:spPr/>
-        <p:txBody>
-          <a:bodyPr/>
-          <a:lstStyle/>
-          <a:p>
-            <a:pPr/>
-            <a:r>
-              <a:rPr lang="th-TH" dirty="0"/>
-              <a:t>3</a:t>
-            </a:r>
-          </a:p>
-        </p:txBody>
-      </p:sp>
-      <p:sp>
-        <p:nvSpPr>
-          <p:cNvPr id="11" name="H2"/>
-          <p:cNvSpPr>
-            <a:spLocks noGrp="1"/>
-          </p:cNvSpPr>
-          <p:nvPr>
-            <p:ph type="body" idx="27"/>
-          </p:nvPr>
-        </p:nvSpPr>
-        <p:spPr/>
-        <p:txBody>
-          <a:bodyPr/>
-          <a:lstStyle/>
-          <a:p>
-            <a:pPr/>
-            <a:r>
-              <a:rPr lang="th-TH" dirty="0"/>
-              <a:t>ตรวจสอบ</a:t>
-            </a:r>
-          </a:p>
-        </p:txBody>
-      </p:sp>
-      <p:sp>
-        <p:nvSpPr>
-          <p:cNvPr id="12" name="B2"/>
-          <p:cNvSpPr>
-            <a:spLocks noGrp="1"/>
-          </p:cNvSpPr>
-          <p:nvPr>
-            <p:ph type="body" idx="28"/>
-          </p:nvPr>
-        </p:nvSpPr>
-        <p:spPr/>
-        <p:txBody>
-          <a:bodyPr/>
-          <a:lstStyle/>
-          <a:p>
-            <a:pPr/>
-            <a:r>
-              <a:rPr lang="th-TH" dirty="0"/>
-              <a:t>กฎธุรกิจและวงเงินอนุมัติ</a:t>
-            </a:r>
-          </a:p>
-        </p:txBody>
-      </p:sp>
-      <p:sp>
-        <p:nvSpPr>
-          <p:cNvPr id="13" name="C3"/>
-          <p:cNvSpPr>
-            <a:spLocks noGrp="1"/>
-          </p:cNvSpPr>
-          <p:nvPr>
-            <p:ph type="body" idx="29"/>
-          </p:nvPr>
-        </p:nvSpPr>
-        <p:spPr/>
-        <p:txBody>
-          <a:bodyPr/>
-          <a:lstStyle/>
-          <a:p>
-            <a:pPr/>
-            <a:r>
-              <a:rPr lang="th-TH" dirty="0"/>
-              <a:t>4</a:t>
-            </a:r>
-          </a:p>
-        </p:txBody>
-      </p:sp>
-      <p:sp>
-        <p:nvSpPr>
-          <p:cNvPr id="14" name="H3"/>
-          <p:cNvSpPr>
-            <a:spLocks noGrp="1"/>
-          </p:cNvSpPr>
-          <p:nvPr>
-            <p:ph type="body" idx="30"/>
-          </p:nvPr>
-        </p:nvSpPr>
-        <p:spPr/>
-        <p:txBody>
-          <a:bodyPr/>
-          <a:lstStyle/>
-          <a:p>
-            <a:pPr/>
-            <a:r>
-              <a:rPr lang="th-TH" dirty="0"/>
-              <a:t>บันทึก</a:t>
-            </a:r>
-          </a:p>
-        </p:txBody>
-      </p:sp>
-      <p:sp>
-        <p:nvSpPr>
-          <p:cNvPr id="15" name="B3"/>
-          <p:cNvSpPr>
-            <a:spLocks noGrp="1"/>
-          </p:cNvSpPr>
-          <p:nvPr>
-            <p:ph type="body" idx="31"/>
-          </p:nvPr>
-        </p:nvSpPr>
-        <p:spPr/>
-        <p:txBody>
-          <a:bodyPr/>
-          <a:lstStyle/>
-          <a:p>
-            <a:pPr/>
-            <a:r>
-              <a:rPr lang="th-TH" dirty="0"/>
-              <a:t>ลงระบบบัญชีพร้อม audit trail</a:t>
-            </a:r>
-          </a:p>
-        </p:txBody>
-      </p:sp>
-      <p:sp>
-        <p:nvSpPr>
-          <p:cNvPr id="16" name="C4"/>
-          <p:cNvSpPr>
-            <a:spLocks noGrp="1"/>
-          </p:cNvSpPr>
-          <p:nvPr>
-            <p:ph type="body" idx="32"/>
-          </p:nvPr>
-        </p:nvSpPr>
-        <p:spPr/>
-        <p:txBody>
-          <a:bodyPr/>
-          <a:lstStyle/>
-          <a:p>
-            <a:pPr/>
-            <a:r>
-              <a:rPr lang="th-TH" dirty="0"/>
-              <a:t>5</a:t>
-            </a:r>
-          </a:p>
-        </p:txBody>
-      </p:sp>
-      <p:sp>
-        <p:nvSpPr>
-          <p:cNvPr id="17" name="H4"/>
-          <p:cNvSpPr>
-            <a:spLocks noGrp="1"/>
-          </p:cNvSpPr>
-          <p:nvPr>
-            <p:ph type="body" idx="33"/>
-          </p:nvPr>
-        </p:nvSpPr>
-        <p:spPr/>
-        <p:txBody>
-          <a:bodyPr/>
-          <a:lstStyle/>
-          <a:p>
-            <a:pPr/>
-            <a:r>
-              <a:rPr lang="th-TH" dirty="0"/>
-              <a:t>กระทบยอด</a:t>
-            </a:r>
-          </a:p>
-        </p:txBody>
-      </p:sp>
-      <p:sp>
-        <p:nvSpPr>
-          <p:cNvPr id="18" name="B4"/>
-          <p:cNvSpPr>
-            <a:spLocks noGrp="1"/>
-          </p:cNvSpPr>
-          <p:nvPr>
-            <p:ph type="body" idx="34"/>
-          </p:nvPr>
-        </p:nvSpPr>
-        <p:spPr/>
-        <p:txBody>
-          <a:bodyPr/>
-          <a:lstStyle/>
-          <a:p>
-            <a:pPr/>
-            <a:r>
-              <a:rPr lang="th-TH" dirty="0"/>
-              <a:t>จับคู่อัตโนมัติ ส่งรายงาน</a:t>
-            </a:r>
-          </a:p>
-        </p:txBody>
-      </p:sp>
-      <p:sp>
-        <p:nvSpPr>
-          <p:cNvPr id="19" name="RL"/>
-          <p:cNvSpPr>
-            <a:spLocks noGrp="1"/>
-          </p:cNvSpPr>
-          <p:nvPr>
-            <p:ph type="body" idx="35"/>
-          </p:nvPr>
-        </p:nvSpPr>
-        <p:spPr/>
-        <p:txBody>
-          <a:bodyPr/>
-          <a:lstStyle/>
-          <a:p>
-            <a:pPr/>
-            <a:r>
-              <a:rPr lang="th-TH" dirty="0"/>
-              <a:t>ผลลัพธ์</a:t>
-            </a:r>
-          </a:p>
-        </p:txBody>
-      </p:sp>
-      <p:sp>
-        <p:nvSpPr>
-          <p:cNvPr id="20" name="RC"/>
-          <p:cNvSpPr>
-            <a:spLocks noGrp="1"/>
-          </p:cNvSpPr>
-          <p:nvPr>
-            <p:ph type="body" idx="36"/>
-          </p:nvPr>
-        </p:nvSpPr>
-        <p:spPr/>
-        <p:txBody>
-          <a:bodyPr/>
-          <a:lstStyle/>
-          <a:p>
-            <a:pPr/>
-            <a:r>
-              <a:rPr lang="th-TH" dirty="0"/>
-              <a:t>เอกสารหนึ่งใบผ่านครบห้าขั้นโดยไม่มีการคีย์ซ้ำเลย</a:t>
+              <a:t>กระบวนการ สถาปัตยกรรม และขอบเขตที่ตกลงกัน</a:t>
             </a:r>
           </a:p>
         </p:txBody>
@@ -21703,7 +23115,7 @@
             <a:pPr/>
             <a:r>
               <a:rPr lang="th-TH" dirty="0"/>
-              <a:t>ภาพรวมสถาปัตยกรรมระบบ</a:t>
+              <a:t>กระบวนการที่เสนอ</a:t>
             </a:r>
           </a:p>
         </p:txBody>
@@ -21726,19 +23138,19 @@
             <a:pPr/>
             <a:r>
               <a:rPr lang="th-TH" dirty="0"/>
-              <a:t>ใช้ชุดชิ้นส่วนมาตรฐาน — กล่องมุมตรง เส้นหักมุมฉาก ไม่มีเงา</a:t>
-            </a:r>
-          </a:p>
-        </p:txBody>
-      </p:sp>
-      <p:sp>
-        <p:nvSpPr>
-          <p:cNvPr id="4" name="Leg"/>
-          <p:cNvSpPr>
-            <a:spLocks noGrp="1"/>
-          </p:cNvSpPr>
-          <p:nvPr>
-            <p:ph type="body" idx="2"/>
+              <a:t>ห้าขั้นตอน ทำงานต่อเนื่องโดยไม่ต้องคีย์ซ้ำ</a:t>
+            </a:r>
+          </a:p>
+        </p:txBody>
+      </p:sp>
+      <p:sp>
+        <p:nvSpPr>
+          <p:cNvPr id="4" name="C0"/>
+          <p:cNvSpPr>
+            <a:spLocks noGrp="1"/>
+          </p:cNvSpPr>
+          <p:nvPr>
+            <p:ph type="body" idx="20"/>
           </p:nvPr>
         </p:nvSpPr>
         <p:spPr/>
@@ -21749,19 +23161,19 @@
             <a:pPr/>
             <a:r>
               <a:rPr lang="th-TH" dirty="0"/>
-              <a:t>กล่องทึบ = ระบบที่มีอยู่  ·  กล่องมีสีหมวด = ส่วนที่เพิ่ม  ·  เส้นทึบ = ข้อมูลไหลอัตโนมัติ</a:t>
-            </a:r>
-          </a:p>
-        </p:txBody>
-      </p:sp>
-      <p:sp>
-        <p:nvSpPr>
-          <p:cNvPr id="5" name="TL"/>
-          <p:cNvSpPr>
-            <a:spLocks noGrp="1"/>
-          </p:cNvSpPr>
-          <p:nvPr>
-            <p:ph type="body" idx="3"/>
+              <a:t>1</a:t>
+            </a:r>
+          </a:p>
+        </p:txBody>
+      </p:sp>
+      <p:sp>
+        <p:nvSpPr>
+          <p:cNvPr id="5" name="H0"/>
+          <p:cNvSpPr>
+            <a:spLocks noGrp="1"/>
+          </p:cNvSpPr>
+          <p:nvPr>
+            <p:ph type="body" idx="21"/>
           </p:nvPr>
         </p:nvSpPr>
         <p:spPr/>
@@ -21772,19 +23184,19 @@
             <a:pPr/>
             <a:r>
               <a:rPr lang="th-TH" dirty="0"/>
-              <a:t>สรุป</a:t>
-            </a:r>
-          </a:p>
-        </p:txBody>
-      </p:sp>
-      <p:sp>
-        <p:nvSpPr>
-          <p:cNvPr id="6" name="TC"/>
-          <p:cNvSpPr>
-            <a:spLocks noGrp="1"/>
-          </p:cNvSpPr>
-          <p:nvPr>
-            <p:ph type="body" idx="4"/>
+              <a:t>รับเอกสาร</a:t>
+            </a:r>
+          </a:p>
+        </p:txBody>
+      </p:sp>
+      <p:sp>
+        <p:nvSpPr>
+          <p:cNvPr id="6" name="B0"/>
+          <p:cNvSpPr>
+            <a:spLocks noGrp="1"/>
+          </p:cNvSpPr>
+          <p:nvPr>
+            <p:ph type="body" idx="22"/>
           </p:nvPr>
         </p:nvSpPr>
         <p:spPr/>
@@ -21795,457 +23207,329 @@
             <a:pPr/>
             <a:r>
               <a:rPr lang="th-TH" dirty="0"/>
-              <a:t>ระบบเดิมไม่ถูกแก้ ของใหม่แทรกเป็นคิวและตัวตรวจกฎคั่นกลางเท่านั้น</a:t>
-            </a:r>
-          </a:p>
-        </p:txBody>
-      </p:sp>
-      <p:sp>
-        <p:nvSpPr>
-          <p:cNvPr id="10" name="Group Zone"/>
-          <p:cNvSpPr/>
-          <p:nvPr/>
-        </p:nvSpPr>
-        <p:spPr>
-          <a:xfrm>
-            <a:off x="3566160" y="2766060"/>
-            <a:ext cx="5257800" cy="1645920"/>
-          </a:xfrm>
-          <a:prstGeom prst="rect">
-            <a:avLst/>
-          </a:prstGeom>
-          <a:solidFill>
-            <a:srgbClr val="E8F6F5"/>
-          </a:solidFill>
-          <a:ln>
-            <a:noFill/>
-          </a:ln>
-        </p:spPr>
-        <p:txBody>
-          <a:bodyPr/>
-          <a:lstStyle/>
-          <a:p>
-            <a:endParaRPr lang="th-TH"/>
-          </a:p>
-        </p:txBody>
-      </p:sp>
-      <p:sp>
-        <p:nvSpPr>
-          <p:cNvPr id="11" name="Group Label"/>
-          <p:cNvSpPr/>
-          <p:nvPr/>
-        </p:nvSpPr>
-        <p:spPr>
-          <a:xfrm>
-            <a:off x="3840480" y="2926080"/>
-            <a:ext cx="3200400" cy="228600"/>
-          </a:xfrm>
-          <a:prstGeom prst="rect">
-            <a:avLst/>
-          </a:prstGeom>
-          <a:noFill/>
-          <a:ln>
-            <a:noFill/>
-          </a:ln>
-        </p:spPr>
-        <p:txBody>
-          <a:bodyPr wrap="square" anchor="ctr" lIns="0" tIns="0" rIns="0" bIns="0" rtlCol="0"/>
-          <a:lstStyle/>
-          <a:p>
-            <a:pPr algn="l" marL="0" indent="0">
-              <a:lnSpc>
-                <a:spcPct val="100000"/>
-              </a:lnSpc>
-              <a:buNone/>
-            </a:pPr>
-            <a:r>
-              <a:rPr lang="th-TH" sz="1200" b="1" spc="120" dirty="0">
-                <a:solidFill>
-                  <a:srgbClr val="216B7F"/>
-                </a:solidFill>
-                <a:latin typeface="+mn-lt"/>
-                <a:ea typeface="+mn-ea"/>
-                <a:cs typeface="+mn-cs"/>
-              </a:rPr>
-              <a:t>ส่วนที่เพิ่มใหม่</a:t>
-            </a:r>
-          </a:p>
-        </p:txBody>
-      </p:sp>
-      <p:sp>
-        <p:nvSpPr>
-          <p:cNvPr id="12" name="Box 1"/>
-          <p:cNvSpPr/>
-          <p:nvPr/>
-        </p:nvSpPr>
-        <p:spPr>
-          <a:xfrm>
-            <a:off x="1143000" y="3223260"/>
-            <a:ext cx="2011680" cy="731520"/>
-          </a:xfrm>
-          <a:prstGeom prst="rect">
-            <a:avLst/>
-          </a:prstGeom>
-          <a:solidFill>
-            <a:srgbClr val="23436D"/>
-          </a:solidFill>
-          <a:ln>
-            <a:noFill/>
-          </a:ln>
-        </p:spPr>
-        <p:txBody>
-          <a:bodyPr wrap="square" anchor="ctr" lIns="0" tIns="0" rIns="0" bIns="0" rtlCol="0"/>
-          <a:lstStyle/>
-          <a:p>
-            <a:pPr algn="ctr" marL="0" indent="0">
-              <a:lnSpc>
-                <a:spcPct val="110000"/>
-              </a:lnSpc>
-              <a:buNone/>
-            </a:pPr>
-            <a:r>
-              <a:rPr lang="th-TH" sz="1200" dirty="0">
-                <a:solidFill>
-                  <a:srgbClr val="FFFFFF"/>
-                </a:solidFill>
-                <a:latin typeface="+mn-lt"/>
-                <a:ea typeface="+mn-ea"/>
-                <a:cs typeface="+mn-cs"/>
-              </a:rPr>
-              <a:t>ระบบ ERP ปัจจุบัน</a:t>
-            </a:r>
-          </a:p>
-        </p:txBody>
-      </p:sp>
-      <p:sp>
-        <p:nvSpPr>
-          <p:cNvPr id="13" name="Box 2"/>
-          <p:cNvSpPr/>
-          <p:nvPr/>
-        </p:nvSpPr>
-        <p:spPr>
-          <a:xfrm>
-            <a:off x="3840480" y="3223260"/>
-            <a:ext cx="2011680" cy="731520"/>
-          </a:xfrm>
-          <a:prstGeom prst="rect">
-            <a:avLst/>
-          </a:prstGeom>
-          <a:solidFill>
-            <a:srgbClr val="FFFFFF"/>
-          </a:solidFill>
-          <a:ln w="12700">
-            <a:solidFill>
-              <a:srgbClr val="23436D"/>
-            </a:solidFill>
-          </a:ln>
-        </p:spPr>
-        <p:txBody>
-          <a:bodyPr wrap="square" anchor="ctr" lIns="0" tIns="0" rIns="0" bIns="0" rtlCol="0"/>
-          <a:lstStyle/>
-          <a:p>
-            <a:pPr algn="ctr" marL="0" indent="0">
-              <a:lnSpc>
-                <a:spcPct val="110000"/>
-              </a:lnSpc>
-              <a:buNone/>
-            </a:pPr>
-            <a:r>
-              <a:rPr lang="th-TH" sz="1200" dirty="0">
-                <a:solidFill>
-                  <a:srgbClr val="333333"/>
-                </a:solidFill>
-                <a:latin typeface="+mn-lt"/>
-                <a:ea typeface="+mn-ea"/>
-                <a:cs typeface="+mn-cs"/>
-              </a:rPr>
-              <a:t>คิวเอกสารกลาง</a:t>
-            </a:r>
-          </a:p>
-        </p:txBody>
-      </p:sp>
-      <p:sp>
-        <p:nvSpPr>
-          <p:cNvPr id="113" name="Box 2 Tab"/>
-          <p:cNvSpPr/>
-          <p:nvPr/>
-        </p:nvSpPr>
-        <p:spPr>
-          <a:xfrm>
-            <a:off x="3954780" y="3337560"/>
-            <a:ext cx="205740" cy="45720"/>
-          </a:xfrm>
-          <a:prstGeom prst="rect">
-            <a:avLst/>
-          </a:prstGeom>
-          <a:solidFill>
-            <a:srgbClr val="23436D"/>
-          </a:solidFill>
-          <a:ln>
-            <a:noFill/>
-          </a:ln>
-        </p:spPr>
-        <p:txBody>
-          <a:bodyPr/>
-          <a:lstStyle/>
-          <a:p>
-            <a:endParaRPr lang="th-TH"/>
-          </a:p>
-        </p:txBody>
-      </p:sp>
-      <p:sp>
-        <p:nvSpPr>
-          <p:cNvPr id="14" name="Box 3"/>
-          <p:cNvSpPr/>
-          <p:nvPr/>
-        </p:nvSpPr>
-        <p:spPr>
-          <a:xfrm>
-            <a:off x="6537960" y="3223260"/>
-            <a:ext cx="2011680" cy="731520"/>
-          </a:xfrm>
-          <a:prstGeom prst="rect">
-            <a:avLst/>
-          </a:prstGeom>
-          <a:solidFill>
-            <a:srgbClr val="FFFFFF"/>
-          </a:solidFill>
-          <a:ln w="12700">
-            <a:solidFill>
-              <a:srgbClr val="216B7F"/>
-            </a:solidFill>
-          </a:ln>
-        </p:spPr>
-        <p:txBody>
-          <a:bodyPr wrap="square" anchor="ctr" lIns="0" tIns="0" rIns="0" bIns="0" rtlCol="0"/>
-          <a:lstStyle/>
-          <a:p>
-            <a:pPr algn="ctr" marL="0" indent="0">
-              <a:lnSpc>
-                <a:spcPct val="110000"/>
-              </a:lnSpc>
-              <a:buNone/>
-            </a:pPr>
-            <a:r>
-              <a:rPr lang="th-TH" sz="1200" dirty="0">
-                <a:solidFill>
-                  <a:srgbClr val="333333"/>
-                </a:solidFill>
-                <a:latin typeface="+mn-lt"/>
-                <a:ea typeface="+mn-ea"/>
-                <a:cs typeface="+mn-cs"/>
-              </a:rPr>
-              <a:t>ตัวตรวจกฎธุรกิจ</a:t>
-            </a:r>
-          </a:p>
-        </p:txBody>
-      </p:sp>
-      <p:sp>
-        <p:nvSpPr>
-          <p:cNvPr id="114" name="Box 3 Tab"/>
-          <p:cNvSpPr/>
-          <p:nvPr/>
-        </p:nvSpPr>
-        <p:spPr>
-          <a:xfrm>
-            <a:off x="6652260" y="3337560"/>
-            <a:ext cx="205740" cy="45720"/>
-          </a:xfrm>
-          <a:prstGeom prst="rect">
-            <a:avLst/>
-          </a:prstGeom>
-          <a:solidFill>
-            <a:srgbClr val="216B7F"/>
-          </a:solidFill>
-          <a:ln>
-            <a:noFill/>
-          </a:ln>
-        </p:spPr>
-        <p:txBody>
-          <a:bodyPr/>
-          <a:lstStyle/>
-          <a:p>
-            <a:endParaRPr lang="th-TH"/>
-          </a:p>
-        </p:txBody>
-      </p:sp>
-      <p:sp>
-        <p:nvSpPr>
-          <p:cNvPr id="15" name="Box 4"/>
-          <p:cNvSpPr/>
-          <p:nvPr/>
-        </p:nvSpPr>
-        <p:spPr>
-          <a:xfrm>
-            <a:off x="9235440" y="3223260"/>
-            <a:ext cx="2011680" cy="731520"/>
-          </a:xfrm>
-          <a:prstGeom prst="rect">
-            <a:avLst/>
-          </a:prstGeom>
-          <a:solidFill>
-            <a:srgbClr val="23436D"/>
-          </a:solidFill>
-          <a:ln>
-            <a:noFill/>
-          </a:ln>
-        </p:spPr>
-        <p:txBody>
-          <a:bodyPr wrap="square" anchor="ctr" lIns="0" tIns="0" rIns="0" bIns="0" rtlCol="0"/>
-          <a:lstStyle/>
-          <a:p>
-            <a:pPr algn="ctr" marL="0" indent="0">
-              <a:lnSpc>
-                <a:spcPct val="110000"/>
-              </a:lnSpc>
-              <a:buNone/>
-            </a:pPr>
-            <a:r>
-              <a:rPr lang="th-TH" sz="1200" dirty="0">
-                <a:solidFill>
-                  <a:srgbClr val="FFFFFF"/>
-                </a:solidFill>
-                <a:latin typeface="+mn-lt"/>
-                <a:ea typeface="+mn-ea"/>
-                <a:cs typeface="+mn-cs"/>
-              </a:rPr>
-              <a:t>ระบบบัญชี</a:t>
-            </a:r>
-          </a:p>
-        </p:txBody>
-      </p:sp>
-      <p:sp>
-        <p:nvSpPr>
-          <p:cNvPr id="16" name="Link 1"/>
-          <p:cNvSpPr/>
-          <p:nvPr/>
-        </p:nvSpPr>
-        <p:spPr>
-          <a:xfrm>
-            <a:off x="3268980" y="3589020"/>
-            <a:ext cx="457200" cy="0"/>
-          </a:xfrm>
-          <a:prstGeom prst="line">
-            <a:avLst/>
-          </a:prstGeom>
-          <a:noFill/>
-          <a:ln w="15875" cap="flat">
-            <a:solidFill>
-              <a:srgbClr val="216B7F"/>
-            </a:solidFill>
-            <a:prstDash val="solid"/>
-            <a:tailEnd type="triangle" w="med" len="med"/>
-          </a:ln>
-        </p:spPr>
-        <p:txBody>
-          <a:bodyPr/>
-          <a:lstStyle/>
-          <a:p>
-            <a:endParaRPr lang="th-TH"/>
-          </a:p>
-        </p:txBody>
-      </p:sp>
-      <p:sp>
-        <p:nvSpPr>
-          <p:cNvPr id="17" name="Link 2"/>
-          <p:cNvSpPr/>
-          <p:nvPr/>
-        </p:nvSpPr>
-        <p:spPr>
-          <a:xfrm>
-            <a:off x="5966460" y="3589020"/>
-            <a:ext cx="457200" cy="0"/>
-          </a:xfrm>
-          <a:prstGeom prst="line">
-            <a:avLst/>
-          </a:prstGeom>
-          <a:noFill/>
-          <a:ln w="15875" cap="flat">
-            <a:solidFill>
-              <a:srgbClr val="216B7F"/>
-            </a:solidFill>
-            <a:prstDash val="solid"/>
-            <a:tailEnd type="triangle" w="med" len="med"/>
-          </a:ln>
-        </p:spPr>
-        <p:txBody>
-          <a:bodyPr/>
-          <a:lstStyle/>
-          <a:p>
-            <a:endParaRPr lang="th-TH"/>
-          </a:p>
-        </p:txBody>
-      </p:sp>
-      <p:sp>
-        <p:nvSpPr>
-          <p:cNvPr id="18" name="Link 3"/>
-          <p:cNvSpPr/>
-          <p:nvPr/>
-        </p:nvSpPr>
-        <p:spPr>
-          <a:xfrm>
-            <a:off x="8663940" y="3589020"/>
-            <a:ext cx="457200" cy="0"/>
-          </a:xfrm>
-          <a:prstGeom prst="line">
-            <a:avLst/>
-          </a:prstGeom>
-          <a:noFill/>
-          <a:ln w="15875" cap="flat">
-            <a:solidFill>
-              <a:srgbClr val="216B7F"/>
-            </a:solidFill>
-            <a:prstDash val="solid"/>
-            <a:tailEnd type="triangle" w="med" len="med"/>
-          </a:ln>
-        </p:spPr>
-        <p:txBody>
-          <a:bodyPr/>
-          <a:lstStyle/>
-          <a:p>
-            <a:endParaRPr lang="th-TH"/>
-          </a:p>
-        </p:txBody>
-      </p:sp>
-      <p:sp>
-        <p:nvSpPr>
-          <p:cNvPr id="19" name="Edge Label"/>
-          <p:cNvSpPr/>
-          <p:nvPr/>
-        </p:nvSpPr>
-        <p:spPr>
-          <a:xfrm>
-            <a:off x="5806440" y="3268980"/>
-            <a:ext cx="822960" cy="228600"/>
-          </a:xfrm>
-          <a:prstGeom prst="rect">
-            <a:avLst/>
-          </a:prstGeom>
-          <a:noFill/>
-          <a:ln>
-            <a:noFill/>
-          </a:ln>
-        </p:spPr>
-        <p:txBody>
-          <a:bodyPr wrap="square" anchor="ctr" lIns="0" tIns="0" rIns="0" bIns="0" rtlCol="0"/>
-          <a:lstStyle/>
-          <a:p>
-            <a:pPr algn="ctr" marL="0" indent="0">
-              <a:lnSpc>
-                <a:spcPct val="100000"/>
-              </a:lnSpc>
-              <a:buNone/>
-            </a:pPr>
-            <a:r>
-              <a:rPr lang="th-TH" sz="1000" dirty="0">
-                <a:solidFill>
-                  <a:srgbClr val="5F5F5F"/>
-                </a:solidFill>
-                <a:latin typeface="+mn-lt"/>
-                <a:ea typeface="+mn-ea"/>
-                <a:cs typeface="+mn-cs"/>
-              </a:rPr>
-              <a:t>ผ่านกฎ</a:t>
+              <a:t>สแกนหรือรับไฟล์เข้าคิวกลาง</a:t>
+            </a:r>
+          </a:p>
+        </p:txBody>
+      </p:sp>
+      <p:sp>
+        <p:nvSpPr>
+          <p:cNvPr id="7" name="C1"/>
+          <p:cNvSpPr>
+            <a:spLocks noGrp="1"/>
+          </p:cNvSpPr>
+          <p:nvPr>
+            <p:ph type="body" idx="23"/>
+          </p:nvPr>
+        </p:nvSpPr>
+        <p:spPr/>
+        <p:txBody>
+          <a:bodyPr/>
+          <a:lstStyle/>
+          <a:p>
+            <a:pPr/>
+            <a:r>
+              <a:rPr lang="th-TH" dirty="0"/>
+              <a:t>2</a:t>
+            </a:r>
+          </a:p>
+        </p:txBody>
+      </p:sp>
+      <p:sp>
+        <p:nvSpPr>
+          <p:cNvPr id="8" name="H1"/>
+          <p:cNvSpPr>
+            <a:spLocks noGrp="1"/>
+          </p:cNvSpPr>
+          <p:nvPr>
+            <p:ph type="body" idx="24"/>
+          </p:nvPr>
+        </p:nvSpPr>
+        <p:spPr/>
+        <p:txBody>
+          <a:bodyPr/>
+          <a:lstStyle/>
+          <a:p>
+            <a:pPr/>
+            <a:r>
+              <a:rPr lang="th-TH" dirty="0"/>
+              <a:t>อ่านข้อมูล</a:t>
+            </a:r>
+          </a:p>
+        </p:txBody>
+      </p:sp>
+      <p:sp>
+        <p:nvSpPr>
+          <p:cNvPr id="9" name="B1"/>
+          <p:cNvSpPr>
+            <a:spLocks noGrp="1"/>
+          </p:cNvSpPr>
+          <p:nvPr>
+            <p:ph type="body" idx="25"/>
+          </p:nvPr>
+        </p:nvSpPr>
+        <p:spPr/>
+        <p:txBody>
+          <a:bodyPr/>
+          <a:lstStyle/>
+          <a:p>
+            <a:pPr/>
+            <a:r>
+              <a:rPr lang="th-TH" dirty="0"/>
+              <a:t>ดึงฟิลด์สำคัญ ตรวจกับต้นทาง</a:t>
+            </a:r>
+          </a:p>
+        </p:txBody>
+      </p:sp>
+      <p:sp>
+        <p:nvSpPr>
+          <p:cNvPr id="10" name="C2"/>
+          <p:cNvSpPr>
+            <a:spLocks noGrp="1"/>
+          </p:cNvSpPr>
+          <p:nvPr>
+            <p:ph type="body" idx="26"/>
+          </p:nvPr>
+        </p:nvSpPr>
+        <p:spPr/>
+        <p:txBody>
+          <a:bodyPr/>
+          <a:lstStyle/>
+          <a:p>
+            <a:pPr/>
+            <a:r>
+              <a:rPr lang="th-TH" dirty="0"/>
+              <a:t>3</a:t>
+            </a:r>
+          </a:p>
+        </p:txBody>
+      </p:sp>
+      <p:sp>
+        <p:nvSpPr>
+          <p:cNvPr id="11" name="H2"/>
+          <p:cNvSpPr>
+            <a:spLocks noGrp="1"/>
+          </p:cNvSpPr>
+          <p:nvPr>
+            <p:ph type="body" idx="27"/>
+          </p:nvPr>
+        </p:nvSpPr>
+        <p:spPr/>
+        <p:txBody>
+          <a:bodyPr/>
+          <a:lstStyle/>
+          <a:p>
+            <a:pPr/>
+            <a:r>
+              <a:rPr lang="th-TH" dirty="0"/>
+              <a:t>ตรวจสอบ</a:t>
+            </a:r>
+          </a:p>
+        </p:txBody>
+      </p:sp>
+      <p:sp>
+        <p:nvSpPr>
+          <p:cNvPr id="12" name="B2"/>
+          <p:cNvSpPr>
+            <a:spLocks noGrp="1"/>
+          </p:cNvSpPr>
+          <p:nvPr>
+            <p:ph type="body" idx="28"/>
+          </p:nvPr>
+        </p:nvSpPr>
+        <p:spPr/>
+        <p:txBody>
+          <a:bodyPr/>
+          <a:lstStyle/>
+          <a:p>
+            <a:pPr/>
+            <a:r>
+              <a:rPr lang="th-TH" dirty="0"/>
+              <a:t>กฎธุรกิจและวงเงินอนุมัติ</a:t>
+            </a:r>
+          </a:p>
+        </p:txBody>
+      </p:sp>
+      <p:sp>
+        <p:nvSpPr>
+          <p:cNvPr id="13" name="C3"/>
+          <p:cNvSpPr>
+            <a:spLocks noGrp="1"/>
+          </p:cNvSpPr>
+          <p:nvPr>
+            <p:ph type="body" idx="29"/>
+          </p:nvPr>
+        </p:nvSpPr>
+        <p:spPr/>
+        <p:txBody>
+          <a:bodyPr/>
+          <a:lstStyle/>
+          <a:p>
+            <a:pPr/>
+            <a:r>
+              <a:rPr lang="th-TH" dirty="0"/>
+              <a:t>4</a:t>
+            </a:r>
+          </a:p>
+        </p:txBody>
+      </p:sp>
+      <p:sp>
+        <p:nvSpPr>
+          <p:cNvPr id="14" name="H3"/>
+          <p:cNvSpPr>
+            <a:spLocks noGrp="1"/>
+          </p:cNvSpPr>
+          <p:nvPr>
+            <p:ph type="body" idx="30"/>
+          </p:nvPr>
+        </p:nvSpPr>
+        <p:spPr/>
+        <p:txBody>
+          <a:bodyPr/>
+          <a:lstStyle/>
+          <a:p>
+            <a:pPr/>
+            <a:r>
+              <a:rPr lang="th-TH" dirty="0"/>
+              <a:t>บันทึก</a:t>
+            </a:r>
+          </a:p>
+        </p:txBody>
+      </p:sp>
+      <p:sp>
+        <p:nvSpPr>
+          <p:cNvPr id="15" name="B3"/>
+          <p:cNvSpPr>
+            <a:spLocks noGrp="1"/>
+          </p:cNvSpPr>
+          <p:nvPr>
+            <p:ph type="body" idx="31"/>
+          </p:nvPr>
+        </p:nvSpPr>
+        <p:spPr/>
+        <p:txBody>
+          <a:bodyPr/>
+          <a:lstStyle/>
+          <a:p>
+            <a:pPr/>
+            <a:r>
+              <a:rPr lang="th-TH" dirty="0"/>
+              <a:t>ลงระบบบัญชีพร้อม audit trail</a:t>
+            </a:r>
+          </a:p>
+        </p:txBody>
+      </p:sp>
+      <p:sp>
+        <p:nvSpPr>
+          <p:cNvPr id="16" name="C4"/>
+          <p:cNvSpPr>
+            <a:spLocks noGrp="1"/>
+          </p:cNvSpPr>
+          <p:nvPr>
+            <p:ph type="body" idx="32"/>
+          </p:nvPr>
+        </p:nvSpPr>
+        <p:spPr/>
+        <p:txBody>
+          <a:bodyPr/>
+          <a:lstStyle/>
+          <a:p>
+            <a:pPr/>
+            <a:r>
+              <a:rPr lang="th-TH" dirty="0"/>
+              <a:t>5</a:t>
+            </a:r>
+          </a:p>
+        </p:txBody>
+      </p:sp>
+      <p:sp>
+        <p:nvSpPr>
+          <p:cNvPr id="17" name="H4"/>
+          <p:cNvSpPr>
+            <a:spLocks noGrp="1"/>
+          </p:cNvSpPr>
+          <p:nvPr>
+            <p:ph type="body" idx="33"/>
+          </p:nvPr>
+        </p:nvSpPr>
+        <p:spPr/>
+        <p:txBody>
+          <a:bodyPr/>
+          <a:lstStyle/>
+          <a:p>
+            <a:pPr/>
+            <a:r>
+              <a:rPr lang="th-TH" dirty="0"/>
+              <a:t>กระทบยอด</a:t>
+            </a:r>
+          </a:p>
+        </p:txBody>
+      </p:sp>
+      <p:sp>
+        <p:nvSpPr>
+          <p:cNvPr id="18" name="B4"/>
+          <p:cNvSpPr>
+            <a:spLocks noGrp="1"/>
+          </p:cNvSpPr>
+          <p:nvPr>
+            <p:ph type="body" idx="34"/>
+          </p:nvPr>
+        </p:nvSpPr>
+        <p:spPr/>
+        <p:txBody>
+          <a:bodyPr/>
+          <a:lstStyle/>
+          <a:p>
+            <a:pPr/>
+            <a:r>
+              <a:rPr lang="th-TH" dirty="0"/>
+              <a:t>จับคู่อัตโนมัติ ส่งรายงาน</a:t>
+            </a:r>
+          </a:p>
+        </p:txBody>
+      </p:sp>
+      <p:sp>
+        <p:nvSpPr>
+          <p:cNvPr id="19" name="RL"/>
+          <p:cNvSpPr>
+            <a:spLocks noGrp="1"/>
+          </p:cNvSpPr>
+          <p:nvPr>
+            <p:ph type="body" idx="35"/>
+          </p:nvPr>
+        </p:nvSpPr>
+        <p:spPr/>
+        <p:txBody>
+          <a:bodyPr/>
+          <a:lstStyle/>
+          <a:p>
+            <a:pPr/>
+            <a:r>
+              <a:rPr lang="th-TH" dirty="0"/>
+              <a:t>ผลลัพธ์</a:t>
+            </a:r>
+          </a:p>
+        </p:txBody>
+      </p:sp>
+      <p:sp>
+        <p:nvSpPr>
+          <p:cNvPr id="20" name="RC"/>
+          <p:cNvSpPr>
+            <a:spLocks noGrp="1"/>
+          </p:cNvSpPr>
+          <p:nvPr>
+            <p:ph type="body" idx="36"/>
+          </p:nvPr>
+        </p:nvSpPr>
+        <p:spPr/>
+        <p:txBody>
+          <a:bodyPr/>
+          <a:lstStyle/>
+          <a:p>
+            <a:pPr/>
+            <a:r>
+              <a:rPr lang="th-TH" dirty="0"/>
+              <a:t>เอกสารหนึ่งใบผ่านครบห้าขั้นโดยไม่มีการคีย์ซ้ำเลย</a:t>
             </a:r>
           </a:p>
         </p:txBody>
@@ -22275,22 +23559,22 @@
         <a:srgbClr val="E8F6F5"/>
       </a:lt2>
       <a:accent1>
-        <a:srgbClr val="23436D"/>
+        <a:srgbClr val="2A5EA0"/>
       </a:accent1>
       <a:accent2>
-        <a:srgbClr val="216B7F"/>
+        <a:srgbClr val="BB731B"/>
       </a:accent2>
       <a:accent3>
-        <a:srgbClr val="4E8FA8"/>
+        <a:srgbClr val="0D9298"/>
       </a:accent3>
       <a:accent4>
-        <a:srgbClr val="16324F"/>
+        <a:srgbClr val="6C4289"/>
       </a:accent4>
       <a:accent5>
-        <a:srgbClr val="5F5F5F"/>
+        <a:srgbClr val="A4A4A4"/>
       </a:accent5>
       <a:accent6>
-        <a:srgbClr val="E8F6F5"/>
+        <a:srgbClr val="216B7F"/>
       </a:accent6>
       <a:hlink>
         <a:srgbClr val="216B7F"/>

--- a/NCT-Slide-Template-Corp-Demo.pptx
+++ b/NCT-Slide-Template-Corp-Demo.pptx
@@ -183,8 +183,32 @@
               <c:showPercent val="0"/>
               <c:showBubbleSize val="0"/>
             </c:dLbl>
+            <c:spPr>
+              <a:noFill/>
+              <a:ln>
+                <a:noFill/>
+              </a:ln>
+            </c:spPr>
+            <c:txPr>
+              <a:bodyPr/>
+              <a:lstStyle/>
+              <a:p>
+                <a:pPr>
+                  <a:defRPr sz="1200">
+                    <a:solidFill>
+                      <a:srgbClr val="5F5F5F"/>
+                    </a:solidFill>
+                    <a:latin typeface="+mn-lt"/>
+                    <a:ea typeface="+mn-ea"/>
+                    <a:cs typeface="+mn-cs"/>
+                  </a:defRPr>
+                </a:pPr>
+                <a:endParaRPr lang="th-TH"/>
+              </a:p>
+            </c:txPr>
+            <c:dLblPos val="outEnd"/>
             <c:showLegendKey val="0"/>
-            <c:showVal val="0"/>
+            <c:showVal val="1"/>
             <c:showCatName val="0"/>
             <c:showSerName val="0"/>
             <c:showPercent val="0"/>
@@ -1887,7 +1911,7 @@
           </a:prstGeom>
           <a:solidFill>
             <a:srgbClr val="FFFFFF">
-              <a:alpha val="70000"/>
+              <a:alpha val="72000"/>
             </a:srgbClr>
           </a:solidFill>
           <a:ln>
@@ -1932,7 +1956,7 @@
               <a:defRPr lang="th-TH" sz="1200" b="1" spc="120" dirty="0">
                 <a:solidFill>
                   <a:srgbClr val="FFFFFF">
-                    <a:alpha val="75000"/>
+                    <a:alpha val="80000"/>
                   </a:srgbClr>
                 </a:solidFill>
                 <a:latin typeface="+mn-lt"/>
@@ -1952,7 +1976,7 @@
               <a:rPr lang="th-TH" sz="1200" b="1" spc="120" dirty="0">
                 <a:solidFill>
                   <a:srgbClr val="FFFFFF">
-                    <a:alpha val="75000"/>
+                    <a:alpha val="80000"/>
                   </a:srgbClr>
                 </a:solidFill>
                 <a:latin typeface="+mn-lt"/>
@@ -2130,7 +2154,7 @@
               <a:defRPr lang="th-TH" sz="1400" dirty="0">
                 <a:solidFill>
                   <a:srgbClr val="FFFFFF">
-                    <a:alpha val="88000"/>
+                    <a:alpha val="92000"/>
                   </a:srgbClr>
                 </a:solidFill>
                 <a:latin typeface="+mn-lt"/>
@@ -2150,7 +2174,7 @@
               <a:rPr lang="th-TH" sz="1400" dirty="0">
                 <a:solidFill>
                   <a:srgbClr val="FFFFFF">
-                    <a:alpha val="88000"/>
+                    <a:alpha val="92000"/>
                   </a:srgbClr>
                 </a:solidFill>
                 <a:latin typeface="+mn-lt"/>
@@ -2392,7 +2416,7 @@
               <a:rPr lang="th-TH" sz="1000">
                 <a:solidFill>
                   <a:srgbClr val="FFFFFF">
-                    <a:alpha val="60000"/>
+                    <a:alpha val="72000"/>
                   </a:srgbClr>
                 </a:solidFill>
                 <a:latin typeface="+mn-lt"/>
@@ -2539,7 +2563,7 @@
             <a:avLst/>
           </a:prstGeom>
           <a:solidFill>
-            <a:srgbClr val="23436D"/>
+            <a:srgbClr val="193B36"/>
           </a:solidFill>
           <a:ln>
             <a:noFill/>
@@ -2649,7 +2673,7 @@
               <a:defRPr lang="th-TH" sz="1200" dirty="0">
                 <a:solidFill>
                   <a:srgbClr val="FFFFFF">
-                    <a:alpha val="88000"/>
+                    <a:alpha val="92000"/>
                   </a:srgbClr>
                 </a:solidFill>
                 <a:latin typeface="+mn-lt"/>
@@ -2673,7 +2697,7 @@
               <a:defRPr lang="th-TH" sz="1200" dirty="0">
                 <a:solidFill>
                   <a:srgbClr val="FFFFFF">
-                    <a:alpha val="73000"/>
+                    <a:alpha val="77000"/>
                   </a:srgbClr>
                 </a:solidFill>
                 <a:latin typeface="+mn-lt"/>
@@ -2701,7 +2725,7 @@
               <a:rPr lang="th-TH" sz="1200" dirty="0">
                 <a:solidFill>
                   <a:srgbClr val="FFFFFF">
-                    <a:alpha val="88000"/>
+                    <a:alpha val="92000"/>
                   </a:srgbClr>
                 </a:solidFill>
                 <a:latin typeface="+mn-lt"/>
@@ -2730,7 +2754,7 @@
               <a:rPr lang="th-TH" sz="1200" dirty="0">
                 <a:solidFill>
                   <a:srgbClr val="FFFFFF">
-                    <a:alpha val="73000"/>
+                    <a:alpha val="77000"/>
                   </a:srgbClr>
                 </a:solidFill>
                 <a:latin typeface="+mn-lt"/>
@@ -2800,7 +2824,7 @@
               <a:buNone/>
               <a:defRPr lang="th-TH" sz="2000" b="1" dirty="0">
                 <a:solidFill>
-                  <a:srgbClr val="23436D"/>
+                  <a:srgbClr val="333333"/>
                 </a:solidFill>
                 <a:latin typeface="+mj-lt"/>
                 <a:ea typeface="+mj-ea"/>
@@ -2818,7 +2842,7 @@
             <a:r>
               <a:rPr lang="th-TH" sz="2000" b="1" dirty="0">
                 <a:solidFill>
-                  <a:srgbClr val="23436D"/>
+                  <a:srgbClr val="333333"/>
                 </a:solidFill>
                 <a:latin typeface="+mj-lt"/>
                 <a:ea typeface="+mj-ea"/>
@@ -3610,7 +3634,7 @@
               <a:buNone/>
               <a:defRPr lang="th-TH" sz="1600" b="1" dirty="0">
                 <a:solidFill>
-                  <a:srgbClr val="23436D"/>
+                  <a:srgbClr val="333333"/>
                 </a:solidFill>
                 <a:latin typeface="+mj-lt"/>
                 <a:ea typeface="+mj-ea"/>
@@ -3628,7 +3652,7 @@
             <a:r>
               <a:rPr lang="th-TH" sz="1600" b="1" dirty="0">
                 <a:solidFill>
-                  <a:srgbClr val="23436D"/>
+                  <a:srgbClr val="333333"/>
                 </a:solidFill>
                 <a:latin typeface="+mj-lt"/>
                 <a:ea typeface="+mj-ea"/>
@@ -3848,7 +3872,7 @@
               <a:buNone/>
               <a:defRPr lang="th-TH" sz="1600" b="1" dirty="0">
                 <a:solidFill>
-                  <a:srgbClr val="23436D"/>
+                  <a:srgbClr val="333333"/>
                 </a:solidFill>
                 <a:latin typeface="+mj-lt"/>
                 <a:ea typeface="+mj-ea"/>
@@ -3866,7 +3890,7 @@
             <a:r>
               <a:rPr lang="th-TH" sz="1600" b="1" dirty="0">
                 <a:solidFill>
-                  <a:srgbClr val="23436D"/>
+                  <a:srgbClr val="333333"/>
                 </a:solidFill>
                 <a:latin typeface="+mj-lt"/>
                 <a:ea typeface="+mj-ea"/>
@@ -4086,7 +4110,7 @@
               <a:buNone/>
               <a:defRPr lang="th-TH" sz="1600" b="1" dirty="0">
                 <a:solidFill>
-                  <a:srgbClr val="23436D"/>
+                  <a:srgbClr val="333333"/>
                 </a:solidFill>
                 <a:latin typeface="+mj-lt"/>
                 <a:ea typeface="+mj-ea"/>
@@ -4104,7 +4128,7 @@
             <a:r>
               <a:rPr lang="th-TH" sz="1600" b="1" dirty="0">
                 <a:solidFill>
-                  <a:srgbClr val="23436D"/>
+                  <a:srgbClr val="333333"/>
                 </a:solidFill>
                 <a:latin typeface="+mj-lt"/>
                 <a:ea typeface="+mj-ea"/>
@@ -4324,7 +4348,7 @@
               <a:buNone/>
               <a:defRPr lang="th-TH" sz="1600" b="1" dirty="0">
                 <a:solidFill>
-                  <a:srgbClr val="23436D"/>
+                  <a:srgbClr val="333333"/>
                 </a:solidFill>
                 <a:latin typeface="+mj-lt"/>
                 <a:ea typeface="+mj-ea"/>
@@ -4342,7 +4366,7 @@
             <a:r>
               <a:rPr lang="th-TH" sz="1600" b="1" dirty="0">
                 <a:solidFill>
-                  <a:srgbClr val="23436D"/>
+                  <a:srgbClr val="333333"/>
                 </a:solidFill>
                 <a:latin typeface="+mj-lt"/>
                 <a:ea typeface="+mj-ea"/>
@@ -4432,7 +4456,7 @@
             <a:avLst/>
           </a:prstGeom>
           <a:solidFill>
-            <a:srgbClr val="23436D"/>
+            <a:srgbClr val="193B36"/>
           </a:solidFill>
           <a:ln>
             <a:noFill/>
@@ -5133,7 +5157,7 @@
               <a:buNone/>
               <a:defRPr lang="th-TH" sz="1600" b="1" dirty="0">
                 <a:solidFill>
-                  <a:srgbClr val="23436D"/>
+                  <a:srgbClr val="333333"/>
                 </a:solidFill>
                 <a:latin typeface="+mj-lt"/>
                 <a:ea typeface="+mj-ea"/>
@@ -5151,7 +5175,7 @@
             <a:r>
               <a:rPr lang="th-TH" sz="1600" b="1" dirty="0">
                 <a:solidFill>
-                  <a:srgbClr val="23436D"/>
+                  <a:srgbClr val="333333"/>
                 </a:solidFill>
                 <a:latin typeface="+mj-lt"/>
                 <a:ea typeface="+mj-ea"/>
@@ -5394,7 +5418,7 @@
               <a:buNone/>
               <a:defRPr lang="th-TH" sz="1600" b="1" dirty="0">
                 <a:solidFill>
-                  <a:srgbClr val="23436D"/>
+                  <a:srgbClr val="333333"/>
                 </a:solidFill>
                 <a:latin typeface="+mj-lt"/>
                 <a:ea typeface="+mj-ea"/>
@@ -5412,7 +5436,7 @@
             <a:r>
               <a:rPr lang="th-TH" sz="1600" b="1" dirty="0">
                 <a:solidFill>
-                  <a:srgbClr val="23436D"/>
+                  <a:srgbClr val="333333"/>
                 </a:solidFill>
                 <a:latin typeface="+mj-lt"/>
                 <a:ea typeface="+mj-ea"/>
@@ -5655,7 +5679,7 @@
               <a:buNone/>
               <a:defRPr lang="th-TH" sz="1600" b="1" dirty="0">
                 <a:solidFill>
-                  <a:srgbClr val="23436D"/>
+                  <a:srgbClr val="333333"/>
                 </a:solidFill>
                 <a:latin typeface="+mj-lt"/>
                 <a:ea typeface="+mj-ea"/>
@@ -5673,7 +5697,7 @@
             <a:r>
               <a:rPr lang="th-TH" sz="1600" b="1" dirty="0">
                 <a:solidFill>
-                  <a:srgbClr val="23436D"/>
+                  <a:srgbClr val="333333"/>
                 </a:solidFill>
                 <a:latin typeface="+mj-lt"/>
                 <a:ea typeface="+mj-ea"/>
@@ -5916,7 +5940,7 @@
               <a:buNone/>
               <a:defRPr lang="th-TH" sz="1600" b="1" dirty="0">
                 <a:solidFill>
-                  <a:srgbClr val="23436D"/>
+                  <a:srgbClr val="333333"/>
                 </a:solidFill>
                 <a:latin typeface="+mj-lt"/>
                 <a:ea typeface="+mj-ea"/>
@@ -5934,7 +5958,7 @@
             <a:r>
               <a:rPr lang="th-TH" sz="1600" b="1" dirty="0">
                 <a:solidFill>
-                  <a:srgbClr val="23436D"/>
+                  <a:srgbClr val="333333"/>
                 </a:solidFill>
                 <a:latin typeface="+mj-lt"/>
                 <a:ea typeface="+mj-ea"/>
@@ -6177,7 +6201,7 @@
               <a:buNone/>
               <a:defRPr lang="th-TH" sz="1600" b="1" dirty="0">
                 <a:solidFill>
-                  <a:srgbClr val="23436D"/>
+                  <a:srgbClr val="333333"/>
                 </a:solidFill>
                 <a:latin typeface="+mj-lt"/>
                 <a:ea typeface="+mj-ea"/>
@@ -6195,7 +6219,7 @@
             <a:r>
               <a:rPr lang="th-TH" sz="1600" b="1" dirty="0">
                 <a:solidFill>
-                  <a:srgbClr val="23436D"/>
+                  <a:srgbClr val="333333"/>
                 </a:solidFill>
                 <a:latin typeface="+mj-lt"/>
                 <a:ea typeface="+mj-ea"/>
@@ -7300,7 +7324,7 @@
     <p:bg>
       <p:bgPr>
         <a:solidFill>
-          <a:srgbClr val="23436D"/>
+          <a:srgbClr val="193B36"/>
         </a:solidFill>
         <a:effectLst/>
       </p:bgPr>
@@ -7360,22 +7384,22 @@
           <a:gradFill rotWithShape="1">
             <a:gsLst>
               <a:gs pos="0">
-                <a:srgbClr val="23436D">
+                <a:srgbClr val="193B36">
                   <a:alpha val="100000"/>
                 </a:srgbClr>
               </a:gs>
               <a:gs pos="26000">
-                <a:srgbClr val="23436D">
+                <a:srgbClr val="193B36">
                   <a:alpha val="84000"/>
                 </a:srgbClr>
               </a:gs>
               <a:gs pos="62000">
-                <a:srgbClr val="23436D">
+                <a:srgbClr val="193B36">
                   <a:alpha val="30000"/>
                 </a:srgbClr>
               </a:gs>
               <a:gs pos="100000">
-                <a:srgbClr val="23436D">
+                <a:srgbClr val="193B36">
                   <a:alpha val="12000"/>
                 </a:srgbClr>
               </a:gs>
@@ -7411,17 +7435,17 @@
           <a:gradFill rotWithShape="1">
             <a:gsLst>
               <a:gs pos="0">
-                <a:srgbClr val="23436D">
+                <a:srgbClr val="193B36">
                   <a:alpha val="0"/>
                 </a:srgbClr>
               </a:gs>
               <a:gs pos="55000">
-                <a:srgbClr val="23436D">
+                <a:srgbClr val="193B36">
                   <a:alpha val="60000"/>
                 </a:srgbClr>
               </a:gs>
               <a:gs pos="100000">
-                <a:srgbClr val="23436D">
+                <a:srgbClr val="193B36">
                   <a:alpha val="90000"/>
                 </a:srgbClr>
               </a:gs>
@@ -7623,7 +7647,7 @@
               <a:defRPr lang="th-TH" sz="1800" dirty="0">
                 <a:solidFill>
                   <a:srgbClr val="FFFFFF">
-                    <a:alpha val="88000"/>
+                    <a:alpha val="92000"/>
                   </a:srgbClr>
                 </a:solidFill>
                 <a:latin typeface="+mn-lt"/>
@@ -7647,7 +7671,7 @@
               <a:defRPr lang="th-TH" sz="1800" dirty="0">
                 <a:solidFill>
                   <a:srgbClr val="FFFFFF">
-                    <a:alpha val="88000"/>
+                    <a:alpha val="92000"/>
                   </a:srgbClr>
                 </a:solidFill>
                 <a:latin typeface="+mn-lt"/>
@@ -7671,7 +7695,7 @@
               <a:defRPr lang="th-TH" sz="1800" dirty="0">
                 <a:solidFill>
                   <a:srgbClr val="FFFFFF">
-                    <a:alpha val="88000"/>
+                    <a:alpha val="92000"/>
                   </a:srgbClr>
                 </a:solidFill>
                 <a:latin typeface="+mn-lt"/>
@@ -7699,7 +7723,7 @@
               <a:rPr lang="th-TH" sz="1800" dirty="0">
                 <a:solidFill>
                   <a:srgbClr val="FFFFFF">
-                    <a:alpha val="88000"/>
+                    <a:alpha val="92000"/>
                   </a:srgbClr>
                 </a:solidFill>
                 <a:latin typeface="+mn-lt"/>
@@ -7728,7 +7752,7 @@
               <a:rPr lang="th-TH" sz="1800" dirty="0">
                 <a:solidFill>
                   <a:srgbClr val="FFFFFF">
-                    <a:alpha val="88000"/>
+                    <a:alpha val="92000"/>
                   </a:srgbClr>
                 </a:solidFill>
                 <a:latin typeface="+mn-lt"/>
@@ -7757,7 +7781,7 @@
               <a:rPr lang="th-TH" sz="1800" dirty="0">
                 <a:solidFill>
                   <a:srgbClr val="FFFFFF">
-                    <a:alpha val="88000"/>
+                    <a:alpha val="92000"/>
                   </a:srgbClr>
                 </a:solidFill>
                 <a:latin typeface="+mn-lt"/>
@@ -7953,7 +7977,7 @@
               <a:rPr lang="th-TH" sz="1000">
                 <a:solidFill>
                   <a:srgbClr val="FFFFFF">
-                    <a:alpha val="60000"/>
+                    <a:alpha val="72000"/>
                   </a:srgbClr>
                 </a:solidFill>
                 <a:latin typeface="+mn-lt"/>
@@ -9241,7 +9265,7 @@
           </a:prstGeom>
           <a:solidFill>
             <a:srgbClr val="FFFFFF">
-              <a:alpha val="32000"/>
+              <a:alpha val="28000"/>
             </a:srgbClr>
           </a:solidFill>
           <a:ln>
@@ -10015,7 +10039,7 @@
             <a:avLst/>
           </a:prstGeom>
           <a:solidFill>
-            <a:srgbClr val="23436D"/>
+            <a:srgbClr val="193B36"/>
           </a:solidFill>
           <a:ln>
             <a:noFill/>
@@ -10995,7 +11019,7 @@
               <a:buNone/>
               <a:defRPr lang="th-TH" sz="7200" b="1" dirty="0">
                 <a:solidFill>
-                  <a:srgbClr val="23436D"/>
+                  <a:srgbClr val="333333"/>
                 </a:solidFill>
                 <a:latin typeface="+mj-lt"/>
                 <a:ea typeface="+mj-ea"/>
@@ -11013,7 +11037,7 @@
             <a:r>
               <a:rPr lang="th-TH" sz="7200" b="1" dirty="0">
                 <a:solidFill>
-                  <a:srgbClr val="23436D"/>
+                  <a:srgbClr val="333333"/>
                 </a:solidFill>
                 <a:latin typeface="+mj-lt"/>
                 <a:ea typeface="+mj-ea"/>
@@ -11621,7 +11645,7 @@
     <p:bg>
       <p:bgPr>
         <a:solidFill>
-          <a:srgbClr val="23436D"/>
+          <a:srgbClr val="193B36"/>
         </a:solidFill>
         <a:effectLst/>
       </p:bgPr>
@@ -11681,22 +11705,22 @@
           <a:gradFill rotWithShape="1">
             <a:gsLst>
               <a:gs pos="0">
-                <a:srgbClr val="23436D">
+                <a:srgbClr val="193B36">
                   <a:alpha val="100000"/>
                 </a:srgbClr>
               </a:gs>
               <a:gs pos="26000">
-                <a:srgbClr val="23436D">
+                <a:srgbClr val="193B36">
                   <a:alpha val="84000"/>
                 </a:srgbClr>
               </a:gs>
               <a:gs pos="62000">
-                <a:srgbClr val="23436D">
+                <a:srgbClr val="193B36">
                   <a:alpha val="30000"/>
                 </a:srgbClr>
               </a:gs>
               <a:gs pos="100000">
-                <a:srgbClr val="23436D">
+                <a:srgbClr val="193B36">
                   <a:alpha val="12000"/>
                 </a:srgbClr>
               </a:gs>
@@ -11732,17 +11756,17 @@
           <a:gradFill rotWithShape="1">
             <a:gsLst>
               <a:gs pos="0">
-                <a:srgbClr val="23436D">
+                <a:srgbClr val="193B36">
                   <a:alpha val="0"/>
                 </a:srgbClr>
               </a:gs>
               <a:gs pos="55000">
-                <a:srgbClr val="23436D">
+                <a:srgbClr val="193B36">
                   <a:alpha val="60000"/>
                 </a:srgbClr>
               </a:gs>
               <a:gs pos="100000">
-                <a:srgbClr val="23436D">
+                <a:srgbClr val="193B36">
                   <a:alpha val="90000"/>
                 </a:srgbClr>
               </a:gs>
@@ -11936,7 +11960,7 @@
               <a:defRPr lang="th-TH" sz="1800" dirty="0">
                 <a:solidFill>
                   <a:srgbClr val="FFFFFF">
-                    <a:alpha val="78000"/>
+                    <a:alpha val="80000"/>
                   </a:srgbClr>
                 </a:solidFill>
                 <a:latin typeface="+mn-lt"/>
@@ -11956,7 +11980,7 @@
               <a:rPr lang="th-TH" sz="1800" dirty="0">
                 <a:solidFill>
                   <a:srgbClr val="FFFFFF">
-                    <a:alpha val="78000"/>
+                    <a:alpha val="80000"/>
                   </a:srgbClr>
                 </a:solidFill>
                 <a:latin typeface="+mn-lt"/>
@@ -12152,7 +12176,7 @@
               <a:rPr lang="th-TH" sz="1000">
                 <a:solidFill>
                   <a:srgbClr val="FFFFFF">
-                    <a:alpha val="60000"/>
+                    <a:alpha val="72000"/>
                   </a:srgbClr>
                 </a:solidFill>
                 <a:latin typeface="+mn-lt"/>
@@ -13625,7 +13649,7 @@
               <a:buNone/>
               <a:defRPr lang="th-TH" sz="2000" b="1" dirty="0">
                 <a:solidFill>
-                  <a:srgbClr val="23436D"/>
+                  <a:srgbClr val="333333"/>
                 </a:solidFill>
                 <a:latin typeface="+mj-lt"/>
                 <a:ea typeface="+mj-ea"/>
@@ -13643,7 +13667,7 @@
             <a:r>
               <a:rPr lang="th-TH" sz="2000" b="1" dirty="0">
                 <a:solidFill>
-                  <a:srgbClr val="23436D"/>
+                  <a:srgbClr val="333333"/>
                 </a:solidFill>
                 <a:latin typeface="+mj-lt"/>
                 <a:ea typeface="+mj-ea"/>
@@ -13807,7 +13831,7 @@
               <a:buNone/>
               <a:defRPr lang="th-TH" sz="2000" b="1" dirty="0">
                 <a:solidFill>
-                  <a:srgbClr val="23436D"/>
+                  <a:srgbClr val="333333"/>
                 </a:solidFill>
                 <a:latin typeface="+mj-lt"/>
                 <a:ea typeface="+mj-ea"/>
@@ -13825,7 +13849,7 @@
             <a:r>
               <a:rPr lang="th-TH" sz="2000" b="1" dirty="0">
                 <a:solidFill>
-                  <a:srgbClr val="23436D"/>
+                  <a:srgbClr val="333333"/>
                 </a:solidFill>
                 <a:latin typeface="+mj-lt"/>
                 <a:ea typeface="+mj-ea"/>
@@ -13989,7 +14013,7 @@
               <a:buNone/>
               <a:defRPr lang="th-TH" sz="2000" b="1" dirty="0">
                 <a:solidFill>
-                  <a:srgbClr val="23436D"/>
+                  <a:srgbClr val="333333"/>
                 </a:solidFill>
                 <a:latin typeface="+mj-lt"/>
                 <a:ea typeface="+mj-ea"/>
@@ -14007,7 +14031,7 @@
             <a:r>
               <a:rPr lang="th-TH" sz="2000" b="1" dirty="0">
                 <a:solidFill>
-                  <a:srgbClr val="23436D"/>
+                  <a:srgbClr val="333333"/>
                 </a:solidFill>
                 <a:latin typeface="+mj-lt"/>
                 <a:ea typeface="+mj-ea"/>
@@ -14479,7 +14503,7 @@
               <a:buNone/>
               <a:defRPr lang="th-TH" sz="7200" b="1" dirty="0">
                 <a:solidFill>
-                  <a:srgbClr val="23436D"/>
+                  <a:srgbClr val="333333"/>
                 </a:solidFill>
                 <a:latin typeface="+mj-lt"/>
                 <a:ea typeface="+mj-ea"/>
@@ -14497,7 +14521,7 @@
             <a:r>
               <a:rPr lang="th-TH" sz="7200" b="1" dirty="0">
                 <a:solidFill>
-                  <a:srgbClr val="23436D"/>
+                  <a:srgbClr val="333333"/>
                 </a:solidFill>
                 <a:latin typeface="+mj-lt"/>
                 <a:ea typeface="+mj-ea"/>
@@ -14624,7 +14648,7 @@
               <a:buNone/>
               <a:defRPr lang="th-TH" sz="7200" b="1" dirty="0">
                 <a:solidFill>
-                  <a:srgbClr val="23436D"/>
+                  <a:srgbClr val="333333"/>
                 </a:solidFill>
                 <a:latin typeface="+mj-lt"/>
                 <a:ea typeface="+mj-ea"/>
@@ -14642,7 +14666,7 @@
             <a:r>
               <a:rPr lang="th-TH" sz="7200" b="1" dirty="0">
                 <a:solidFill>
-                  <a:srgbClr val="23436D"/>
+                  <a:srgbClr val="333333"/>
                 </a:solidFill>
                 <a:latin typeface="+mj-lt"/>
                 <a:ea typeface="+mj-ea"/>
@@ -14769,7 +14793,7 @@
               <a:buNone/>
               <a:defRPr lang="th-TH" sz="7200" b="1" dirty="0">
                 <a:solidFill>
-                  <a:srgbClr val="23436D"/>
+                  <a:srgbClr val="333333"/>
                 </a:solidFill>
                 <a:latin typeface="+mj-lt"/>
                 <a:ea typeface="+mj-ea"/>
@@ -14787,7 +14811,7 @@
             <a:r>
               <a:rPr lang="th-TH" sz="7200" b="1" dirty="0">
                 <a:solidFill>
-                  <a:srgbClr val="23436D"/>
+                  <a:srgbClr val="333333"/>
                 </a:solidFill>
                 <a:latin typeface="+mj-lt"/>
                 <a:ea typeface="+mj-ea"/>
@@ -15212,7 +15236,7 @@
           <a:gradFill rotWithShape="1">
             <a:gsLst>
               <a:gs pos="0">
-                <a:srgbClr val="23436D"/>
+                <a:srgbClr val="193B36"/>
               </a:gs>
               <a:gs pos="100000">
                 <a:srgbClr val="006666"/>
@@ -15306,7 +15330,7 @@
               <a:buNone/>
               <a:defRPr lang="th-TH" sz="2800" dirty="0">
                 <a:solidFill>
-                  <a:srgbClr val="23436D"/>
+                  <a:srgbClr val="333333"/>
                 </a:solidFill>
                 <a:latin typeface="+mj-lt"/>
                 <a:ea typeface="+mj-ea"/>
@@ -15324,7 +15348,7 @@
             <a:r>
               <a:rPr lang="th-TH" sz="2800" dirty="0">
                 <a:solidFill>
-                  <a:srgbClr val="23436D"/>
+                  <a:srgbClr val="333333"/>
                 </a:solidFill>
                 <a:latin typeface="+mj-lt"/>
                 <a:ea typeface="+mj-ea"/>
@@ -16101,7 +16125,7 @@
               <a:rPr lang="th-TH" sz="1000">
                 <a:solidFill>
                   <a:srgbClr val="FFFFFF">
-                    <a:alpha val="60000"/>
+                    <a:alpha val="72000"/>
                   </a:srgbClr>
                 </a:solidFill>
                 <a:latin typeface="+mn-lt"/>
@@ -17735,7 +17759,7 @@
             <a:avLst/>
           </a:prstGeom>
           <a:solidFill>
-            <a:srgbClr val="23436D"/>
+            <a:srgbClr val="193B36"/>
           </a:solidFill>
           <a:ln>
             <a:noFill/>
@@ -17932,7 +17956,7 @@
             <a:avLst/>
           </a:prstGeom>
           <a:solidFill>
-            <a:srgbClr val="23436D"/>
+            <a:srgbClr val="193B36"/>
           </a:solidFill>
           <a:ln>
             <a:noFill/>
